--- a/content/docs/theory-analysis/nvidia-gpu-architecture/images/images.pptx
+++ b/content/docs/theory-analysis/nvidia-gpu-architecture/images/images.pptx
@@ -5,14 +5,15 @@
     <p:sldMasterId id="2147483648" r:id="rId1"/>
   </p:sldMasterIdLst>
   <p:notesMasterIdLst>
-    <p:notesMasterId r:id="rId7"/>
+    <p:notesMasterId r:id="rId8"/>
   </p:notesMasterIdLst>
   <p:sldIdLst>
     <p:sldId id="422" r:id="rId2"/>
     <p:sldId id="423" r:id="rId3"/>
-    <p:sldId id="425" r:id="rId4"/>
-    <p:sldId id="424" r:id="rId5"/>
-    <p:sldId id="421" r:id="rId6"/>
+    <p:sldId id="426" r:id="rId4"/>
+    <p:sldId id="425" r:id="rId5"/>
+    <p:sldId id="424" r:id="rId6"/>
+    <p:sldId id="421" r:id="rId7"/>
   </p:sldIdLst>
   <p:sldSz cx="9144000" cy="5143500" type="screen16x9"/>
   <p:notesSz cx="6858000" cy="9144000"/>
@@ -217,7 +218,7 @@
           <a:p>
             <a:fld id="{6CD5550B-26C4-49A9-A5BA-636EF7BE6CE9}" type="datetimeFigureOut">
               <a:rPr lang="ko-KR" altLang="en-US" smtClean="0"/>
-              <a:t>2026. 3. 15.</a:t>
+              <a:t>2026. 3. 18.</a:t>
             </a:fld>
             <a:endParaRPr lang="ko-KR" altLang="en-US"/>
           </a:p>
@@ -633,7 +634,7 @@
           <a:p>
             <a:fld id="{BA5DFA43-8D57-47FB-BC46-057616015C3B}" type="slidenum">
               <a:rPr lang="ko-KR" altLang="en-US" smtClean="0"/>
-              <a:t>5</a:t>
+              <a:t>6</a:t>
             </a:fld>
             <a:endParaRPr lang="ko-KR" altLang="en-US"/>
           </a:p>
@@ -831,7 +832,7 @@
           <a:p>
             <a:fld id="{FB30EDBD-1C2D-4C1E-B459-B60219FAB484}" type="datetimeFigureOut">
               <a:rPr lang="ko-KR" altLang="en-US" smtClean="0"/>
-              <a:t>2026. 3. 15.</a:t>
+              <a:t>2026. 3. 19.</a:t>
             </a:fld>
             <a:endParaRPr lang="ko-KR" altLang="en-US"/>
           </a:p>
@@ -994,7 +995,7 @@
           <a:p>
             <a:fld id="{FB30EDBD-1C2D-4C1E-B459-B60219FAB484}" type="datetimeFigureOut">
               <a:rPr lang="ko-KR" altLang="en-US" smtClean="0"/>
-              <a:t>2026. 3. 15.</a:t>
+              <a:t>2026. 3. 19.</a:t>
             </a:fld>
             <a:endParaRPr lang="ko-KR" altLang="en-US"/>
           </a:p>
@@ -1167,7 +1168,7 @@
           <a:p>
             <a:fld id="{FB30EDBD-1C2D-4C1E-B459-B60219FAB484}" type="datetimeFigureOut">
               <a:rPr lang="ko-KR" altLang="en-US" smtClean="0"/>
-              <a:t>2026. 3. 15.</a:t>
+              <a:t>2026. 3. 19.</a:t>
             </a:fld>
             <a:endParaRPr lang="ko-KR" altLang="en-US"/>
           </a:p>
@@ -1330,7 +1331,7 @@
           <a:p>
             <a:fld id="{FB30EDBD-1C2D-4C1E-B459-B60219FAB484}" type="datetimeFigureOut">
               <a:rPr lang="ko-KR" altLang="en-US" smtClean="0"/>
-              <a:t>2026. 3. 15.</a:t>
+              <a:t>2026. 3. 18.</a:t>
             </a:fld>
             <a:endParaRPr lang="ko-KR" altLang="en-US"/>
           </a:p>
@@ -1570,7 +1571,7 @@
           <a:p>
             <a:fld id="{FB30EDBD-1C2D-4C1E-B459-B60219FAB484}" type="datetimeFigureOut">
               <a:rPr lang="ko-KR" altLang="en-US" smtClean="0"/>
-              <a:t>2026. 3. 15.</a:t>
+              <a:t>2026. 3. 19.</a:t>
             </a:fld>
             <a:endParaRPr lang="ko-KR" altLang="en-US"/>
           </a:p>
@@ -1850,7 +1851,7 @@
           <a:p>
             <a:fld id="{FB30EDBD-1C2D-4C1E-B459-B60219FAB484}" type="datetimeFigureOut">
               <a:rPr lang="ko-KR" altLang="en-US" smtClean="0"/>
-              <a:t>2026. 3. 15.</a:t>
+              <a:t>2026. 3. 19.</a:t>
             </a:fld>
             <a:endParaRPr lang="ko-KR" altLang="en-US"/>
           </a:p>
@@ -2264,7 +2265,7 @@
           <a:p>
             <a:fld id="{FB30EDBD-1C2D-4C1E-B459-B60219FAB484}" type="datetimeFigureOut">
               <a:rPr lang="ko-KR" altLang="en-US" smtClean="0"/>
-              <a:t>2026. 3. 15.</a:t>
+              <a:t>2026. 3. 19.</a:t>
             </a:fld>
             <a:endParaRPr lang="ko-KR" altLang="en-US"/>
           </a:p>
@@ -2376,7 +2377,7 @@
           <a:p>
             <a:fld id="{FB30EDBD-1C2D-4C1E-B459-B60219FAB484}" type="datetimeFigureOut">
               <a:rPr lang="ko-KR" altLang="en-US" smtClean="0"/>
-              <a:t>2026. 3. 15.</a:t>
+              <a:t>2026. 3. 19.</a:t>
             </a:fld>
             <a:endParaRPr lang="ko-KR" altLang="en-US"/>
           </a:p>
@@ -2466,7 +2467,7 @@
           <a:p>
             <a:fld id="{FB30EDBD-1C2D-4C1E-B459-B60219FAB484}" type="datetimeFigureOut">
               <a:rPr lang="ko-KR" altLang="en-US" smtClean="0"/>
-              <a:t>2026. 3. 15.</a:t>
+              <a:t>2026. 3. 18.</a:t>
             </a:fld>
             <a:endParaRPr lang="ko-KR" altLang="en-US"/>
           </a:p>
@@ -2736,7 +2737,7 @@
           <a:p>
             <a:fld id="{FB30EDBD-1C2D-4C1E-B459-B60219FAB484}" type="datetimeFigureOut">
               <a:rPr lang="ko-KR" altLang="en-US" smtClean="0"/>
-              <a:t>2026. 3. 15.</a:t>
+              <a:t>2026. 3. 19.</a:t>
             </a:fld>
             <a:endParaRPr lang="ko-KR" altLang="en-US"/>
           </a:p>
@@ -2983,7 +2984,7 @@
           <a:p>
             <a:fld id="{FB30EDBD-1C2D-4C1E-B459-B60219FAB484}" type="datetimeFigureOut">
               <a:rPr lang="ko-KR" altLang="en-US" smtClean="0"/>
-              <a:t>2026. 3. 15.</a:t>
+              <a:t>2026. 3. 19.</a:t>
             </a:fld>
             <a:endParaRPr lang="ko-KR" altLang="en-US"/>
           </a:p>
@@ -3189,7 +3190,7 @@
           <a:p>
             <a:fld id="{FB30EDBD-1C2D-4C1E-B459-B60219FAB484}" type="datetimeFigureOut">
               <a:rPr lang="ko-KR" altLang="en-US" smtClean="0"/>
-              <a:t>2026. 3. 15.</a:t>
+              <a:t>2026. 3. 18.</a:t>
             </a:fld>
             <a:endParaRPr lang="ko-KR" altLang="en-US"/>
           </a:p>
@@ -3624,7 +3625,7 @@
                   <a:schemeClr val="tx1"/>
                 </a:solidFill>
               </a:rPr>
-              <a:t>(512bit)</a:t>
+              <a:t>(512 bit)</a:t>
             </a:r>
             <a:endParaRPr kumimoji="1" lang="ko-KR" altLang="en-US" sz="600">
               <a:solidFill>
@@ -3699,7 +3700,7 @@
                   <a:schemeClr val="tx1"/>
                 </a:solidFill>
               </a:rPr>
-              <a:t>(512bit)</a:t>
+              <a:t>(512 bit)</a:t>
             </a:r>
             <a:endParaRPr kumimoji="1" lang="ko-KR" altLang="en-US" sz="600">
               <a:solidFill>
@@ -3774,7 +3775,7 @@
                   <a:schemeClr val="tx1"/>
                 </a:solidFill>
               </a:rPr>
-              <a:t>(512bit)</a:t>
+              <a:t>(512 bit)</a:t>
             </a:r>
             <a:endParaRPr kumimoji="1" lang="ko-KR" altLang="en-US" sz="600">
               <a:solidFill>
@@ -3849,7 +3850,7 @@
                   <a:schemeClr val="tx1"/>
                 </a:solidFill>
               </a:rPr>
-              <a:t>(512bit)</a:t>
+              <a:t>(512 bit)</a:t>
             </a:r>
             <a:endParaRPr kumimoji="1" lang="ko-KR" altLang="en-US" sz="600">
               <a:solidFill>
@@ -3924,7 +3925,7 @@
                   <a:schemeClr val="tx1"/>
                 </a:solidFill>
               </a:rPr>
-              <a:t>(512bit)</a:t>
+              <a:t>(512 bit)</a:t>
             </a:r>
             <a:endParaRPr kumimoji="1" lang="ko-KR" altLang="en-US" sz="600">
               <a:solidFill>
@@ -3999,7 +4000,7 @@
                   <a:schemeClr val="tx1"/>
                 </a:solidFill>
               </a:rPr>
-              <a:t>(512bit)</a:t>
+              <a:t>(512 bit)</a:t>
             </a:r>
             <a:endParaRPr kumimoji="1" lang="ko-KR" altLang="en-US" sz="600">
               <a:solidFill>
@@ -9297,7 +9298,7 @@
                   <a:schemeClr val="tx1"/>
                 </a:solidFill>
               </a:rPr>
-              <a:t>(512bit)</a:t>
+              <a:t>(512 bit)</a:t>
             </a:r>
             <a:endParaRPr kumimoji="1" lang="ko-KR" altLang="en-US" sz="600">
               <a:solidFill>
@@ -9372,7 +9373,7 @@
                   <a:schemeClr val="tx1"/>
                 </a:solidFill>
               </a:rPr>
-              <a:t>(512bit)</a:t>
+              <a:t>(512 bit)</a:t>
             </a:r>
             <a:endParaRPr kumimoji="1" lang="ko-KR" altLang="en-US" sz="600">
               <a:solidFill>
@@ -9498,6 +9499,17 @@
               </a:rPr>
               <a:t>HBM3</a:t>
             </a:r>
+          </a:p>
+          <a:p>
+            <a:pPr algn="ctr"/>
+            <a:r>
+              <a:rPr kumimoji="1" lang="en-US" altLang="ko-KR" sz="600">
+                <a:solidFill>
+                  <a:schemeClr val="tx1"/>
+                </a:solidFill>
+              </a:rPr>
+              <a:t>(16 GB)</a:t>
+            </a:r>
             <a:endParaRPr kumimoji="1" lang="ko-KR" altLang="en-US" sz="600">
               <a:solidFill>
                 <a:schemeClr val="tx1"/>
@@ -9571,7 +9583,7 @@
                   <a:schemeClr val="tx1"/>
                 </a:solidFill>
               </a:rPr>
-              <a:t>(512bit)</a:t>
+              <a:t>(512 bit)</a:t>
             </a:r>
             <a:endParaRPr kumimoji="1" lang="ko-KR" altLang="en-US" sz="600">
               <a:solidFill>
@@ -9646,7 +9658,7 @@
                   <a:schemeClr val="tx1"/>
                 </a:solidFill>
               </a:rPr>
-              <a:t>(512bit)</a:t>
+              <a:t>(512 bit)</a:t>
             </a:r>
             <a:endParaRPr kumimoji="1" lang="ko-KR" altLang="en-US" sz="600">
               <a:solidFill>
@@ -9712,6 +9724,17 @@
               </a:rPr>
               <a:t>HBM3</a:t>
             </a:r>
+          </a:p>
+          <a:p>
+            <a:pPr algn="ctr"/>
+            <a:r>
+              <a:rPr kumimoji="1" lang="en-US" altLang="ko-KR" sz="600">
+                <a:solidFill>
+                  <a:schemeClr val="tx1"/>
+                </a:solidFill>
+              </a:rPr>
+              <a:t>(16 GB)</a:t>
+            </a:r>
             <a:endParaRPr kumimoji="1" lang="ko-KR" altLang="en-US" sz="600">
               <a:solidFill>
                 <a:schemeClr val="tx1"/>
@@ -9785,7 +9808,7 @@
                   <a:schemeClr val="tx1"/>
                 </a:solidFill>
               </a:rPr>
-              <a:t>(512bit)</a:t>
+              <a:t>(512 bit)</a:t>
             </a:r>
             <a:endParaRPr kumimoji="1" lang="ko-KR" altLang="en-US" sz="600">
               <a:solidFill>
@@ -9860,7 +9883,7 @@
                   <a:schemeClr val="tx1"/>
                 </a:solidFill>
               </a:rPr>
-              <a:t>(512bit)</a:t>
+              <a:t>(512 bit)</a:t>
             </a:r>
             <a:endParaRPr kumimoji="1" lang="ko-KR" altLang="en-US" sz="600">
               <a:solidFill>
@@ -9926,6 +9949,17 @@
               </a:rPr>
               <a:t>HBM3</a:t>
             </a:r>
+          </a:p>
+          <a:p>
+            <a:pPr algn="ctr"/>
+            <a:r>
+              <a:rPr kumimoji="1" lang="en-US" altLang="ko-KR" sz="600">
+                <a:solidFill>
+                  <a:schemeClr val="tx1"/>
+                </a:solidFill>
+              </a:rPr>
+              <a:t>(16 GB)</a:t>
+            </a:r>
             <a:endParaRPr kumimoji="1" lang="ko-KR" altLang="en-US" sz="600">
               <a:solidFill>
                 <a:schemeClr val="tx1"/>
@@ -9989,6 +10023,17 @@
                 </a:solidFill>
               </a:rPr>
               <a:t>HBM3</a:t>
+            </a:r>
+          </a:p>
+          <a:p>
+            <a:pPr algn="ctr"/>
+            <a:r>
+              <a:rPr kumimoji="1" lang="en-US" altLang="ko-KR" sz="600">
+                <a:solidFill>
+                  <a:schemeClr val="tx1"/>
+                </a:solidFill>
+              </a:rPr>
+              <a:t>(16 GB)</a:t>
             </a:r>
             <a:endParaRPr kumimoji="1" lang="ko-KR" altLang="en-US" sz="600">
               <a:solidFill>
@@ -10054,6 +10099,17 @@
               </a:rPr>
               <a:t>HBM3</a:t>
             </a:r>
+          </a:p>
+          <a:p>
+            <a:pPr algn="ctr"/>
+            <a:r>
+              <a:rPr kumimoji="1" lang="en-US" altLang="ko-KR" sz="600">
+                <a:solidFill>
+                  <a:schemeClr val="tx1"/>
+                </a:solidFill>
+              </a:rPr>
+              <a:t>(16 GB)</a:t>
+            </a:r>
             <a:endParaRPr kumimoji="1" lang="ko-KR" altLang="en-US" sz="600">
               <a:solidFill>
                 <a:schemeClr val="tx1"/>
@@ -10117,6 +10173,17 @@
                 </a:solidFill>
               </a:rPr>
               <a:t>HBM3</a:t>
+            </a:r>
+          </a:p>
+          <a:p>
+            <a:pPr algn="ctr"/>
+            <a:r>
+              <a:rPr kumimoji="1" lang="en-US" altLang="ko-KR" sz="600">
+                <a:solidFill>
+                  <a:schemeClr val="tx1"/>
+                </a:solidFill>
+              </a:rPr>
+              <a:t>(16 GB)</a:t>
             </a:r>
             <a:endParaRPr kumimoji="1" lang="ko-KR" altLang="en-US" sz="600">
               <a:solidFill>
@@ -25897,6 +25964,42 @@
         <p:cNvPr id="1" name="">
           <a:extLst>
             <a:ext uri="{FF2B5EF4-FFF2-40B4-BE49-F238E27FC236}">
+              <a16:creationId xmlns:a16="http://schemas.microsoft.com/office/drawing/2014/main" id="{8DC1FB02-14B6-CDC1-5F9C-9E28B08EFF13}"/>
+            </a:ext>
+          </a:extLst>
+        </p:cNvPr>
+        <p:cNvGrpSpPr/>
+        <p:nvPr/>
+      </p:nvGrpSpPr>
+      <p:grpSpPr>
+        <a:xfrm>
+          <a:off x="0" y="0"/>
+          <a:ext cx="0" cy="0"/>
+          <a:chOff x="0" y="0"/>
+          <a:chExt cx="0" cy="0"/>
+        </a:xfrm>
+      </p:grpSpPr>
+    </p:spTree>
+    <p:extLst>
+      <p:ext uri="{BB962C8B-B14F-4D97-AF65-F5344CB8AC3E}">
+        <p14:creationId xmlns:p14="http://schemas.microsoft.com/office/powerpoint/2010/main" val="1187085379"/>
+      </p:ext>
+    </p:extLst>
+  </p:cSld>
+  <p:clrMapOvr>
+    <a:masterClrMapping/>
+  </p:clrMapOvr>
+</p:sld>
+</file>
+
+<file path=ppt/slides/slide4.xml><?xml version="1.0" encoding="utf-8"?>
+<p:sld xmlns:a="http://schemas.openxmlformats.org/drawingml/2006/main" xmlns:r="http://schemas.openxmlformats.org/officeDocument/2006/relationships" xmlns:p="http://schemas.openxmlformats.org/presentationml/2006/main">
+  <p:cSld>
+    <p:spTree>
+      <p:nvGrpSpPr>
+        <p:cNvPr id="1" name="">
+          <a:extLst>
+            <a:ext uri="{FF2B5EF4-FFF2-40B4-BE49-F238E27FC236}">
               <a16:creationId xmlns:a16="http://schemas.microsoft.com/office/drawing/2014/main" id="{2CFE86C4-25CA-E820-CB12-715A11BBAF7C}"/>
             </a:ext>
           </a:extLst>
@@ -37669,7 +37772,7 @@
 </p:sld>
 </file>
 
-<file path=ppt/slides/slide4.xml><?xml version="1.0" encoding="utf-8"?>
+<file path=ppt/slides/slide5.xml><?xml version="1.0" encoding="utf-8"?>
 <p:sld xmlns:a="http://schemas.openxmlformats.org/drawingml/2006/main" xmlns:r="http://schemas.openxmlformats.org/officeDocument/2006/relationships" xmlns:p="http://schemas.openxmlformats.org/presentationml/2006/main">
   <p:cSld>
     <p:spTree>
@@ -38926,7 +39029,7 @@
 </p:sld>
 </file>
 
-<file path=ppt/slides/slide5.xml><?xml version="1.0" encoding="utf-8"?>
+<file path=ppt/slides/slide6.xml><?xml version="1.0" encoding="utf-8"?>
 <p:sld xmlns:a="http://schemas.openxmlformats.org/drawingml/2006/main" xmlns:r="http://schemas.openxmlformats.org/officeDocument/2006/relationships" xmlns:p="http://schemas.openxmlformats.org/presentationml/2006/main">
   <p:cSld>
     <p:spTree>

--- a/content/docs/theory-analysis/nvidia-gpu-architecture/images/images.pptx
+++ b/content/docs/theory-analysis/nvidia-gpu-architecture/images/images.pptx
@@ -25907,6 +25907,96 @@
           </a:p>
         </p:txBody>
       </p:sp>
+      <p:cxnSp>
+        <p:nvCxnSpPr>
+          <p:cNvPr id="4" name="직선 연결선[R] 3">
+            <a:extLst>
+              <a:ext uri="{FF2B5EF4-FFF2-40B4-BE49-F238E27FC236}">
+                <a16:creationId xmlns:a16="http://schemas.microsoft.com/office/drawing/2014/main" id="{7440C7C5-B5A0-5AF9-69D4-9B3C3CAE4523}"/>
+              </a:ext>
+            </a:extLst>
+          </p:cNvPr>
+          <p:cNvCxnSpPr>
+            <a:cxnSpLocks/>
+            <a:stCxn id="634" idx="1"/>
+          </p:cNvCxnSpPr>
+          <p:nvPr/>
+        </p:nvCxnSpPr>
+        <p:spPr>
+          <a:xfrm flipH="1">
+            <a:off x="6265726" y="813063"/>
+            <a:ext cx="1366431" cy="1073375"/>
+          </a:xfrm>
+          <a:prstGeom prst="line">
+            <a:avLst/>
+          </a:prstGeom>
+          <a:ln w="12700">
+            <a:solidFill>
+              <a:schemeClr val="tx1"/>
+            </a:solidFill>
+            <a:prstDash val="dash"/>
+          </a:ln>
+        </p:spPr>
+        <p:style>
+          <a:lnRef idx="1">
+            <a:schemeClr val="accent1"/>
+          </a:lnRef>
+          <a:fillRef idx="0">
+            <a:schemeClr val="accent1"/>
+          </a:fillRef>
+          <a:effectRef idx="0">
+            <a:schemeClr val="accent1"/>
+          </a:effectRef>
+          <a:fontRef idx="minor">
+            <a:schemeClr val="tx1"/>
+          </a:fontRef>
+        </p:style>
+      </p:cxnSp>
+      <p:cxnSp>
+        <p:nvCxnSpPr>
+          <p:cNvPr id="10" name="직선 연결선[R] 9">
+            <a:extLst>
+              <a:ext uri="{FF2B5EF4-FFF2-40B4-BE49-F238E27FC236}">
+                <a16:creationId xmlns:a16="http://schemas.microsoft.com/office/drawing/2014/main" id="{972A4329-4026-A4A2-1430-9DE30291A644}"/>
+              </a:ext>
+            </a:extLst>
+          </p:cNvPr>
+          <p:cNvCxnSpPr>
+            <a:cxnSpLocks/>
+            <a:stCxn id="634" idx="3"/>
+          </p:cNvCxnSpPr>
+          <p:nvPr/>
+        </p:nvCxnSpPr>
+        <p:spPr>
+          <a:xfrm>
+            <a:off x="8835149" y="813063"/>
+            <a:ext cx="55606" cy="1080222"/>
+          </a:xfrm>
+          <a:prstGeom prst="line">
+            <a:avLst/>
+          </a:prstGeom>
+          <a:ln w="12700">
+            <a:solidFill>
+              <a:schemeClr val="tx1"/>
+            </a:solidFill>
+            <a:prstDash val="dash"/>
+          </a:ln>
+        </p:spPr>
+        <p:style>
+          <a:lnRef idx="1">
+            <a:schemeClr val="accent1"/>
+          </a:lnRef>
+          <a:fillRef idx="0">
+            <a:schemeClr val="accent1"/>
+          </a:fillRef>
+          <a:effectRef idx="0">
+            <a:schemeClr val="accent1"/>
+          </a:effectRef>
+          <a:fontRef idx="minor">
+            <a:schemeClr val="tx1"/>
+          </a:fontRef>
+        </p:style>
+      </p:cxnSp>
     </p:spTree>
     <p:extLst>
       <p:ext uri="{BB962C8B-B14F-4D97-AF65-F5344CB8AC3E}">
@@ -25943,6 +26033,6162 @@
           <a:chExt cx="0" cy="0"/>
         </a:xfrm>
       </p:grpSpPr>
+      <p:cxnSp>
+        <p:nvCxnSpPr>
+          <p:cNvPr id="336" name="직선 화살표 연결선 335">
+            <a:extLst>
+              <a:ext uri="{FF2B5EF4-FFF2-40B4-BE49-F238E27FC236}">
+                <a16:creationId xmlns:a16="http://schemas.microsoft.com/office/drawing/2014/main" id="{14E122AF-7F96-3E47-6E60-61FBC13342CD}"/>
+              </a:ext>
+            </a:extLst>
+          </p:cNvPr>
+          <p:cNvCxnSpPr>
+            <a:cxnSpLocks/>
+            <a:stCxn id="169" idx="1"/>
+            <a:endCxn id="132" idx="0"/>
+          </p:cNvCxnSpPr>
+          <p:nvPr/>
+        </p:nvCxnSpPr>
+        <p:spPr>
+          <a:xfrm flipH="1">
+            <a:off x="4572000" y="1569478"/>
+            <a:ext cx="2018805" cy="2537048"/>
+          </a:xfrm>
+          <a:prstGeom prst="straightConnector1">
+            <a:avLst/>
+          </a:prstGeom>
+          <a:ln>
+            <a:solidFill>
+              <a:schemeClr val="accent4">
+                <a:lumMod val="75000"/>
+              </a:schemeClr>
+            </a:solidFill>
+            <a:headEnd type="triangle"/>
+            <a:tailEnd type="triangle"/>
+          </a:ln>
+        </p:spPr>
+        <p:style>
+          <a:lnRef idx="1">
+            <a:schemeClr val="accent1"/>
+          </a:lnRef>
+          <a:fillRef idx="0">
+            <a:schemeClr val="accent1"/>
+          </a:fillRef>
+          <a:effectRef idx="0">
+            <a:schemeClr val="accent1"/>
+          </a:effectRef>
+          <a:fontRef idx="minor">
+            <a:schemeClr val="tx1"/>
+          </a:fontRef>
+        </p:style>
+      </p:cxnSp>
+      <p:cxnSp>
+        <p:nvCxnSpPr>
+          <p:cNvPr id="333" name="직선 화살표 연결선 332">
+            <a:extLst>
+              <a:ext uri="{FF2B5EF4-FFF2-40B4-BE49-F238E27FC236}">
+                <a16:creationId xmlns:a16="http://schemas.microsoft.com/office/drawing/2014/main" id="{4C24B79F-6CA0-9760-F3C9-B21CE2021AFD}"/>
+              </a:ext>
+            </a:extLst>
+          </p:cNvPr>
+          <p:cNvCxnSpPr>
+            <a:cxnSpLocks/>
+            <a:stCxn id="42" idx="3"/>
+            <a:endCxn id="132" idx="0"/>
+          </p:cNvCxnSpPr>
+          <p:nvPr/>
+        </p:nvCxnSpPr>
+        <p:spPr>
+          <a:xfrm>
+            <a:off x="2555777" y="1569478"/>
+            <a:ext cx="2016223" cy="2537048"/>
+          </a:xfrm>
+          <a:prstGeom prst="straightConnector1">
+            <a:avLst/>
+          </a:prstGeom>
+          <a:ln>
+            <a:solidFill>
+              <a:schemeClr val="accent4">
+                <a:lumMod val="75000"/>
+              </a:schemeClr>
+            </a:solidFill>
+            <a:headEnd type="triangle"/>
+            <a:tailEnd type="triangle"/>
+          </a:ln>
+        </p:spPr>
+        <p:style>
+          <a:lnRef idx="1">
+            <a:schemeClr val="accent1"/>
+          </a:lnRef>
+          <a:fillRef idx="0">
+            <a:schemeClr val="accent1"/>
+          </a:fillRef>
+          <a:effectRef idx="0">
+            <a:schemeClr val="accent1"/>
+          </a:effectRef>
+          <a:fontRef idx="minor">
+            <a:schemeClr val="tx1"/>
+          </a:fontRef>
+        </p:style>
+      </p:cxnSp>
+      <p:cxnSp>
+        <p:nvCxnSpPr>
+          <p:cNvPr id="56" name="직선 화살표 연결선 55">
+            <a:extLst>
+              <a:ext uri="{FF2B5EF4-FFF2-40B4-BE49-F238E27FC236}">
+                <a16:creationId xmlns:a16="http://schemas.microsoft.com/office/drawing/2014/main" id="{9742774F-5175-A192-49A8-2F07B1CD23C3}"/>
+              </a:ext>
+            </a:extLst>
+          </p:cNvPr>
+          <p:cNvCxnSpPr>
+            <a:cxnSpLocks/>
+            <a:stCxn id="42" idx="3"/>
+            <a:endCxn id="51" idx="1"/>
+          </p:cNvCxnSpPr>
+          <p:nvPr/>
+        </p:nvCxnSpPr>
+        <p:spPr>
+          <a:xfrm>
+            <a:off x="2555777" y="1569478"/>
+            <a:ext cx="432047" cy="176673"/>
+          </a:xfrm>
+          <a:prstGeom prst="straightConnector1">
+            <a:avLst/>
+          </a:prstGeom>
+          <a:ln>
+            <a:solidFill>
+              <a:schemeClr val="accent4">
+                <a:lumMod val="75000"/>
+              </a:schemeClr>
+            </a:solidFill>
+            <a:headEnd type="triangle"/>
+            <a:tailEnd type="triangle"/>
+          </a:ln>
+        </p:spPr>
+        <p:style>
+          <a:lnRef idx="1">
+            <a:schemeClr val="accent1"/>
+          </a:lnRef>
+          <a:fillRef idx="0">
+            <a:schemeClr val="accent1"/>
+          </a:fillRef>
+          <a:effectRef idx="0">
+            <a:schemeClr val="accent1"/>
+          </a:effectRef>
+          <a:fontRef idx="minor">
+            <a:schemeClr val="tx1"/>
+          </a:fontRef>
+        </p:style>
+      </p:cxnSp>
+      <p:sp>
+        <p:nvSpPr>
+          <p:cNvPr id="2" name="직사각형 1">
+            <a:extLst>
+              <a:ext uri="{FF2B5EF4-FFF2-40B4-BE49-F238E27FC236}">
+                <a16:creationId xmlns:a16="http://schemas.microsoft.com/office/drawing/2014/main" id="{1D16CA7F-330A-6692-13DE-925D5879A848}"/>
+              </a:ext>
+            </a:extLst>
+          </p:cNvPr>
+          <p:cNvSpPr/>
+          <p:nvPr/>
+        </p:nvSpPr>
+        <p:spPr>
+          <a:xfrm>
+            <a:off x="683570" y="478911"/>
+            <a:ext cx="720080" cy="476195"/>
+          </a:xfrm>
+          <a:prstGeom prst="rect">
+            <a:avLst/>
+          </a:prstGeom>
+          <a:solidFill>
+            <a:schemeClr val="bg2">
+              <a:lumMod val="90000"/>
+            </a:schemeClr>
+          </a:solidFill>
+          <a:ln w="12700"/>
+        </p:spPr>
+        <p:style>
+          <a:lnRef idx="2">
+            <a:schemeClr val="accent1">
+              <a:shade val="15000"/>
+            </a:schemeClr>
+          </a:lnRef>
+          <a:fillRef idx="1">
+            <a:schemeClr val="accent1"/>
+          </a:fillRef>
+          <a:effectRef idx="0">
+            <a:schemeClr val="accent1"/>
+          </a:effectRef>
+          <a:fontRef idx="minor">
+            <a:schemeClr val="lt1"/>
+          </a:fontRef>
+        </p:style>
+        <p:txBody>
+          <a:bodyPr rtlCol="0" anchor="ctr"/>
+          <a:lstStyle/>
+          <a:p>
+            <a:pPr algn="ctr"/>
+            <a:r>
+              <a:rPr kumimoji="1" lang="en-US" altLang="ko-KR" sz="700">
+                <a:solidFill>
+                  <a:schemeClr val="tx1"/>
+                </a:solidFill>
+              </a:rPr>
+              <a:t>NVMe</a:t>
+            </a:r>
+            <a:endParaRPr kumimoji="1" lang="ko-KR" altLang="en-US" sz="700">
+              <a:solidFill>
+                <a:schemeClr val="tx1"/>
+              </a:solidFill>
+            </a:endParaRPr>
+          </a:p>
+        </p:txBody>
+      </p:sp>
+      <p:sp>
+        <p:nvSpPr>
+          <p:cNvPr id="3" name="직사각형 2">
+            <a:extLst>
+              <a:ext uri="{FF2B5EF4-FFF2-40B4-BE49-F238E27FC236}">
+                <a16:creationId xmlns:a16="http://schemas.microsoft.com/office/drawing/2014/main" id="{A18B5803-C412-8284-D45E-DB21E598D5AD}"/>
+              </a:ext>
+            </a:extLst>
+          </p:cNvPr>
+          <p:cNvSpPr/>
+          <p:nvPr/>
+        </p:nvSpPr>
+        <p:spPr>
+          <a:xfrm>
+            <a:off x="611561" y="523058"/>
+            <a:ext cx="720080" cy="476195"/>
+          </a:xfrm>
+          <a:prstGeom prst="rect">
+            <a:avLst/>
+          </a:prstGeom>
+          <a:solidFill>
+            <a:schemeClr val="bg2">
+              <a:lumMod val="90000"/>
+            </a:schemeClr>
+          </a:solidFill>
+          <a:ln w="12700"/>
+        </p:spPr>
+        <p:style>
+          <a:lnRef idx="2">
+            <a:schemeClr val="accent1">
+              <a:shade val="15000"/>
+            </a:schemeClr>
+          </a:lnRef>
+          <a:fillRef idx="1">
+            <a:schemeClr val="accent1"/>
+          </a:fillRef>
+          <a:effectRef idx="0">
+            <a:schemeClr val="accent1"/>
+          </a:effectRef>
+          <a:fontRef idx="minor">
+            <a:schemeClr val="lt1"/>
+          </a:fontRef>
+        </p:style>
+        <p:txBody>
+          <a:bodyPr rtlCol="0" anchor="ctr"/>
+          <a:lstStyle/>
+          <a:p>
+            <a:pPr algn="ctr"/>
+            <a:r>
+              <a:rPr kumimoji="1" lang="en-US" altLang="ko-KR" sz="700">
+                <a:solidFill>
+                  <a:schemeClr val="tx1"/>
+                </a:solidFill>
+              </a:rPr>
+              <a:t>NVMe</a:t>
+            </a:r>
+            <a:endParaRPr kumimoji="1" lang="ko-KR" altLang="en-US" sz="700">
+              <a:solidFill>
+                <a:schemeClr val="tx1"/>
+              </a:solidFill>
+            </a:endParaRPr>
+          </a:p>
+        </p:txBody>
+      </p:sp>
+      <p:sp>
+        <p:nvSpPr>
+          <p:cNvPr id="4" name="직사각형 3">
+            <a:extLst>
+              <a:ext uri="{FF2B5EF4-FFF2-40B4-BE49-F238E27FC236}">
+                <a16:creationId xmlns:a16="http://schemas.microsoft.com/office/drawing/2014/main" id="{7318184A-B927-944A-EB19-18769AB36047}"/>
+              </a:ext>
+            </a:extLst>
+          </p:cNvPr>
+          <p:cNvSpPr/>
+          <p:nvPr/>
+        </p:nvSpPr>
+        <p:spPr>
+          <a:xfrm>
+            <a:off x="539552" y="567205"/>
+            <a:ext cx="720080" cy="476195"/>
+          </a:xfrm>
+          <a:prstGeom prst="rect">
+            <a:avLst/>
+          </a:prstGeom>
+          <a:solidFill>
+            <a:schemeClr val="bg2">
+              <a:lumMod val="90000"/>
+            </a:schemeClr>
+          </a:solidFill>
+          <a:ln w="12700"/>
+        </p:spPr>
+        <p:style>
+          <a:lnRef idx="2">
+            <a:schemeClr val="accent1">
+              <a:shade val="15000"/>
+            </a:schemeClr>
+          </a:lnRef>
+          <a:fillRef idx="1">
+            <a:schemeClr val="accent1"/>
+          </a:fillRef>
+          <a:effectRef idx="0">
+            <a:schemeClr val="accent1"/>
+          </a:effectRef>
+          <a:fontRef idx="minor">
+            <a:schemeClr val="lt1"/>
+          </a:fontRef>
+        </p:style>
+        <p:txBody>
+          <a:bodyPr rtlCol="0" anchor="ctr"/>
+          <a:lstStyle/>
+          <a:p>
+            <a:pPr algn="ctr"/>
+            <a:r>
+              <a:rPr kumimoji="1" lang="en-US" altLang="ko-KR" sz="700">
+                <a:solidFill>
+                  <a:schemeClr val="tx1"/>
+                </a:solidFill>
+              </a:rPr>
+              <a:t>NVMe</a:t>
+            </a:r>
+            <a:endParaRPr kumimoji="1" lang="ko-KR" altLang="en-US" sz="700">
+              <a:solidFill>
+                <a:schemeClr val="tx1"/>
+              </a:solidFill>
+            </a:endParaRPr>
+          </a:p>
+        </p:txBody>
+      </p:sp>
+      <p:sp>
+        <p:nvSpPr>
+          <p:cNvPr id="5" name="직사각형 4">
+            <a:extLst>
+              <a:ext uri="{FF2B5EF4-FFF2-40B4-BE49-F238E27FC236}">
+                <a16:creationId xmlns:a16="http://schemas.microsoft.com/office/drawing/2014/main" id="{3C845EE8-CC7E-B126-AB15-2D9A9C300C19}"/>
+              </a:ext>
+            </a:extLst>
+          </p:cNvPr>
+          <p:cNvSpPr/>
+          <p:nvPr/>
+        </p:nvSpPr>
+        <p:spPr>
+          <a:xfrm>
+            <a:off x="467543" y="611352"/>
+            <a:ext cx="720080" cy="476195"/>
+          </a:xfrm>
+          <a:prstGeom prst="rect">
+            <a:avLst/>
+          </a:prstGeom>
+          <a:solidFill>
+            <a:schemeClr val="bg2">
+              <a:lumMod val="90000"/>
+            </a:schemeClr>
+          </a:solidFill>
+          <a:ln w="12700"/>
+        </p:spPr>
+        <p:style>
+          <a:lnRef idx="2">
+            <a:schemeClr val="accent1">
+              <a:shade val="15000"/>
+            </a:schemeClr>
+          </a:lnRef>
+          <a:fillRef idx="1">
+            <a:schemeClr val="accent1"/>
+          </a:fillRef>
+          <a:effectRef idx="0">
+            <a:schemeClr val="accent1"/>
+          </a:effectRef>
+          <a:fontRef idx="minor">
+            <a:schemeClr val="lt1"/>
+          </a:fontRef>
+        </p:style>
+        <p:txBody>
+          <a:bodyPr rtlCol="0" anchor="ctr"/>
+          <a:lstStyle/>
+          <a:p>
+            <a:pPr algn="ctr"/>
+            <a:r>
+              <a:rPr kumimoji="1" lang="en-US" altLang="ko-KR" sz="800">
+                <a:solidFill>
+                  <a:schemeClr val="tx1"/>
+                </a:solidFill>
+              </a:rPr>
+              <a:t>Data Cache</a:t>
+            </a:r>
+          </a:p>
+          <a:p>
+            <a:pPr algn="ctr"/>
+            <a:r>
+              <a:rPr kumimoji="1" lang="en-US" altLang="ko-KR" sz="800">
+                <a:solidFill>
+                  <a:schemeClr val="tx1"/>
+                </a:solidFill>
+              </a:rPr>
+              <a:t>NVMe</a:t>
+            </a:r>
+          </a:p>
+          <a:p>
+            <a:pPr algn="ctr"/>
+            <a:r>
+              <a:rPr kumimoji="1" lang="en-US" altLang="ko-KR" sz="800">
+                <a:solidFill>
+                  <a:schemeClr val="tx1"/>
+                </a:solidFill>
+              </a:rPr>
+              <a:t>(3.84 TB)</a:t>
+            </a:r>
+          </a:p>
+        </p:txBody>
+      </p:sp>
+      <p:sp>
+        <p:nvSpPr>
+          <p:cNvPr id="6" name="직사각형 5">
+            <a:extLst>
+              <a:ext uri="{FF2B5EF4-FFF2-40B4-BE49-F238E27FC236}">
+                <a16:creationId xmlns:a16="http://schemas.microsoft.com/office/drawing/2014/main" id="{3157B81E-50C1-F22D-24BD-081D505622CF}"/>
+              </a:ext>
+            </a:extLst>
+          </p:cNvPr>
+          <p:cNvSpPr/>
+          <p:nvPr/>
+        </p:nvSpPr>
+        <p:spPr>
+          <a:xfrm>
+            <a:off x="1835697" y="478910"/>
+            <a:ext cx="720080" cy="476195"/>
+          </a:xfrm>
+          <a:prstGeom prst="rect">
+            <a:avLst/>
+          </a:prstGeom>
+          <a:solidFill>
+            <a:schemeClr val="accent4">
+              <a:lumMod val="20000"/>
+              <a:lumOff val="80000"/>
+            </a:schemeClr>
+          </a:solidFill>
+          <a:ln w="12700"/>
+        </p:spPr>
+        <p:style>
+          <a:lnRef idx="2">
+            <a:schemeClr val="accent1">
+              <a:shade val="15000"/>
+            </a:schemeClr>
+          </a:lnRef>
+          <a:fillRef idx="1">
+            <a:schemeClr val="accent1"/>
+          </a:fillRef>
+          <a:effectRef idx="0">
+            <a:schemeClr val="accent1"/>
+          </a:effectRef>
+          <a:fontRef idx="minor">
+            <a:schemeClr val="lt1"/>
+          </a:fontRef>
+        </p:style>
+        <p:txBody>
+          <a:bodyPr rtlCol="0" anchor="ctr"/>
+          <a:lstStyle/>
+          <a:p>
+            <a:pPr algn="ctr"/>
+            <a:r>
+              <a:rPr kumimoji="1" lang="en-US" altLang="ko-KR" sz="800">
+                <a:solidFill>
+                  <a:schemeClr val="tx1"/>
+                </a:solidFill>
+              </a:rPr>
+              <a:t>PCIe</a:t>
+            </a:r>
+          </a:p>
+          <a:p>
+            <a:pPr algn="ctr"/>
+            <a:r>
+              <a:rPr kumimoji="1" lang="en-US" altLang="ko-KR" sz="800">
+                <a:solidFill>
+                  <a:schemeClr val="tx1"/>
+                </a:solidFill>
+              </a:rPr>
+              <a:t>Switch</a:t>
+            </a:r>
+            <a:endParaRPr kumimoji="1" lang="ko-KR" altLang="en-US" sz="800">
+              <a:solidFill>
+                <a:schemeClr val="tx1"/>
+              </a:solidFill>
+            </a:endParaRPr>
+          </a:p>
+        </p:txBody>
+      </p:sp>
+      <p:cxnSp>
+        <p:nvCxnSpPr>
+          <p:cNvPr id="8" name="직선 화살표 연결선 7">
+            <a:extLst>
+              <a:ext uri="{FF2B5EF4-FFF2-40B4-BE49-F238E27FC236}">
+                <a16:creationId xmlns:a16="http://schemas.microsoft.com/office/drawing/2014/main" id="{E9E80DBD-5318-0E26-FD8D-CB5567422A0B}"/>
+              </a:ext>
+            </a:extLst>
+          </p:cNvPr>
+          <p:cNvCxnSpPr>
+            <a:cxnSpLocks/>
+            <a:stCxn id="5" idx="3"/>
+            <a:endCxn id="6" idx="1"/>
+          </p:cNvCxnSpPr>
+          <p:nvPr/>
+        </p:nvCxnSpPr>
+        <p:spPr>
+          <a:xfrm flipV="1">
+            <a:off x="1187623" y="717008"/>
+            <a:ext cx="648074" cy="132442"/>
+          </a:xfrm>
+          <a:prstGeom prst="straightConnector1">
+            <a:avLst/>
+          </a:prstGeom>
+          <a:ln>
+            <a:solidFill>
+              <a:schemeClr val="accent4">
+                <a:lumMod val="75000"/>
+              </a:schemeClr>
+            </a:solidFill>
+            <a:headEnd type="triangle"/>
+            <a:tailEnd type="triangle"/>
+          </a:ln>
+        </p:spPr>
+        <p:style>
+          <a:lnRef idx="1">
+            <a:schemeClr val="accent1"/>
+          </a:lnRef>
+          <a:fillRef idx="0">
+            <a:schemeClr val="accent1"/>
+          </a:fillRef>
+          <a:effectRef idx="0">
+            <a:schemeClr val="accent1"/>
+          </a:effectRef>
+          <a:fontRef idx="minor">
+            <a:schemeClr val="tx1"/>
+          </a:fontRef>
+        </p:style>
+      </p:cxnSp>
+      <p:cxnSp>
+        <p:nvCxnSpPr>
+          <p:cNvPr id="10" name="직선 화살표 연결선 9">
+            <a:extLst>
+              <a:ext uri="{FF2B5EF4-FFF2-40B4-BE49-F238E27FC236}">
+                <a16:creationId xmlns:a16="http://schemas.microsoft.com/office/drawing/2014/main" id="{0D38E6A5-4ECE-2287-1086-663C9F064D22}"/>
+              </a:ext>
+            </a:extLst>
+          </p:cNvPr>
+          <p:cNvCxnSpPr>
+            <a:cxnSpLocks/>
+            <a:stCxn id="4" idx="3"/>
+            <a:endCxn id="6" idx="1"/>
+          </p:cNvCxnSpPr>
+          <p:nvPr/>
+        </p:nvCxnSpPr>
+        <p:spPr>
+          <a:xfrm flipV="1">
+            <a:off x="1259632" y="717008"/>
+            <a:ext cx="576065" cy="88295"/>
+          </a:xfrm>
+          <a:prstGeom prst="straightConnector1">
+            <a:avLst/>
+          </a:prstGeom>
+          <a:ln>
+            <a:solidFill>
+              <a:schemeClr val="accent4">
+                <a:lumMod val="75000"/>
+              </a:schemeClr>
+            </a:solidFill>
+            <a:headEnd type="triangle"/>
+            <a:tailEnd type="triangle"/>
+          </a:ln>
+        </p:spPr>
+        <p:style>
+          <a:lnRef idx="1">
+            <a:schemeClr val="accent1"/>
+          </a:lnRef>
+          <a:fillRef idx="0">
+            <a:schemeClr val="accent1"/>
+          </a:fillRef>
+          <a:effectRef idx="0">
+            <a:schemeClr val="accent1"/>
+          </a:effectRef>
+          <a:fontRef idx="minor">
+            <a:schemeClr val="tx1"/>
+          </a:fontRef>
+        </p:style>
+      </p:cxnSp>
+      <p:cxnSp>
+        <p:nvCxnSpPr>
+          <p:cNvPr id="13" name="직선 화살표 연결선 12">
+            <a:extLst>
+              <a:ext uri="{FF2B5EF4-FFF2-40B4-BE49-F238E27FC236}">
+                <a16:creationId xmlns:a16="http://schemas.microsoft.com/office/drawing/2014/main" id="{1A6B22E2-5E90-CB1E-B291-8B01709EC4DB}"/>
+              </a:ext>
+            </a:extLst>
+          </p:cNvPr>
+          <p:cNvCxnSpPr>
+            <a:cxnSpLocks/>
+            <a:stCxn id="3" idx="3"/>
+            <a:endCxn id="6" idx="1"/>
+          </p:cNvCxnSpPr>
+          <p:nvPr/>
+        </p:nvCxnSpPr>
+        <p:spPr>
+          <a:xfrm flipV="1">
+            <a:off x="1331641" y="717008"/>
+            <a:ext cx="504056" cy="44148"/>
+          </a:xfrm>
+          <a:prstGeom prst="straightConnector1">
+            <a:avLst/>
+          </a:prstGeom>
+          <a:ln>
+            <a:solidFill>
+              <a:schemeClr val="accent4">
+                <a:lumMod val="75000"/>
+              </a:schemeClr>
+            </a:solidFill>
+            <a:headEnd type="triangle"/>
+            <a:tailEnd type="triangle"/>
+          </a:ln>
+        </p:spPr>
+        <p:style>
+          <a:lnRef idx="1">
+            <a:schemeClr val="accent1"/>
+          </a:lnRef>
+          <a:fillRef idx="0">
+            <a:schemeClr val="accent1"/>
+          </a:fillRef>
+          <a:effectRef idx="0">
+            <a:schemeClr val="accent1"/>
+          </a:effectRef>
+          <a:fontRef idx="minor">
+            <a:schemeClr val="tx1"/>
+          </a:fontRef>
+        </p:style>
+      </p:cxnSp>
+      <p:cxnSp>
+        <p:nvCxnSpPr>
+          <p:cNvPr id="16" name="직선 화살표 연결선 15">
+            <a:extLst>
+              <a:ext uri="{FF2B5EF4-FFF2-40B4-BE49-F238E27FC236}">
+                <a16:creationId xmlns:a16="http://schemas.microsoft.com/office/drawing/2014/main" id="{F4F5D374-E05F-46F1-3E1F-737F591CD99F}"/>
+              </a:ext>
+            </a:extLst>
+          </p:cNvPr>
+          <p:cNvCxnSpPr>
+            <a:cxnSpLocks/>
+            <a:stCxn id="2" idx="3"/>
+            <a:endCxn id="6" idx="1"/>
+          </p:cNvCxnSpPr>
+          <p:nvPr/>
+        </p:nvCxnSpPr>
+        <p:spPr>
+          <a:xfrm flipV="1">
+            <a:off x="1403650" y="717008"/>
+            <a:ext cx="432047" cy="1"/>
+          </a:xfrm>
+          <a:prstGeom prst="straightConnector1">
+            <a:avLst/>
+          </a:prstGeom>
+          <a:ln>
+            <a:solidFill>
+              <a:schemeClr val="accent4">
+                <a:lumMod val="75000"/>
+              </a:schemeClr>
+            </a:solidFill>
+            <a:headEnd type="triangle"/>
+            <a:tailEnd type="triangle"/>
+          </a:ln>
+        </p:spPr>
+        <p:style>
+          <a:lnRef idx="1">
+            <a:schemeClr val="accent1"/>
+          </a:lnRef>
+          <a:fillRef idx="0">
+            <a:schemeClr val="accent1"/>
+          </a:fillRef>
+          <a:effectRef idx="0">
+            <a:schemeClr val="accent1"/>
+          </a:effectRef>
+          <a:fontRef idx="minor">
+            <a:schemeClr val="tx1"/>
+          </a:fontRef>
+        </p:style>
+      </p:cxnSp>
+      <p:sp>
+        <p:nvSpPr>
+          <p:cNvPr id="23" name="직사각형 22">
+            <a:extLst>
+              <a:ext uri="{FF2B5EF4-FFF2-40B4-BE49-F238E27FC236}">
+                <a16:creationId xmlns:a16="http://schemas.microsoft.com/office/drawing/2014/main" id="{B8326E2B-7177-E52C-9F1F-E65DACEFE4D0}"/>
+              </a:ext>
+            </a:extLst>
+          </p:cNvPr>
+          <p:cNvSpPr/>
+          <p:nvPr/>
+        </p:nvSpPr>
+        <p:spPr>
+          <a:xfrm>
+            <a:off x="2987824" y="478910"/>
+            <a:ext cx="720080" cy="476195"/>
+          </a:xfrm>
+          <a:prstGeom prst="rect">
+            <a:avLst/>
+          </a:prstGeom>
+          <a:solidFill>
+            <a:schemeClr val="accent1">
+              <a:lumMod val="20000"/>
+              <a:lumOff val="80000"/>
+            </a:schemeClr>
+          </a:solidFill>
+          <a:ln w="12700"/>
+        </p:spPr>
+        <p:style>
+          <a:lnRef idx="2">
+            <a:schemeClr val="accent1">
+              <a:shade val="15000"/>
+            </a:schemeClr>
+          </a:lnRef>
+          <a:fillRef idx="1">
+            <a:schemeClr val="accent1"/>
+          </a:fillRef>
+          <a:effectRef idx="0">
+            <a:schemeClr val="accent1"/>
+          </a:effectRef>
+          <a:fontRef idx="minor">
+            <a:schemeClr val="lt1"/>
+          </a:fontRef>
+        </p:style>
+        <p:txBody>
+          <a:bodyPr rtlCol="0" anchor="ctr"/>
+          <a:lstStyle/>
+          <a:p>
+            <a:pPr algn="ctr"/>
+            <a:r>
+              <a:rPr kumimoji="1" lang="en-US" altLang="ko-KR" sz="800">
+                <a:solidFill>
+                  <a:schemeClr val="tx1"/>
+                </a:solidFill>
+              </a:rPr>
+              <a:t>Storage</a:t>
+            </a:r>
+          </a:p>
+          <a:p>
+            <a:pPr algn="ctr"/>
+            <a:r>
+              <a:rPr kumimoji="1" lang="en-US" altLang="ko-KR" sz="800">
+                <a:solidFill>
+                  <a:schemeClr val="tx1"/>
+                </a:solidFill>
+              </a:rPr>
+              <a:t>Networking</a:t>
+            </a:r>
+          </a:p>
+          <a:p>
+            <a:pPr algn="ctr"/>
+            <a:r>
+              <a:rPr kumimoji="1" lang="en-US" altLang="ko-KR" sz="800">
+                <a:solidFill>
+                  <a:schemeClr val="tx1"/>
+                </a:solidFill>
+              </a:rPr>
+              <a:t>ConnectX-7</a:t>
+            </a:r>
+            <a:endParaRPr kumimoji="1" lang="ko-KR" altLang="en-US" sz="800">
+              <a:solidFill>
+                <a:schemeClr val="tx1"/>
+              </a:solidFill>
+            </a:endParaRPr>
+          </a:p>
+        </p:txBody>
+      </p:sp>
+      <p:cxnSp>
+        <p:nvCxnSpPr>
+          <p:cNvPr id="28" name="직선 화살표 연결선 27">
+            <a:extLst>
+              <a:ext uri="{FF2B5EF4-FFF2-40B4-BE49-F238E27FC236}">
+                <a16:creationId xmlns:a16="http://schemas.microsoft.com/office/drawing/2014/main" id="{755766BA-2786-FBF9-3F90-462CF3D4AD2C}"/>
+              </a:ext>
+            </a:extLst>
+          </p:cNvPr>
+          <p:cNvCxnSpPr>
+            <a:cxnSpLocks/>
+            <a:stCxn id="6" idx="3"/>
+            <a:endCxn id="23" idx="1"/>
+          </p:cNvCxnSpPr>
+          <p:nvPr/>
+        </p:nvCxnSpPr>
+        <p:spPr>
+          <a:xfrm>
+            <a:off x="2555777" y="717008"/>
+            <a:ext cx="432047" cy="0"/>
+          </a:xfrm>
+          <a:prstGeom prst="straightConnector1">
+            <a:avLst/>
+          </a:prstGeom>
+          <a:ln>
+            <a:solidFill>
+              <a:schemeClr val="accent4">
+                <a:lumMod val="75000"/>
+              </a:schemeClr>
+            </a:solidFill>
+            <a:headEnd type="triangle"/>
+            <a:tailEnd type="triangle"/>
+          </a:ln>
+        </p:spPr>
+        <p:style>
+          <a:lnRef idx="1">
+            <a:schemeClr val="accent1"/>
+          </a:lnRef>
+          <a:fillRef idx="0">
+            <a:schemeClr val="accent1"/>
+          </a:fillRef>
+          <a:effectRef idx="0">
+            <a:schemeClr val="accent1"/>
+          </a:effectRef>
+          <a:fontRef idx="minor">
+            <a:schemeClr val="tx1"/>
+          </a:fontRef>
+        </p:style>
+      </p:cxnSp>
+      <p:sp>
+        <p:nvSpPr>
+          <p:cNvPr id="42" name="직사각형 41">
+            <a:extLst>
+              <a:ext uri="{FF2B5EF4-FFF2-40B4-BE49-F238E27FC236}">
+                <a16:creationId xmlns:a16="http://schemas.microsoft.com/office/drawing/2014/main" id="{9D33C20B-A2BE-20CD-2243-5C181D0A8761}"/>
+              </a:ext>
+            </a:extLst>
+          </p:cNvPr>
+          <p:cNvSpPr/>
+          <p:nvPr/>
+        </p:nvSpPr>
+        <p:spPr>
+          <a:xfrm>
+            <a:off x="1835697" y="1331380"/>
+            <a:ext cx="720080" cy="476195"/>
+          </a:xfrm>
+          <a:prstGeom prst="rect">
+            <a:avLst/>
+          </a:prstGeom>
+          <a:solidFill>
+            <a:schemeClr val="accent5">
+              <a:lumMod val="20000"/>
+              <a:lumOff val="80000"/>
+            </a:schemeClr>
+          </a:solidFill>
+          <a:ln w="12700"/>
+        </p:spPr>
+        <p:style>
+          <a:lnRef idx="2">
+            <a:schemeClr val="accent1">
+              <a:shade val="15000"/>
+            </a:schemeClr>
+          </a:lnRef>
+          <a:fillRef idx="1">
+            <a:schemeClr val="accent1"/>
+          </a:fillRef>
+          <a:effectRef idx="0">
+            <a:schemeClr val="accent1"/>
+          </a:effectRef>
+          <a:fontRef idx="minor">
+            <a:schemeClr val="lt1"/>
+          </a:fontRef>
+        </p:style>
+        <p:txBody>
+          <a:bodyPr rtlCol="0" anchor="ctr"/>
+          <a:lstStyle/>
+          <a:p>
+            <a:pPr algn="ctr"/>
+            <a:r>
+              <a:rPr kumimoji="1" lang="en-US" altLang="ko-KR" sz="800">
+                <a:solidFill>
+                  <a:schemeClr val="tx1"/>
+                </a:solidFill>
+              </a:rPr>
+              <a:t>CPU 0</a:t>
+            </a:r>
+            <a:endParaRPr kumimoji="1" lang="ko-KR" altLang="en-US" sz="800">
+              <a:solidFill>
+                <a:schemeClr val="tx1"/>
+              </a:solidFill>
+            </a:endParaRPr>
+          </a:p>
+        </p:txBody>
+      </p:sp>
+      <p:cxnSp>
+        <p:nvCxnSpPr>
+          <p:cNvPr id="43" name="직선 화살표 연결선 42">
+            <a:extLst>
+              <a:ext uri="{FF2B5EF4-FFF2-40B4-BE49-F238E27FC236}">
+                <a16:creationId xmlns:a16="http://schemas.microsoft.com/office/drawing/2014/main" id="{F51EFFC5-9047-970B-9911-857BCC95A5CA}"/>
+              </a:ext>
+            </a:extLst>
+          </p:cNvPr>
+          <p:cNvCxnSpPr>
+            <a:cxnSpLocks/>
+            <a:stCxn id="6" idx="2"/>
+            <a:endCxn id="42" idx="0"/>
+          </p:cNvCxnSpPr>
+          <p:nvPr/>
+        </p:nvCxnSpPr>
+        <p:spPr>
+          <a:xfrm>
+            <a:off x="2195737" y="955105"/>
+            <a:ext cx="0" cy="376275"/>
+          </a:xfrm>
+          <a:prstGeom prst="straightConnector1">
+            <a:avLst/>
+          </a:prstGeom>
+          <a:ln>
+            <a:solidFill>
+              <a:schemeClr val="accent4">
+                <a:lumMod val="75000"/>
+              </a:schemeClr>
+            </a:solidFill>
+            <a:headEnd type="triangle"/>
+            <a:tailEnd type="triangle"/>
+          </a:ln>
+        </p:spPr>
+        <p:style>
+          <a:lnRef idx="1">
+            <a:schemeClr val="accent1"/>
+          </a:lnRef>
+          <a:fillRef idx="0">
+            <a:schemeClr val="accent1"/>
+          </a:fillRef>
+          <a:effectRef idx="0">
+            <a:schemeClr val="accent1"/>
+          </a:effectRef>
+          <a:fontRef idx="minor">
+            <a:schemeClr val="tx1"/>
+          </a:fontRef>
+        </p:style>
+      </p:cxnSp>
+      <p:sp>
+        <p:nvSpPr>
+          <p:cNvPr id="48" name="직사각형 47">
+            <a:extLst>
+              <a:ext uri="{FF2B5EF4-FFF2-40B4-BE49-F238E27FC236}">
+                <a16:creationId xmlns:a16="http://schemas.microsoft.com/office/drawing/2014/main" id="{1C3B5739-888C-DDBE-1F29-2BD14DECDE67}"/>
+              </a:ext>
+            </a:extLst>
+          </p:cNvPr>
+          <p:cNvSpPr/>
+          <p:nvPr/>
+        </p:nvSpPr>
+        <p:spPr>
+          <a:xfrm>
+            <a:off x="1334221" y="3052553"/>
+            <a:ext cx="720080" cy="476195"/>
+          </a:xfrm>
+          <a:prstGeom prst="rect">
+            <a:avLst/>
+          </a:prstGeom>
+          <a:solidFill>
+            <a:schemeClr val="accent3">
+              <a:lumMod val="20000"/>
+              <a:lumOff val="80000"/>
+            </a:schemeClr>
+          </a:solidFill>
+          <a:ln w="12700"/>
+        </p:spPr>
+        <p:style>
+          <a:lnRef idx="2">
+            <a:schemeClr val="accent1">
+              <a:shade val="15000"/>
+            </a:schemeClr>
+          </a:lnRef>
+          <a:fillRef idx="1">
+            <a:schemeClr val="accent1"/>
+          </a:fillRef>
+          <a:effectRef idx="0">
+            <a:schemeClr val="accent1"/>
+          </a:effectRef>
+          <a:fontRef idx="minor">
+            <a:schemeClr val="lt1"/>
+          </a:fontRef>
+        </p:style>
+        <p:txBody>
+          <a:bodyPr rtlCol="0" anchor="ctr"/>
+          <a:lstStyle/>
+          <a:p>
+            <a:pPr algn="ctr"/>
+            <a:r>
+              <a:rPr kumimoji="1" lang="en-US" altLang="ko-KR" sz="800">
+                <a:solidFill>
+                  <a:schemeClr val="tx1"/>
+                </a:solidFill>
+              </a:rPr>
+              <a:t>GPU 1</a:t>
+            </a:r>
+          </a:p>
+        </p:txBody>
+      </p:sp>
+      <p:sp>
+        <p:nvSpPr>
+          <p:cNvPr id="51" name="직사각형 50">
+            <a:extLst>
+              <a:ext uri="{FF2B5EF4-FFF2-40B4-BE49-F238E27FC236}">
+                <a16:creationId xmlns:a16="http://schemas.microsoft.com/office/drawing/2014/main" id="{C3F06286-D338-B5DA-4D43-9A0D09178C26}"/>
+              </a:ext>
+            </a:extLst>
+          </p:cNvPr>
+          <p:cNvSpPr/>
+          <p:nvPr/>
+        </p:nvSpPr>
+        <p:spPr>
+          <a:xfrm>
+            <a:off x="2987824" y="1508053"/>
+            <a:ext cx="720080" cy="476195"/>
+          </a:xfrm>
+          <a:prstGeom prst="rect">
+            <a:avLst/>
+          </a:prstGeom>
+          <a:solidFill>
+            <a:schemeClr val="bg2">
+              <a:lumMod val="90000"/>
+            </a:schemeClr>
+          </a:solidFill>
+          <a:ln w="12700"/>
+        </p:spPr>
+        <p:style>
+          <a:lnRef idx="2">
+            <a:schemeClr val="accent1">
+              <a:shade val="15000"/>
+            </a:schemeClr>
+          </a:lnRef>
+          <a:fillRef idx="1">
+            <a:schemeClr val="accent1"/>
+          </a:fillRef>
+          <a:effectRef idx="0">
+            <a:schemeClr val="accent1"/>
+          </a:effectRef>
+          <a:fontRef idx="minor">
+            <a:schemeClr val="lt1"/>
+          </a:fontRef>
+        </p:style>
+        <p:txBody>
+          <a:bodyPr rtlCol="0" anchor="ctr"/>
+          <a:lstStyle/>
+          <a:p>
+            <a:pPr algn="ctr"/>
+            <a:r>
+              <a:rPr kumimoji="1" lang="en-US" altLang="ko-KR" sz="700">
+                <a:solidFill>
+                  <a:schemeClr val="tx1"/>
+                </a:solidFill>
+              </a:rPr>
+              <a:t>NVMe</a:t>
+            </a:r>
+            <a:endParaRPr kumimoji="1" lang="ko-KR" altLang="en-US" sz="700">
+              <a:solidFill>
+                <a:schemeClr val="tx1"/>
+              </a:solidFill>
+            </a:endParaRPr>
+          </a:p>
+        </p:txBody>
+      </p:sp>
+      <p:sp>
+        <p:nvSpPr>
+          <p:cNvPr id="52" name="직사각형 51">
+            <a:extLst>
+              <a:ext uri="{FF2B5EF4-FFF2-40B4-BE49-F238E27FC236}">
+                <a16:creationId xmlns:a16="http://schemas.microsoft.com/office/drawing/2014/main" id="{09F28BF6-9128-2B29-D001-978A0AEDD983}"/>
+              </a:ext>
+            </a:extLst>
+          </p:cNvPr>
+          <p:cNvSpPr/>
+          <p:nvPr/>
+        </p:nvSpPr>
+        <p:spPr>
+          <a:xfrm>
+            <a:off x="2915815" y="1552200"/>
+            <a:ext cx="720080" cy="476195"/>
+          </a:xfrm>
+          <a:prstGeom prst="rect">
+            <a:avLst/>
+          </a:prstGeom>
+          <a:solidFill>
+            <a:schemeClr val="bg2">
+              <a:lumMod val="90000"/>
+            </a:schemeClr>
+          </a:solidFill>
+          <a:ln w="12700"/>
+        </p:spPr>
+        <p:style>
+          <a:lnRef idx="2">
+            <a:schemeClr val="accent1">
+              <a:shade val="15000"/>
+            </a:schemeClr>
+          </a:lnRef>
+          <a:fillRef idx="1">
+            <a:schemeClr val="accent1"/>
+          </a:fillRef>
+          <a:effectRef idx="0">
+            <a:schemeClr val="accent1"/>
+          </a:effectRef>
+          <a:fontRef idx="minor">
+            <a:schemeClr val="lt1"/>
+          </a:fontRef>
+        </p:style>
+        <p:txBody>
+          <a:bodyPr rtlCol="0" anchor="ctr"/>
+          <a:lstStyle/>
+          <a:p>
+            <a:pPr algn="ctr"/>
+            <a:r>
+              <a:rPr kumimoji="1" lang="en-US" altLang="ko-KR" sz="800">
+                <a:solidFill>
+                  <a:schemeClr val="tx1"/>
+                </a:solidFill>
+              </a:rPr>
+              <a:t>OS NVMe</a:t>
+            </a:r>
+          </a:p>
+          <a:p>
+            <a:pPr algn="ctr"/>
+            <a:r>
+              <a:rPr kumimoji="1" lang="en-US" altLang="ko-KR" sz="800">
+                <a:solidFill>
+                  <a:schemeClr val="tx1"/>
+                </a:solidFill>
+              </a:rPr>
+              <a:t>(1.92 TB)</a:t>
+            </a:r>
+          </a:p>
+        </p:txBody>
+      </p:sp>
+      <p:cxnSp>
+        <p:nvCxnSpPr>
+          <p:cNvPr id="53" name="직선 화살표 연결선 52">
+            <a:extLst>
+              <a:ext uri="{FF2B5EF4-FFF2-40B4-BE49-F238E27FC236}">
+                <a16:creationId xmlns:a16="http://schemas.microsoft.com/office/drawing/2014/main" id="{0F556F5F-EF6B-97B1-D969-F03E2D39D20F}"/>
+              </a:ext>
+            </a:extLst>
+          </p:cNvPr>
+          <p:cNvCxnSpPr>
+            <a:cxnSpLocks/>
+            <a:stCxn id="42" idx="3"/>
+            <a:endCxn id="52" idx="1"/>
+          </p:cNvCxnSpPr>
+          <p:nvPr/>
+        </p:nvCxnSpPr>
+        <p:spPr>
+          <a:xfrm>
+            <a:off x="2555777" y="1569478"/>
+            <a:ext cx="360038" cy="220820"/>
+          </a:xfrm>
+          <a:prstGeom prst="straightConnector1">
+            <a:avLst/>
+          </a:prstGeom>
+          <a:ln>
+            <a:solidFill>
+              <a:schemeClr val="accent4">
+                <a:lumMod val="75000"/>
+              </a:schemeClr>
+            </a:solidFill>
+            <a:headEnd type="triangle"/>
+            <a:tailEnd type="triangle"/>
+          </a:ln>
+        </p:spPr>
+        <p:style>
+          <a:lnRef idx="1">
+            <a:schemeClr val="accent1"/>
+          </a:lnRef>
+          <a:fillRef idx="0">
+            <a:schemeClr val="accent1"/>
+          </a:fillRef>
+          <a:effectRef idx="0">
+            <a:schemeClr val="accent1"/>
+          </a:effectRef>
+          <a:fontRef idx="minor">
+            <a:schemeClr val="tx1"/>
+          </a:fontRef>
+        </p:style>
+      </p:cxnSp>
+      <p:sp>
+        <p:nvSpPr>
+          <p:cNvPr id="59" name="직사각형 58">
+            <a:extLst>
+              <a:ext uri="{FF2B5EF4-FFF2-40B4-BE49-F238E27FC236}">
+                <a16:creationId xmlns:a16="http://schemas.microsoft.com/office/drawing/2014/main" id="{392191AA-F44C-B6B7-935E-71AFC951AAC5}"/>
+              </a:ext>
+            </a:extLst>
+          </p:cNvPr>
+          <p:cNvSpPr/>
+          <p:nvPr/>
+        </p:nvSpPr>
+        <p:spPr>
+          <a:xfrm>
+            <a:off x="323530" y="3052553"/>
+            <a:ext cx="720080" cy="476195"/>
+          </a:xfrm>
+          <a:prstGeom prst="rect">
+            <a:avLst/>
+          </a:prstGeom>
+          <a:solidFill>
+            <a:schemeClr val="accent3">
+              <a:lumMod val="20000"/>
+              <a:lumOff val="80000"/>
+            </a:schemeClr>
+          </a:solidFill>
+          <a:ln w="12700"/>
+        </p:spPr>
+        <p:style>
+          <a:lnRef idx="2">
+            <a:schemeClr val="accent1">
+              <a:shade val="15000"/>
+            </a:schemeClr>
+          </a:lnRef>
+          <a:fillRef idx="1">
+            <a:schemeClr val="accent1"/>
+          </a:fillRef>
+          <a:effectRef idx="0">
+            <a:schemeClr val="accent1"/>
+          </a:effectRef>
+          <a:fontRef idx="minor">
+            <a:schemeClr val="lt1"/>
+          </a:fontRef>
+        </p:style>
+        <p:txBody>
+          <a:bodyPr rtlCol="0" anchor="ctr"/>
+          <a:lstStyle/>
+          <a:p>
+            <a:pPr algn="ctr"/>
+            <a:r>
+              <a:rPr kumimoji="1" lang="en-US" altLang="ko-KR" sz="800">
+                <a:solidFill>
+                  <a:schemeClr val="tx1"/>
+                </a:solidFill>
+              </a:rPr>
+              <a:t>GPU 0</a:t>
+            </a:r>
+          </a:p>
+        </p:txBody>
+      </p:sp>
+      <p:sp>
+        <p:nvSpPr>
+          <p:cNvPr id="71" name="직사각형 70">
+            <a:extLst>
+              <a:ext uri="{FF2B5EF4-FFF2-40B4-BE49-F238E27FC236}">
+                <a16:creationId xmlns:a16="http://schemas.microsoft.com/office/drawing/2014/main" id="{02410241-4A0B-CDFD-00CE-E8723010D18F}"/>
+              </a:ext>
+            </a:extLst>
+          </p:cNvPr>
+          <p:cNvSpPr/>
+          <p:nvPr/>
+        </p:nvSpPr>
+        <p:spPr>
+          <a:xfrm>
+            <a:off x="323530" y="2333652"/>
+            <a:ext cx="720080" cy="476195"/>
+          </a:xfrm>
+          <a:prstGeom prst="rect">
+            <a:avLst/>
+          </a:prstGeom>
+          <a:solidFill>
+            <a:schemeClr val="accent1">
+              <a:lumMod val="20000"/>
+              <a:lumOff val="80000"/>
+            </a:schemeClr>
+          </a:solidFill>
+          <a:ln w="12700"/>
+        </p:spPr>
+        <p:style>
+          <a:lnRef idx="2">
+            <a:schemeClr val="accent1">
+              <a:shade val="15000"/>
+            </a:schemeClr>
+          </a:lnRef>
+          <a:fillRef idx="1">
+            <a:schemeClr val="accent1"/>
+          </a:fillRef>
+          <a:effectRef idx="0">
+            <a:schemeClr val="accent1"/>
+          </a:effectRef>
+          <a:fontRef idx="minor">
+            <a:schemeClr val="lt1"/>
+          </a:fontRef>
+        </p:style>
+        <p:txBody>
+          <a:bodyPr rtlCol="0" anchor="ctr"/>
+          <a:lstStyle/>
+          <a:p>
+            <a:pPr algn="ctr"/>
+            <a:r>
+              <a:rPr kumimoji="1" lang="en-US" altLang="ko-KR" sz="800">
+                <a:solidFill>
+                  <a:schemeClr val="tx1"/>
+                </a:solidFill>
+              </a:rPr>
+              <a:t>DGX</a:t>
+            </a:r>
+            <a:br>
+              <a:rPr kumimoji="1" lang="en-US" altLang="ko-KR" sz="800">
+                <a:solidFill>
+                  <a:schemeClr val="tx1"/>
+                </a:solidFill>
+              </a:rPr>
+            </a:br>
+            <a:r>
+              <a:rPr kumimoji="1" lang="en-US" altLang="ko-KR" sz="800">
+                <a:solidFill>
+                  <a:schemeClr val="tx1"/>
+                </a:solidFill>
+              </a:rPr>
+              <a:t>Networking</a:t>
+            </a:r>
+          </a:p>
+          <a:p>
+            <a:pPr algn="ctr"/>
+            <a:r>
+              <a:rPr kumimoji="1" lang="en-US" altLang="ko-KR" sz="800">
+                <a:solidFill>
+                  <a:schemeClr val="tx1"/>
+                </a:solidFill>
+              </a:rPr>
+              <a:t>ConnectX-7</a:t>
+            </a:r>
+            <a:endParaRPr kumimoji="1" lang="ko-KR" altLang="en-US" sz="800">
+              <a:solidFill>
+                <a:schemeClr val="tx1"/>
+              </a:solidFill>
+            </a:endParaRPr>
+          </a:p>
+        </p:txBody>
+      </p:sp>
+      <p:cxnSp>
+        <p:nvCxnSpPr>
+          <p:cNvPr id="73" name="직선 화살표 연결선 72">
+            <a:extLst>
+              <a:ext uri="{FF2B5EF4-FFF2-40B4-BE49-F238E27FC236}">
+                <a16:creationId xmlns:a16="http://schemas.microsoft.com/office/drawing/2014/main" id="{5BB5E915-6727-95FE-E2C4-773CDCF130CD}"/>
+              </a:ext>
+            </a:extLst>
+          </p:cNvPr>
+          <p:cNvCxnSpPr>
+            <a:cxnSpLocks/>
+            <a:stCxn id="42" idx="2"/>
+            <a:endCxn id="71" idx="0"/>
+          </p:cNvCxnSpPr>
+          <p:nvPr/>
+        </p:nvCxnSpPr>
+        <p:spPr>
+          <a:xfrm flipH="1">
+            <a:off x="683570" y="1807575"/>
+            <a:ext cx="1512167" cy="526077"/>
+          </a:xfrm>
+          <a:prstGeom prst="straightConnector1">
+            <a:avLst/>
+          </a:prstGeom>
+          <a:ln>
+            <a:solidFill>
+              <a:schemeClr val="accent4">
+                <a:lumMod val="75000"/>
+              </a:schemeClr>
+            </a:solidFill>
+            <a:headEnd type="triangle"/>
+            <a:tailEnd type="triangle"/>
+          </a:ln>
+        </p:spPr>
+        <p:style>
+          <a:lnRef idx="1">
+            <a:schemeClr val="accent1"/>
+          </a:lnRef>
+          <a:fillRef idx="0">
+            <a:schemeClr val="accent1"/>
+          </a:fillRef>
+          <a:effectRef idx="0">
+            <a:schemeClr val="accent1"/>
+          </a:effectRef>
+          <a:fontRef idx="minor">
+            <a:schemeClr val="tx1"/>
+          </a:fontRef>
+        </p:style>
+      </p:cxnSp>
+      <p:sp>
+        <p:nvSpPr>
+          <p:cNvPr id="80" name="직사각형 79">
+            <a:extLst>
+              <a:ext uri="{FF2B5EF4-FFF2-40B4-BE49-F238E27FC236}">
+                <a16:creationId xmlns:a16="http://schemas.microsoft.com/office/drawing/2014/main" id="{8ABAB737-90ED-35FF-5D3A-B1D0A23709ED}"/>
+              </a:ext>
+            </a:extLst>
+          </p:cNvPr>
+          <p:cNvSpPr/>
+          <p:nvPr/>
+        </p:nvSpPr>
+        <p:spPr>
+          <a:xfrm>
+            <a:off x="3347864" y="3052553"/>
+            <a:ext cx="720080" cy="476195"/>
+          </a:xfrm>
+          <a:prstGeom prst="rect">
+            <a:avLst/>
+          </a:prstGeom>
+          <a:solidFill>
+            <a:schemeClr val="accent3">
+              <a:lumMod val="20000"/>
+              <a:lumOff val="80000"/>
+            </a:schemeClr>
+          </a:solidFill>
+          <a:ln w="12700"/>
+        </p:spPr>
+        <p:style>
+          <a:lnRef idx="2">
+            <a:schemeClr val="accent1">
+              <a:shade val="15000"/>
+            </a:schemeClr>
+          </a:lnRef>
+          <a:fillRef idx="1">
+            <a:schemeClr val="accent1"/>
+          </a:fillRef>
+          <a:effectRef idx="0">
+            <a:schemeClr val="accent1"/>
+          </a:effectRef>
+          <a:fontRef idx="minor">
+            <a:schemeClr val="lt1"/>
+          </a:fontRef>
+        </p:style>
+        <p:txBody>
+          <a:bodyPr rtlCol="0" anchor="ctr"/>
+          <a:lstStyle/>
+          <a:p>
+            <a:pPr algn="ctr"/>
+            <a:r>
+              <a:rPr kumimoji="1" lang="en-US" altLang="ko-KR" sz="800">
+                <a:solidFill>
+                  <a:schemeClr val="tx1"/>
+                </a:solidFill>
+              </a:rPr>
+              <a:t>GPU 3</a:t>
+            </a:r>
+          </a:p>
+        </p:txBody>
+      </p:sp>
+      <p:sp>
+        <p:nvSpPr>
+          <p:cNvPr id="81" name="직사각형 80">
+            <a:extLst>
+              <a:ext uri="{FF2B5EF4-FFF2-40B4-BE49-F238E27FC236}">
+                <a16:creationId xmlns:a16="http://schemas.microsoft.com/office/drawing/2014/main" id="{9FD33686-7B6B-4F6C-7E72-1DEC3EE1BA5F}"/>
+              </a:ext>
+            </a:extLst>
+          </p:cNvPr>
+          <p:cNvSpPr/>
+          <p:nvPr/>
+        </p:nvSpPr>
+        <p:spPr>
+          <a:xfrm>
+            <a:off x="2337173" y="3052553"/>
+            <a:ext cx="720080" cy="476195"/>
+          </a:xfrm>
+          <a:prstGeom prst="rect">
+            <a:avLst/>
+          </a:prstGeom>
+          <a:solidFill>
+            <a:schemeClr val="accent3">
+              <a:lumMod val="20000"/>
+              <a:lumOff val="80000"/>
+            </a:schemeClr>
+          </a:solidFill>
+          <a:ln w="12700"/>
+        </p:spPr>
+        <p:style>
+          <a:lnRef idx="2">
+            <a:schemeClr val="accent1">
+              <a:shade val="15000"/>
+            </a:schemeClr>
+          </a:lnRef>
+          <a:fillRef idx="1">
+            <a:schemeClr val="accent1"/>
+          </a:fillRef>
+          <a:effectRef idx="0">
+            <a:schemeClr val="accent1"/>
+          </a:effectRef>
+          <a:fontRef idx="minor">
+            <a:schemeClr val="lt1"/>
+          </a:fontRef>
+        </p:style>
+        <p:txBody>
+          <a:bodyPr rtlCol="0" anchor="ctr"/>
+          <a:lstStyle/>
+          <a:p>
+            <a:pPr algn="ctr"/>
+            <a:r>
+              <a:rPr kumimoji="1" lang="en-US" altLang="ko-KR" sz="800">
+                <a:solidFill>
+                  <a:schemeClr val="tx1"/>
+                </a:solidFill>
+              </a:rPr>
+              <a:t>GPU 2</a:t>
+            </a:r>
+          </a:p>
+        </p:txBody>
+      </p:sp>
+      <p:sp>
+        <p:nvSpPr>
+          <p:cNvPr id="82" name="직사각형 81">
+            <a:extLst>
+              <a:ext uri="{FF2B5EF4-FFF2-40B4-BE49-F238E27FC236}">
+                <a16:creationId xmlns:a16="http://schemas.microsoft.com/office/drawing/2014/main" id="{84A7AD78-3272-88BD-822D-6B9142057D3A}"/>
+              </a:ext>
+            </a:extLst>
+          </p:cNvPr>
+          <p:cNvSpPr/>
+          <p:nvPr/>
+        </p:nvSpPr>
+        <p:spPr>
+          <a:xfrm>
+            <a:off x="1331641" y="2333652"/>
+            <a:ext cx="720080" cy="476195"/>
+          </a:xfrm>
+          <a:prstGeom prst="rect">
+            <a:avLst/>
+          </a:prstGeom>
+          <a:solidFill>
+            <a:schemeClr val="accent1">
+              <a:lumMod val="20000"/>
+              <a:lumOff val="80000"/>
+            </a:schemeClr>
+          </a:solidFill>
+          <a:ln w="12700"/>
+        </p:spPr>
+        <p:style>
+          <a:lnRef idx="2">
+            <a:schemeClr val="accent1">
+              <a:shade val="15000"/>
+            </a:schemeClr>
+          </a:lnRef>
+          <a:fillRef idx="1">
+            <a:schemeClr val="accent1"/>
+          </a:fillRef>
+          <a:effectRef idx="0">
+            <a:schemeClr val="accent1"/>
+          </a:effectRef>
+          <a:fontRef idx="minor">
+            <a:schemeClr val="lt1"/>
+          </a:fontRef>
+        </p:style>
+        <p:txBody>
+          <a:bodyPr rtlCol="0" anchor="ctr"/>
+          <a:lstStyle/>
+          <a:p>
+            <a:pPr algn="ctr"/>
+            <a:r>
+              <a:rPr kumimoji="1" lang="en-US" altLang="ko-KR" sz="800">
+                <a:solidFill>
+                  <a:schemeClr val="tx1"/>
+                </a:solidFill>
+              </a:rPr>
+              <a:t>DGX</a:t>
+            </a:r>
+            <a:br>
+              <a:rPr kumimoji="1" lang="en-US" altLang="ko-KR" sz="800">
+                <a:solidFill>
+                  <a:schemeClr val="tx1"/>
+                </a:solidFill>
+              </a:rPr>
+            </a:br>
+            <a:r>
+              <a:rPr kumimoji="1" lang="en-US" altLang="ko-KR" sz="800">
+                <a:solidFill>
+                  <a:schemeClr val="tx1"/>
+                </a:solidFill>
+              </a:rPr>
+              <a:t>Networking</a:t>
+            </a:r>
+          </a:p>
+          <a:p>
+            <a:pPr algn="ctr"/>
+            <a:r>
+              <a:rPr kumimoji="1" lang="en-US" altLang="ko-KR" sz="800">
+                <a:solidFill>
+                  <a:schemeClr val="tx1"/>
+                </a:solidFill>
+              </a:rPr>
+              <a:t>ConnectX-7</a:t>
+            </a:r>
+            <a:endParaRPr kumimoji="1" lang="ko-KR" altLang="en-US" sz="800">
+              <a:solidFill>
+                <a:schemeClr val="tx1"/>
+              </a:solidFill>
+            </a:endParaRPr>
+          </a:p>
+        </p:txBody>
+      </p:sp>
+      <p:sp>
+        <p:nvSpPr>
+          <p:cNvPr id="83" name="직사각형 82">
+            <a:extLst>
+              <a:ext uri="{FF2B5EF4-FFF2-40B4-BE49-F238E27FC236}">
+                <a16:creationId xmlns:a16="http://schemas.microsoft.com/office/drawing/2014/main" id="{AF871250-CD7E-E497-023A-2BA05EA77034}"/>
+              </a:ext>
+            </a:extLst>
+          </p:cNvPr>
+          <p:cNvSpPr/>
+          <p:nvPr/>
+        </p:nvSpPr>
+        <p:spPr>
+          <a:xfrm>
+            <a:off x="2337173" y="2333652"/>
+            <a:ext cx="720080" cy="476195"/>
+          </a:xfrm>
+          <a:prstGeom prst="rect">
+            <a:avLst/>
+          </a:prstGeom>
+          <a:solidFill>
+            <a:schemeClr val="accent1">
+              <a:lumMod val="20000"/>
+              <a:lumOff val="80000"/>
+            </a:schemeClr>
+          </a:solidFill>
+          <a:ln w="12700"/>
+        </p:spPr>
+        <p:style>
+          <a:lnRef idx="2">
+            <a:schemeClr val="accent1">
+              <a:shade val="15000"/>
+            </a:schemeClr>
+          </a:lnRef>
+          <a:fillRef idx="1">
+            <a:schemeClr val="accent1"/>
+          </a:fillRef>
+          <a:effectRef idx="0">
+            <a:schemeClr val="accent1"/>
+          </a:effectRef>
+          <a:fontRef idx="minor">
+            <a:schemeClr val="lt1"/>
+          </a:fontRef>
+        </p:style>
+        <p:txBody>
+          <a:bodyPr rtlCol="0" anchor="ctr"/>
+          <a:lstStyle/>
+          <a:p>
+            <a:pPr algn="ctr"/>
+            <a:r>
+              <a:rPr kumimoji="1" lang="en-US" altLang="ko-KR" sz="800">
+                <a:solidFill>
+                  <a:schemeClr val="tx1"/>
+                </a:solidFill>
+              </a:rPr>
+              <a:t>DGX</a:t>
+            </a:r>
+            <a:br>
+              <a:rPr kumimoji="1" lang="en-US" altLang="ko-KR" sz="800">
+                <a:solidFill>
+                  <a:schemeClr val="tx1"/>
+                </a:solidFill>
+              </a:rPr>
+            </a:br>
+            <a:r>
+              <a:rPr kumimoji="1" lang="en-US" altLang="ko-KR" sz="800">
+                <a:solidFill>
+                  <a:schemeClr val="tx1"/>
+                </a:solidFill>
+              </a:rPr>
+              <a:t>Networking</a:t>
+            </a:r>
+          </a:p>
+          <a:p>
+            <a:pPr algn="ctr"/>
+            <a:r>
+              <a:rPr kumimoji="1" lang="en-US" altLang="ko-KR" sz="800">
+                <a:solidFill>
+                  <a:schemeClr val="tx1"/>
+                </a:solidFill>
+              </a:rPr>
+              <a:t>ConnectX-7</a:t>
+            </a:r>
+            <a:endParaRPr kumimoji="1" lang="ko-KR" altLang="en-US" sz="800">
+              <a:solidFill>
+                <a:schemeClr val="tx1"/>
+              </a:solidFill>
+            </a:endParaRPr>
+          </a:p>
+        </p:txBody>
+      </p:sp>
+      <p:sp>
+        <p:nvSpPr>
+          <p:cNvPr id="84" name="직사각형 83">
+            <a:extLst>
+              <a:ext uri="{FF2B5EF4-FFF2-40B4-BE49-F238E27FC236}">
+                <a16:creationId xmlns:a16="http://schemas.microsoft.com/office/drawing/2014/main" id="{3E77A82D-EA75-4CA8-FB7A-AF254BC9C4DF}"/>
+              </a:ext>
+            </a:extLst>
+          </p:cNvPr>
+          <p:cNvSpPr/>
+          <p:nvPr/>
+        </p:nvSpPr>
+        <p:spPr>
+          <a:xfrm>
+            <a:off x="3347864" y="2333652"/>
+            <a:ext cx="720080" cy="476195"/>
+          </a:xfrm>
+          <a:prstGeom prst="rect">
+            <a:avLst/>
+          </a:prstGeom>
+          <a:solidFill>
+            <a:schemeClr val="accent1">
+              <a:lumMod val="20000"/>
+              <a:lumOff val="80000"/>
+            </a:schemeClr>
+          </a:solidFill>
+          <a:ln w="12700"/>
+        </p:spPr>
+        <p:style>
+          <a:lnRef idx="2">
+            <a:schemeClr val="accent1">
+              <a:shade val="15000"/>
+            </a:schemeClr>
+          </a:lnRef>
+          <a:fillRef idx="1">
+            <a:schemeClr val="accent1"/>
+          </a:fillRef>
+          <a:effectRef idx="0">
+            <a:schemeClr val="accent1"/>
+          </a:effectRef>
+          <a:fontRef idx="minor">
+            <a:schemeClr val="lt1"/>
+          </a:fontRef>
+        </p:style>
+        <p:txBody>
+          <a:bodyPr rtlCol="0" anchor="ctr"/>
+          <a:lstStyle/>
+          <a:p>
+            <a:pPr algn="ctr"/>
+            <a:r>
+              <a:rPr kumimoji="1" lang="en-US" altLang="ko-KR" sz="800">
+                <a:solidFill>
+                  <a:schemeClr val="tx1"/>
+                </a:solidFill>
+              </a:rPr>
+              <a:t> DGX</a:t>
+            </a:r>
+            <a:br>
+              <a:rPr kumimoji="1" lang="en-US" altLang="ko-KR" sz="800">
+                <a:solidFill>
+                  <a:schemeClr val="tx1"/>
+                </a:solidFill>
+              </a:rPr>
+            </a:br>
+            <a:r>
+              <a:rPr kumimoji="1" lang="en-US" altLang="ko-KR" sz="800">
+                <a:solidFill>
+                  <a:schemeClr val="tx1"/>
+                </a:solidFill>
+              </a:rPr>
+              <a:t>Networking</a:t>
+            </a:r>
+          </a:p>
+          <a:p>
+            <a:pPr algn="ctr"/>
+            <a:r>
+              <a:rPr kumimoji="1" lang="en-US" altLang="ko-KR" sz="800">
+                <a:solidFill>
+                  <a:schemeClr val="tx1"/>
+                </a:solidFill>
+              </a:rPr>
+              <a:t>ConnectX-7</a:t>
+            </a:r>
+            <a:endParaRPr kumimoji="1" lang="ko-KR" altLang="en-US" sz="800">
+              <a:solidFill>
+                <a:schemeClr val="tx1"/>
+              </a:solidFill>
+            </a:endParaRPr>
+          </a:p>
+        </p:txBody>
+      </p:sp>
+      <p:cxnSp>
+        <p:nvCxnSpPr>
+          <p:cNvPr id="86" name="직선 화살표 연결선 85">
+            <a:extLst>
+              <a:ext uri="{FF2B5EF4-FFF2-40B4-BE49-F238E27FC236}">
+                <a16:creationId xmlns:a16="http://schemas.microsoft.com/office/drawing/2014/main" id="{2C722FA4-AB55-2BAB-79F0-5FCB8FF2E1ED}"/>
+              </a:ext>
+            </a:extLst>
+          </p:cNvPr>
+          <p:cNvCxnSpPr>
+            <a:cxnSpLocks/>
+            <a:stCxn id="42" idx="2"/>
+            <a:endCxn id="82" idx="0"/>
+          </p:cNvCxnSpPr>
+          <p:nvPr/>
+        </p:nvCxnSpPr>
+        <p:spPr>
+          <a:xfrm flipH="1">
+            <a:off x="1691681" y="1807575"/>
+            <a:ext cx="504056" cy="526077"/>
+          </a:xfrm>
+          <a:prstGeom prst="straightConnector1">
+            <a:avLst/>
+          </a:prstGeom>
+          <a:ln>
+            <a:solidFill>
+              <a:schemeClr val="accent4">
+                <a:lumMod val="75000"/>
+              </a:schemeClr>
+            </a:solidFill>
+            <a:headEnd type="triangle"/>
+            <a:tailEnd type="triangle"/>
+          </a:ln>
+        </p:spPr>
+        <p:style>
+          <a:lnRef idx="1">
+            <a:schemeClr val="accent1"/>
+          </a:lnRef>
+          <a:fillRef idx="0">
+            <a:schemeClr val="accent1"/>
+          </a:fillRef>
+          <a:effectRef idx="0">
+            <a:schemeClr val="accent1"/>
+          </a:effectRef>
+          <a:fontRef idx="minor">
+            <a:schemeClr val="tx1"/>
+          </a:fontRef>
+        </p:style>
+      </p:cxnSp>
+      <p:cxnSp>
+        <p:nvCxnSpPr>
+          <p:cNvPr id="89" name="직선 화살표 연결선 88">
+            <a:extLst>
+              <a:ext uri="{FF2B5EF4-FFF2-40B4-BE49-F238E27FC236}">
+                <a16:creationId xmlns:a16="http://schemas.microsoft.com/office/drawing/2014/main" id="{AB56862C-78D4-C465-2B33-0BAE63EF4FBD}"/>
+              </a:ext>
+            </a:extLst>
+          </p:cNvPr>
+          <p:cNvCxnSpPr>
+            <a:cxnSpLocks/>
+            <a:stCxn id="42" idx="2"/>
+            <a:endCxn id="83" idx="0"/>
+          </p:cNvCxnSpPr>
+          <p:nvPr/>
+        </p:nvCxnSpPr>
+        <p:spPr>
+          <a:xfrm>
+            <a:off x="2195737" y="1807575"/>
+            <a:ext cx="501476" cy="526077"/>
+          </a:xfrm>
+          <a:prstGeom prst="straightConnector1">
+            <a:avLst/>
+          </a:prstGeom>
+          <a:ln>
+            <a:solidFill>
+              <a:schemeClr val="accent4">
+                <a:lumMod val="75000"/>
+              </a:schemeClr>
+            </a:solidFill>
+            <a:headEnd type="triangle"/>
+            <a:tailEnd type="triangle"/>
+          </a:ln>
+        </p:spPr>
+        <p:style>
+          <a:lnRef idx="1">
+            <a:schemeClr val="accent1"/>
+          </a:lnRef>
+          <a:fillRef idx="0">
+            <a:schemeClr val="accent1"/>
+          </a:fillRef>
+          <a:effectRef idx="0">
+            <a:schemeClr val="accent1"/>
+          </a:effectRef>
+          <a:fontRef idx="minor">
+            <a:schemeClr val="tx1"/>
+          </a:fontRef>
+        </p:style>
+      </p:cxnSp>
+      <p:cxnSp>
+        <p:nvCxnSpPr>
+          <p:cNvPr id="92" name="직선 화살표 연결선 91">
+            <a:extLst>
+              <a:ext uri="{FF2B5EF4-FFF2-40B4-BE49-F238E27FC236}">
+                <a16:creationId xmlns:a16="http://schemas.microsoft.com/office/drawing/2014/main" id="{3E560B18-976B-51AD-352F-F6E1660ED113}"/>
+              </a:ext>
+            </a:extLst>
+          </p:cNvPr>
+          <p:cNvCxnSpPr>
+            <a:cxnSpLocks/>
+            <a:stCxn id="42" idx="2"/>
+            <a:endCxn id="84" idx="0"/>
+          </p:cNvCxnSpPr>
+          <p:nvPr/>
+        </p:nvCxnSpPr>
+        <p:spPr>
+          <a:xfrm>
+            <a:off x="2195737" y="1807575"/>
+            <a:ext cx="1512167" cy="526077"/>
+          </a:xfrm>
+          <a:prstGeom prst="straightConnector1">
+            <a:avLst/>
+          </a:prstGeom>
+          <a:ln>
+            <a:solidFill>
+              <a:schemeClr val="accent4">
+                <a:lumMod val="75000"/>
+              </a:schemeClr>
+            </a:solidFill>
+            <a:headEnd type="triangle"/>
+            <a:tailEnd type="triangle"/>
+          </a:ln>
+        </p:spPr>
+        <p:style>
+          <a:lnRef idx="1">
+            <a:schemeClr val="accent1"/>
+          </a:lnRef>
+          <a:fillRef idx="0">
+            <a:schemeClr val="accent1"/>
+          </a:fillRef>
+          <a:effectRef idx="0">
+            <a:schemeClr val="accent1"/>
+          </a:effectRef>
+          <a:fontRef idx="minor">
+            <a:schemeClr val="tx1"/>
+          </a:fontRef>
+        </p:style>
+      </p:cxnSp>
+      <p:cxnSp>
+        <p:nvCxnSpPr>
+          <p:cNvPr id="95" name="직선 화살표 연결선 94">
+            <a:extLst>
+              <a:ext uri="{FF2B5EF4-FFF2-40B4-BE49-F238E27FC236}">
+                <a16:creationId xmlns:a16="http://schemas.microsoft.com/office/drawing/2014/main" id="{48E186A6-BA89-9FD5-0C28-FF51364460EA}"/>
+              </a:ext>
+            </a:extLst>
+          </p:cNvPr>
+          <p:cNvCxnSpPr>
+            <a:cxnSpLocks/>
+            <a:stCxn id="71" idx="2"/>
+            <a:endCxn id="59" idx="0"/>
+          </p:cNvCxnSpPr>
+          <p:nvPr/>
+        </p:nvCxnSpPr>
+        <p:spPr>
+          <a:xfrm>
+            <a:off x="683570" y="2809847"/>
+            <a:ext cx="0" cy="242706"/>
+          </a:xfrm>
+          <a:prstGeom prst="straightConnector1">
+            <a:avLst/>
+          </a:prstGeom>
+          <a:ln>
+            <a:solidFill>
+              <a:schemeClr val="accent4">
+                <a:lumMod val="75000"/>
+              </a:schemeClr>
+            </a:solidFill>
+            <a:headEnd type="triangle"/>
+            <a:tailEnd type="triangle"/>
+          </a:ln>
+        </p:spPr>
+        <p:style>
+          <a:lnRef idx="1">
+            <a:schemeClr val="accent1"/>
+          </a:lnRef>
+          <a:fillRef idx="0">
+            <a:schemeClr val="accent1"/>
+          </a:fillRef>
+          <a:effectRef idx="0">
+            <a:schemeClr val="accent1"/>
+          </a:effectRef>
+          <a:fontRef idx="minor">
+            <a:schemeClr val="tx1"/>
+          </a:fontRef>
+        </p:style>
+      </p:cxnSp>
+      <p:cxnSp>
+        <p:nvCxnSpPr>
+          <p:cNvPr id="98" name="직선 화살표 연결선 97">
+            <a:extLst>
+              <a:ext uri="{FF2B5EF4-FFF2-40B4-BE49-F238E27FC236}">
+                <a16:creationId xmlns:a16="http://schemas.microsoft.com/office/drawing/2014/main" id="{3AC52FE3-57D9-1C30-A86C-4E0946D514E3}"/>
+              </a:ext>
+            </a:extLst>
+          </p:cNvPr>
+          <p:cNvCxnSpPr>
+            <a:cxnSpLocks/>
+            <a:stCxn id="82" idx="2"/>
+            <a:endCxn id="48" idx="0"/>
+          </p:cNvCxnSpPr>
+          <p:nvPr/>
+        </p:nvCxnSpPr>
+        <p:spPr>
+          <a:xfrm>
+            <a:off x="1691681" y="2809847"/>
+            <a:ext cx="2580" cy="242706"/>
+          </a:xfrm>
+          <a:prstGeom prst="straightConnector1">
+            <a:avLst/>
+          </a:prstGeom>
+          <a:ln>
+            <a:solidFill>
+              <a:schemeClr val="accent4">
+                <a:lumMod val="75000"/>
+              </a:schemeClr>
+            </a:solidFill>
+            <a:headEnd type="triangle"/>
+            <a:tailEnd type="triangle"/>
+          </a:ln>
+        </p:spPr>
+        <p:style>
+          <a:lnRef idx="1">
+            <a:schemeClr val="accent1"/>
+          </a:lnRef>
+          <a:fillRef idx="0">
+            <a:schemeClr val="accent1"/>
+          </a:fillRef>
+          <a:effectRef idx="0">
+            <a:schemeClr val="accent1"/>
+          </a:effectRef>
+          <a:fontRef idx="minor">
+            <a:schemeClr val="tx1"/>
+          </a:fontRef>
+        </p:style>
+      </p:cxnSp>
+      <p:cxnSp>
+        <p:nvCxnSpPr>
+          <p:cNvPr id="101" name="직선 화살표 연결선 100">
+            <a:extLst>
+              <a:ext uri="{FF2B5EF4-FFF2-40B4-BE49-F238E27FC236}">
+                <a16:creationId xmlns:a16="http://schemas.microsoft.com/office/drawing/2014/main" id="{698E2093-9A47-B323-B4C3-EF81BEFFA124}"/>
+              </a:ext>
+            </a:extLst>
+          </p:cNvPr>
+          <p:cNvCxnSpPr>
+            <a:cxnSpLocks/>
+            <a:stCxn id="83" idx="2"/>
+            <a:endCxn id="81" idx="0"/>
+          </p:cNvCxnSpPr>
+          <p:nvPr/>
+        </p:nvCxnSpPr>
+        <p:spPr>
+          <a:xfrm>
+            <a:off x="2697213" y="2809847"/>
+            <a:ext cx="0" cy="242706"/>
+          </a:xfrm>
+          <a:prstGeom prst="straightConnector1">
+            <a:avLst/>
+          </a:prstGeom>
+          <a:ln>
+            <a:solidFill>
+              <a:schemeClr val="accent4">
+                <a:lumMod val="75000"/>
+              </a:schemeClr>
+            </a:solidFill>
+            <a:headEnd type="triangle"/>
+            <a:tailEnd type="triangle"/>
+          </a:ln>
+        </p:spPr>
+        <p:style>
+          <a:lnRef idx="1">
+            <a:schemeClr val="accent1"/>
+          </a:lnRef>
+          <a:fillRef idx="0">
+            <a:schemeClr val="accent1"/>
+          </a:fillRef>
+          <a:effectRef idx="0">
+            <a:schemeClr val="accent1"/>
+          </a:effectRef>
+          <a:fontRef idx="minor">
+            <a:schemeClr val="tx1"/>
+          </a:fontRef>
+        </p:style>
+      </p:cxnSp>
+      <p:cxnSp>
+        <p:nvCxnSpPr>
+          <p:cNvPr id="104" name="직선 화살표 연결선 103">
+            <a:extLst>
+              <a:ext uri="{FF2B5EF4-FFF2-40B4-BE49-F238E27FC236}">
+                <a16:creationId xmlns:a16="http://schemas.microsoft.com/office/drawing/2014/main" id="{7A282017-1A58-FC9F-3DEF-515C77AD1DFB}"/>
+              </a:ext>
+            </a:extLst>
+          </p:cNvPr>
+          <p:cNvCxnSpPr>
+            <a:cxnSpLocks/>
+            <a:stCxn id="84" idx="2"/>
+            <a:endCxn id="80" idx="0"/>
+          </p:cNvCxnSpPr>
+          <p:nvPr/>
+        </p:nvCxnSpPr>
+        <p:spPr>
+          <a:xfrm>
+            <a:off x="3707904" y="2809847"/>
+            <a:ext cx="0" cy="242706"/>
+          </a:xfrm>
+          <a:prstGeom prst="straightConnector1">
+            <a:avLst/>
+          </a:prstGeom>
+          <a:ln>
+            <a:solidFill>
+              <a:schemeClr val="accent4">
+                <a:lumMod val="75000"/>
+              </a:schemeClr>
+            </a:solidFill>
+            <a:headEnd type="triangle"/>
+            <a:tailEnd type="triangle"/>
+          </a:ln>
+        </p:spPr>
+        <p:style>
+          <a:lnRef idx="1">
+            <a:schemeClr val="accent1"/>
+          </a:lnRef>
+          <a:fillRef idx="0">
+            <a:schemeClr val="accent1"/>
+          </a:fillRef>
+          <a:effectRef idx="0">
+            <a:schemeClr val="accent1"/>
+          </a:effectRef>
+          <a:fontRef idx="minor">
+            <a:schemeClr val="tx1"/>
+          </a:fontRef>
+        </p:style>
+      </p:cxnSp>
+      <p:sp>
+        <p:nvSpPr>
+          <p:cNvPr id="124" name="직사각형 123">
+            <a:extLst>
+              <a:ext uri="{FF2B5EF4-FFF2-40B4-BE49-F238E27FC236}">
+                <a16:creationId xmlns:a16="http://schemas.microsoft.com/office/drawing/2014/main" id="{039755A0-900A-2DEA-2148-CB8EFDA059FA}"/>
+              </a:ext>
+            </a:extLst>
+          </p:cNvPr>
+          <p:cNvSpPr/>
+          <p:nvPr/>
+        </p:nvSpPr>
+        <p:spPr>
+          <a:xfrm>
+            <a:off x="1334221" y="4106527"/>
+            <a:ext cx="720080" cy="476195"/>
+          </a:xfrm>
+          <a:prstGeom prst="rect">
+            <a:avLst/>
+          </a:prstGeom>
+          <a:solidFill>
+            <a:schemeClr val="accent6">
+              <a:lumMod val="20000"/>
+              <a:lumOff val="80000"/>
+            </a:schemeClr>
+          </a:solidFill>
+          <a:ln w="12700"/>
+        </p:spPr>
+        <p:style>
+          <a:lnRef idx="2">
+            <a:schemeClr val="accent1">
+              <a:shade val="15000"/>
+            </a:schemeClr>
+          </a:lnRef>
+          <a:fillRef idx="1">
+            <a:schemeClr val="accent1"/>
+          </a:fillRef>
+          <a:effectRef idx="0">
+            <a:schemeClr val="accent1"/>
+          </a:effectRef>
+          <a:fontRef idx="minor">
+            <a:schemeClr val="lt1"/>
+          </a:fontRef>
+        </p:style>
+        <p:txBody>
+          <a:bodyPr rtlCol="0" anchor="ctr"/>
+          <a:lstStyle/>
+          <a:p>
+            <a:pPr algn="ctr"/>
+            <a:r>
+              <a:rPr kumimoji="1" lang="en-US" altLang="ko-KR" sz="800">
+                <a:solidFill>
+                  <a:schemeClr val="tx1"/>
+                </a:solidFill>
+              </a:rPr>
+              <a:t>NVSwitch</a:t>
+            </a:r>
+          </a:p>
+        </p:txBody>
+      </p:sp>
+      <p:sp>
+        <p:nvSpPr>
+          <p:cNvPr id="125" name="직사각형 124">
+            <a:extLst>
+              <a:ext uri="{FF2B5EF4-FFF2-40B4-BE49-F238E27FC236}">
+                <a16:creationId xmlns:a16="http://schemas.microsoft.com/office/drawing/2014/main" id="{D3F403F6-05E6-8166-83FE-CF719702F67E}"/>
+              </a:ext>
+            </a:extLst>
+          </p:cNvPr>
+          <p:cNvSpPr/>
+          <p:nvPr/>
+        </p:nvSpPr>
+        <p:spPr>
+          <a:xfrm>
+            <a:off x="2337173" y="4106527"/>
+            <a:ext cx="720080" cy="476195"/>
+          </a:xfrm>
+          <a:prstGeom prst="rect">
+            <a:avLst/>
+          </a:prstGeom>
+          <a:solidFill>
+            <a:schemeClr val="accent6">
+              <a:lumMod val="20000"/>
+              <a:lumOff val="80000"/>
+            </a:schemeClr>
+          </a:solidFill>
+          <a:ln w="12700"/>
+        </p:spPr>
+        <p:style>
+          <a:lnRef idx="2">
+            <a:schemeClr val="accent1">
+              <a:shade val="15000"/>
+            </a:schemeClr>
+          </a:lnRef>
+          <a:fillRef idx="1">
+            <a:schemeClr val="accent1"/>
+          </a:fillRef>
+          <a:effectRef idx="0">
+            <a:schemeClr val="accent1"/>
+          </a:effectRef>
+          <a:fontRef idx="minor">
+            <a:schemeClr val="lt1"/>
+          </a:fontRef>
+        </p:style>
+        <p:txBody>
+          <a:bodyPr rtlCol="0" anchor="ctr"/>
+          <a:lstStyle/>
+          <a:p>
+            <a:pPr algn="ctr"/>
+            <a:r>
+              <a:rPr kumimoji="1" lang="en-US" altLang="ko-KR" sz="800">
+                <a:solidFill>
+                  <a:schemeClr val="tx1"/>
+                </a:solidFill>
+              </a:rPr>
+              <a:t>NVSwitch</a:t>
+            </a:r>
+          </a:p>
+        </p:txBody>
+      </p:sp>
+      <p:sp>
+        <p:nvSpPr>
+          <p:cNvPr id="132" name="직사각형 131">
+            <a:extLst>
+              <a:ext uri="{FF2B5EF4-FFF2-40B4-BE49-F238E27FC236}">
+                <a16:creationId xmlns:a16="http://schemas.microsoft.com/office/drawing/2014/main" id="{03810449-00C0-5CCF-9B73-C7C224F6426D}"/>
+              </a:ext>
+            </a:extLst>
+          </p:cNvPr>
+          <p:cNvSpPr/>
+          <p:nvPr/>
+        </p:nvSpPr>
+        <p:spPr>
+          <a:xfrm>
+            <a:off x="4211960" y="4106526"/>
+            <a:ext cx="720080" cy="476195"/>
+          </a:xfrm>
+          <a:prstGeom prst="rect">
+            <a:avLst/>
+          </a:prstGeom>
+          <a:solidFill>
+            <a:schemeClr val="accent4">
+              <a:lumMod val="20000"/>
+              <a:lumOff val="80000"/>
+            </a:schemeClr>
+          </a:solidFill>
+          <a:ln w="12700"/>
+        </p:spPr>
+        <p:style>
+          <a:lnRef idx="2">
+            <a:schemeClr val="accent1">
+              <a:shade val="15000"/>
+            </a:schemeClr>
+          </a:lnRef>
+          <a:fillRef idx="1">
+            <a:schemeClr val="accent1"/>
+          </a:fillRef>
+          <a:effectRef idx="0">
+            <a:schemeClr val="accent1"/>
+          </a:effectRef>
+          <a:fontRef idx="minor">
+            <a:schemeClr val="lt1"/>
+          </a:fontRef>
+        </p:style>
+        <p:txBody>
+          <a:bodyPr rtlCol="0" anchor="ctr"/>
+          <a:lstStyle/>
+          <a:p>
+            <a:pPr algn="ctr"/>
+            <a:r>
+              <a:rPr kumimoji="1" lang="en-US" altLang="ko-KR" sz="800">
+                <a:solidFill>
+                  <a:schemeClr val="tx1"/>
+                </a:solidFill>
+              </a:rPr>
+              <a:t>PCIe</a:t>
+            </a:r>
+          </a:p>
+          <a:p>
+            <a:pPr algn="ctr"/>
+            <a:r>
+              <a:rPr kumimoji="1" lang="en-US" altLang="ko-KR" sz="800">
+                <a:solidFill>
+                  <a:schemeClr val="tx1"/>
+                </a:solidFill>
+              </a:rPr>
+              <a:t>Switch</a:t>
+            </a:r>
+            <a:endParaRPr kumimoji="1" lang="ko-KR" altLang="en-US" sz="800">
+              <a:solidFill>
+                <a:schemeClr val="tx1"/>
+              </a:solidFill>
+            </a:endParaRPr>
+          </a:p>
+        </p:txBody>
+      </p:sp>
+      <p:cxnSp>
+        <p:nvCxnSpPr>
+          <p:cNvPr id="133" name="직선 화살표 연결선 132">
+            <a:extLst>
+              <a:ext uri="{FF2B5EF4-FFF2-40B4-BE49-F238E27FC236}">
+                <a16:creationId xmlns:a16="http://schemas.microsoft.com/office/drawing/2014/main" id="{9ACB9585-E23D-D4D1-ACAF-4700C1C3E24D}"/>
+              </a:ext>
+            </a:extLst>
+          </p:cNvPr>
+          <p:cNvCxnSpPr>
+            <a:cxnSpLocks/>
+            <a:stCxn id="59" idx="2"/>
+            <a:endCxn id="124" idx="0"/>
+          </p:cNvCxnSpPr>
+          <p:nvPr/>
+        </p:nvCxnSpPr>
+        <p:spPr>
+          <a:xfrm>
+            <a:off x="683570" y="3528748"/>
+            <a:ext cx="1010691" cy="577779"/>
+          </a:xfrm>
+          <a:prstGeom prst="straightConnector1">
+            <a:avLst/>
+          </a:prstGeom>
+          <a:ln>
+            <a:solidFill>
+              <a:schemeClr val="accent6">
+                <a:lumMod val="75000"/>
+              </a:schemeClr>
+            </a:solidFill>
+            <a:headEnd type="triangle"/>
+            <a:tailEnd type="triangle"/>
+          </a:ln>
+        </p:spPr>
+        <p:style>
+          <a:lnRef idx="1">
+            <a:schemeClr val="accent1"/>
+          </a:lnRef>
+          <a:fillRef idx="0">
+            <a:schemeClr val="accent1"/>
+          </a:fillRef>
+          <a:effectRef idx="0">
+            <a:schemeClr val="accent1"/>
+          </a:effectRef>
+          <a:fontRef idx="minor">
+            <a:schemeClr val="tx1"/>
+          </a:fontRef>
+        </p:style>
+      </p:cxnSp>
+      <p:cxnSp>
+        <p:nvCxnSpPr>
+          <p:cNvPr id="136" name="직선 화살표 연결선 135">
+            <a:extLst>
+              <a:ext uri="{FF2B5EF4-FFF2-40B4-BE49-F238E27FC236}">
+                <a16:creationId xmlns:a16="http://schemas.microsoft.com/office/drawing/2014/main" id="{7CFE7912-19F7-8337-7AC5-F394BD123449}"/>
+              </a:ext>
+            </a:extLst>
+          </p:cNvPr>
+          <p:cNvCxnSpPr>
+            <a:cxnSpLocks/>
+            <a:stCxn id="48" idx="2"/>
+            <a:endCxn id="124" idx="0"/>
+          </p:cNvCxnSpPr>
+          <p:nvPr/>
+        </p:nvCxnSpPr>
+        <p:spPr>
+          <a:xfrm>
+            <a:off x="1694261" y="3528748"/>
+            <a:ext cx="0" cy="577779"/>
+          </a:xfrm>
+          <a:prstGeom prst="straightConnector1">
+            <a:avLst/>
+          </a:prstGeom>
+          <a:ln>
+            <a:solidFill>
+              <a:schemeClr val="accent6">
+                <a:lumMod val="75000"/>
+              </a:schemeClr>
+            </a:solidFill>
+            <a:headEnd type="triangle"/>
+            <a:tailEnd type="triangle"/>
+          </a:ln>
+        </p:spPr>
+        <p:style>
+          <a:lnRef idx="1">
+            <a:schemeClr val="accent1"/>
+          </a:lnRef>
+          <a:fillRef idx="0">
+            <a:schemeClr val="accent1"/>
+          </a:fillRef>
+          <a:effectRef idx="0">
+            <a:schemeClr val="accent1"/>
+          </a:effectRef>
+          <a:fontRef idx="minor">
+            <a:schemeClr val="tx1"/>
+          </a:fontRef>
+        </p:style>
+      </p:cxnSp>
+      <p:cxnSp>
+        <p:nvCxnSpPr>
+          <p:cNvPr id="139" name="직선 화살표 연결선 138">
+            <a:extLst>
+              <a:ext uri="{FF2B5EF4-FFF2-40B4-BE49-F238E27FC236}">
+                <a16:creationId xmlns:a16="http://schemas.microsoft.com/office/drawing/2014/main" id="{CCD5F9DC-58BE-31F1-97D2-83DBCAAE7CC3}"/>
+              </a:ext>
+            </a:extLst>
+          </p:cNvPr>
+          <p:cNvCxnSpPr>
+            <a:cxnSpLocks/>
+            <a:stCxn id="81" idx="2"/>
+            <a:endCxn id="124" idx="0"/>
+          </p:cNvCxnSpPr>
+          <p:nvPr/>
+        </p:nvCxnSpPr>
+        <p:spPr>
+          <a:xfrm flipH="1">
+            <a:off x="1694261" y="3528748"/>
+            <a:ext cx="1002952" cy="577779"/>
+          </a:xfrm>
+          <a:prstGeom prst="straightConnector1">
+            <a:avLst/>
+          </a:prstGeom>
+          <a:ln>
+            <a:solidFill>
+              <a:schemeClr val="accent6">
+                <a:lumMod val="75000"/>
+              </a:schemeClr>
+            </a:solidFill>
+            <a:headEnd type="triangle"/>
+            <a:tailEnd type="triangle"/>
+          </a:ln>
+        </p:spPr>
+        <p:style>
+          <a:lnRef idx="1">
+            <a:schemeClr val="accent1"/>
+          </a:lnRef>
+          <a:fillRef idx="0">
+            <a:schemeClr val="accent1"/>
+          </a:fillRef>
+          <a:effectRef idx="0">
+            <a:schemeClr val="accent1"/>
+          </a:effectRef>
+          <a:fontRef idx="minor">
+            <a:schemeClr val="tx1"/>
+          </a:fontRef>
+        </p:style>
+      </p:cxnSp>
+      <p:cxnSp>
+        <p:nvCxnSpPr>
+          <p:cNvPr id="142" name="직선 화살표 연결선 141">
+            <a:extLst>
+              <a:ext uri="{FF2B5EF4-FFF2-40B4-BE49-F238E27FC236}">
+                <a16:creationId xmlns:a16="http://schemas.microsoft.com/office/drawing/2014/main" id="{158C167E-0116-DF13-8F3B-F22D7DB81CDC}"/>
+              </a:ext>
+            </a:extLst>
+          </p:cNvPr>
+          <p:cNvCxnSpPr>
+            <a:cxnSpLocks/>
+            <a:stCxn id="80" idx="2"/>
+            <a:endCxn id="125" idx="0"/>
+          </p:cNvCxnSpPr>
+          <p:nvPr/>
+        </p:nvCxnSpPr>
+        <p:spPr>
+          <a:xfrm flipH="1">
+            <a:off x="2697213" y="3528748"/>
+            <a:ext cx="1010691" cy="577779"/>
+          </a:xfrm>
+          <a:prstGeom prst="straightConnector1">
+            <a:avLst/>
+          </a:prstGeom>
+          <a:ln>
+            <a:solidFill>
+              <a:schemeClr val="accent6">
+                <a:lumMod val="75000"/>
+              </a:schemeClr>
+            </a:solidFill>
+            <a:headEnd type="triangle"/>
+            <a:tailEnd type="triangle"/>
+          </a:ln>
+        </p:spPr>
+        <p:style>
+          <a:lnRef idx="1">
+            <a:schemeClr val="accent1"/>
+          </a:lnRef>
+          <a:fillRef idx="0">
+            <a:schemeClr val="accent1"/>
+          </a:fillRef>
+          <a:effectRef idx="0">
+            <a:schemeClr val="accent1"/>
+          </a:effectRef>
+          <a:fontRef idx="minor">
+            <a:schemeClr val="tx1"/>
+          </a:fontRef>
+        </p:style>
+      </p:cxnSp>
+      <p:cxnSp>
+        <p:nvCxnSpPr>
+          <p:cNvPr id="145" name="직선 화살표 연결선 144">
+            <a:extLst>
+              <a:ext uri="{FF2B5EF4-FFF2-40B4-BE49-F238E27FC236}">
+                <a16:creationId xmlns:a16="http://schemas.microsoft.com/office/drawing/2014/main" id="{353C662C-BF3A-978B-5FD6-C428B8419B79}"/>
+              </a:ext>
+            </a:extLst>
+          </p:cNvPr>
+          <p:cNvCxnSpPr>
+            <a:cxnSpLocks/>
+            <a:stCxn id="81" idx="2"/>
+            <a:endCxn id="125" idx="0"/>
+          </p:cNvCxnSpPr>
+          <p:nvPr/>
+        </p:nvCxnSpPr>
+        <p:spPr>
+          <a:xfrm>
+            <a:off x="2697213" y="3528748"/>
+            <a:ext cx="0" cy="577779"/>
+          </a:xfrm>
+          <a:prstGeom prst="straightConnector1">
+            <a:avLst/>
+          </a:prstGeom>
+          <a:ln>
+            <a:solidFill>
+              <a:schemeClr val="accent6">
+                <a:lumMod val="75000"/>
+              </a:schemeClr>
+            </a:solidFill>
+            <a:headEnd type="triangle"/>
+            <a:tailEnd type="triangle"/>
+          </a:ln>
+        </p:spPr>
+        <p:style>
+          <a:lnRef idx="1">
+            <a:schemeClr val="accent1"/>
+          </a:lnRef>
+          <a:fillRef idx="0">
+            <a:schemeClr val="accent1"/>
+          </a:fillRef>
+          <a:effectRef idx="0">
+            <a:schemeClr val="accent1"/>
+          </a:effectRef>
+          <a:fontRef idx="minor">
+            <a:schemeClr val="tx1"/>
+          </a:fontRef>
+        </p:style>
+      </p:cxnSp>
+      <p:cxnSp>
+        <p:nvCxnSpPr>
+          <p:cNvPr id="148" name="직선 화살표 연결선 147">
+            <a:extLst>
+              <a:ext uri="{FF2B5EF4-FFF2-40B4-BE49-F238E27FC236}">
+                <a16:creationId xmlns:a16="http://schemas.microsoft.com/office/drawing/2014/main" id="{2297E809-24BF-6AD9-2028-CDAB62576D9F}"/>
+              </a:ext>
+            </a:extLst>
+          </p:cNvPr>
+          <p:cNvCxnSpPr>
+            <a:cxnSpLocks/>
+            <a:stCxn id="48" idx="2"/>
+            <a:endCxn id="125" idx="0"/>
+          </p:cNvCxnSpPr>
+          <p:nvPr/>
+        </p:nvCxnSpPr>
+        <p:spPr>
+          <a:xfrm>
+            <a:off x="1694261" y="3528748"/>
+            <a:ext cx="1002952" cy="577779"/>
+          </a:xfrm>
+          <a:prstGeom prst="straightConnector1">
+            <a:avLst/>
+          </a:prstGeom>
+          <a:ln>
+            <a:solidFill>
+              <a:schemeClr val="accent6">
+                <a:lumMod val="75000"/>
+              </a:schemeClr>
+            </a:solidFill>
+            <a:headEnd type="triangle"/>
+            <a:tailEnd type="triangle"/>
+          </a:ln>
+        </p:spPr>
+        <p:style>
+          <a:lnRef idx="1">
+            <a:schemeClr val="accent1"/>
+          </a:lnRef>
+          <a:fillRef idx="0">
+            <a:schemeClr val="accent1"/>
+          </a:fillRef>
+          <a:effectRef idx="0">
+            <a:schemeClr val="accent1"/>
+          </a:effectRef>
+          <a:fontRef idx="minor">
+            <a:schemeClr val="tx1"/>
+          </a:fontRef>
+        </p:style>
+      </p:cxnSp>
+      <p:cxnSp>
+        <p:nvCxnSpPr>
+          <p:cNvPr id="151" name="직선 화살표 연결선 150">
+            <a:extLst>
+              <a:ext uri="{FF2B5EF4-FFF2-40B4-BE49-F238E27FC236}">
+                <a16:creationId xmlns:a16="http://schemas.microsoft.com/office/drawing/2014/main" id="{CC8BD931-8552-F22C-A5DF-998CA0E5006D}"/>
+              </a:ext>
+            </a:extLst>
+          </p:cNvPr>
+          <p:cNvCxnSpPr>
+            <a:cxnSpLocks/>
+            <a:stCxn id="59" idx="2"/>
+            <a:endCxn id="125" idx="0"/>
+          </p:cNvCxnSpPr>
+          <p:nvPr/>
+        </p:nvCxnSpPr>
+        <p:spPr>
+          <a:xfrm>
+            <a:off x="683570" y="3528748"/>
+            <a:ext cx="2013643" cy="577779"/>
+          </a:xfrm>
+          <a:prstGeom prst="straightConnector1">
+            <a:avLst/>
+          </a:prstGeom>
+          <a:ln>
+            <a:solidFill>
+              <a:schemeClr val="accent6">
+                <a:lumMod val="75000"/>
+              </a:schemeClr>
+            </a:solidFill>
+            <a:headEnd type="triangle"/>
+            <a:tailEnd type="triangle"/>
+          </a:ln>
+        </p:spPr>
+        <p:style>
+          <a:lnRef idx="1">
+            <a:schemeClr val="accent1"/>
+          </a:lnRef>
+          <a:fillRef idx="0">
+            <a:schemeClr val="accent1"/>
+          </a:fillRef>
+          <a:effectRef idx="0">
+            <a:schemeClr val="accent1"/>
+          </a:effectRef>
+          <a:fontRef idx="minor">
+            <a:schemeClr val="tx1"/>
+          </a:fontRef>
+        </p:style>
+      </p:cxnSp>
+      <p:cxnSp>
+        <p:nvCxnSpPr>
+          <p:cNvPr id="154" name="직선 화살표 연결선 153">
+            <a:extLst>
+              <a:ext uri="{FF2B5EF4-FFF2-40B4-BE49-F238E27FC236}">
+                <a16:creationId xmlns:a16="http://schemas.microsoft.com/office/drawing/2014/main" id="{E91B4119-1CF3-04F8-6AC1-ECF384AC0DEE}"/>
+              </a:ext>
+            </a:extLst>
+          </p:cNvPr>
+          <p:cNvCxnSpPr>
+            <a:cxnSpLocks/>
+            <a:stCxn id="80" idx="2"/>
+            <a:endCxn id="124" idx="0"/>
+          </p:cNvCxnSpPr>
+          <p:nvPr/>
+        </p:nvCxnSpPr>
+        <p:spPr>
+          <a:xfrm flipH="1">
+            <a:off x="1694261" y="3528748"/>
+            <a:ext cx="2013643" cy="577779"/>
+          </a:xfrm>
+          <a:prstGeom prst="straightConnector1">
+            <a:avLst/>
+          </a:prstGeom>
+          <a:ln>
+            <a:solidFill>
+              <a:schemeClr val="accent6">
+                <a:lumMod val="75000"/>
+              </a:schemeClr>
+            </a:solidFill>
+            <a:headEnd type="triangle"/>
+            <a:tailEnd type="triangle"/>
+          </a:ln>
+        </p:spPr>
+        <p:style>
+          <a:lnRef idx="1">
+            <a:schemeClr val="accent1"/>
+          </a:lnRef>
+          <a:fillRef idx="0">
+            <a:schemeClr val="accent1"/>
+          </a:fillRef>
+          <a:effectRef idx="0">
+            <a:schemeClr val="accent1"/>
+          </a:effectRef>
+          <a:fontRef idx="minor">
+            <a:schemeClr val="tx1"/>
+          </a:fontRef>
+        </p:style>
+      </p:cxnSp>
+      <p:sp>
+        <p:nvSpPr>
+          <p:cNvPr id="158" name="직사각형 157">
+            <a:extLst>
+              <a:ext uri="{FF2B5EF4-FFF2-40B4-BE49-F238E27FC236}">
+                <a16:creationId xmlns:a16="http://schemas.microsoft.com/office/drawing/2014/main" id="{8D8E96C7-F7B0-DB95-8F32-875A4F3FBA7B}"/>
+              </a:ext>
+            </a:extLst>
+          </p:cNvPr>
+          <p:cNvSpPr/>
+          <p:nvPr/>
+        </p:nvSpPr>
+        <p:spPr>
+          <a:xfrm>
+            <a:off x="5438678" y="478911"/>
+            <a:ext cx="720080" cy="476195"/>
+          </a:xfrm>
+          <a:prstGeom prst="rect">
+            <a:avLst/>
+          </a:prstGeom>
+          <a:solidFill>
+            <a:schemeClr val="bg2">
+              <a:lumMod val="90000"/>
+            </a:schemeClr>
+          </a:solidFill>
+          <a:ln w="12700"/>
+        </p:spPr>
+        <p:style>
+          <a:lnRef idx="2">
+            <a:schemeClr val="accent1">
+              <a:shade val="15000"/>
+            </a:schemeClr>
+          </a:lnRef>
+          <a:fillRef idx="1">
+            <a:schemeClr val="accent1"/>
+          </a:fillRef>
+          <a:effectRef idx="0">
+            <a:schemeClr val="accent1"/>
+          </a:effectRef>
+          <a:fontRef idx="minor">
+            <a:schemeClr val="lt1"/>
+          </a:fontRef>
+        </p:style>
+        <p:txBody>
+          <a:bodyPr rtlCol="0" anchor="ctr"/>
+          <a:lstStyle/>
+          <a:p>
+            <a:pPr algn="ctr"/>
+            <a:r>
+              <a:rPr kumimoji="1" lang="en-US" altLang="ko-KR" sz="700">
+                <a:solidFill>
+                  <a:schemeClr val="tx1"/>
+                </a:solidFill>
+              </a:rPr>
+              <a:t>NVMe</a:t>
+            </a:r>
+            <a:endParaRPr kumimoji="1" lang="ko-KR" altLang="en-US" sz="700">
+              <a:solidFill>
+                <a:schemeClr val="tx1"/>
+              </a:solidFill>
+            </a:endParaRPr>
+          </a:p>
+        </p:txBody>
+      </p:sp>
+      <p:sp>
+        <p:nvSpPr>
+          <p:cNvPr id="159" name="직사각형 158">
+            <a:extLst>
+              <a:ext uri="{FF2B5EF4-FFF2-40B4-BE49-F238E27FC236}">
+                <a16:creationId xmlns:a16="http://schemas.microsoft.com/office/drawing/2014/main" id="{866476C7-2D6F-1748-628F-960CC59798A7}"/>
+              </a:ext>
+            </a:extLst>
+          </p:cNvPr>
+          <p:cNvSpPr/>
+          <p:nvPr/>
+        </p:nvSpPr>
+        <p:spPr>
+          <a:xfrm>
+            <a:off x="5366669" y="523058"/>
+            <a:ext cx="720080" cy="476195"/>
+          </a:xfrm>
+          <a:prstGeom prst="rect">
+            <a:avLst/>
+          </a:prstGeom>
+          <a:solidFill>
+            <a:schemeClr val="bg2">
+              <a:lumMod val="90000"/>
+            </a:schemeClr>
+          </a:solidFill>
+          <a:ln w="12700"/>
+        </p:spPr>
+        <p:style>
+          <a:lnRef idx="2">
+            <a:schemeClr val="accent1">
+              <a:shade val="15000"/>
+            </a:schemeClr>
+          </a:lnRef>
+          <a:fillRef idx="1">
+            <a:schemeClr val="accent1"/>
+          </a:fillRef>
+          <a:effectRef idx="0">
+            <a:schemeClr val="accent1"/>
+          </a:effectRef>
+          <a:fontRef idx="minor">
+            <a:schemeClr val="lt1"/>
+          </a:fontRef>
+        </p:style>
+        <p:txBody>
+          <a:bodyPr rtlCol="0" anchor="ctr"/>
+          <a:lstStyle/>
+          <a:p>
+            <a:pPr algn="ctr"/>
+            <a:r>
+              <a:rPr kumimoji="1" lang="en-US" altLang="ko-KR" sz="700">
+                <a:solidFill>
+                  <a:schemeClr val="tx1"/>
+                </a:solidFill>
+              </a:rPr>
+              <a:t>NVMe</a:t>
+            </a:r>
+            <a:endParaRPr kumimoji="1" lang="ko-KR" altLang="en-US" sz="700">
+              <a:solidFill>
+                <a:schemeClr val="tx1"/>
+              </a:solidFill>
+            </a:endParaRPr>
+          </a:p>
+        </p:txBody>
+      </p:sp>
+      <p:sp>
+        <p:nvSpPr>
+          <p:cNvPr id="160" name="직사각형 159">
+            <a:extLst>
+              <a:ext uri="{FF2B5EF4-FFF2-40B4-BE49-F238E27FC236}">
+                <a16:creationId xmlns:a16="http://schemas.microsoft.com/office/drawing/2014/main" id="{098928FF-A4F9-606E-48D7-502845190A3F}"/>
+              </a:ext>
+            </a:extLst>
+          </p:cNvPr>
+          <p:cNvSpPr/>
+          <p:nvPr/>
+        </p:nvSpPr>
+        <p:spPr>
+          <a:xfrm>
+            <a:off x="5294660" y="567205"/>
+            <a:ext cx="720080" cy="476195"/>
+          </a:xfrm>
+          <a:prstGeom prst="rect">
+            <a:avLst/>
+          </a:prstGeom>
+          <a:solidFill>
+            <a:schemeClr val="bg2">
+              <a:lumMod val="90000"/>
+            </a:schemeClr>
+          </a:solidFill>
+          <a:ln w="12700"/>
+        </p:spPr>
+        <p:style>
+          <a:lnRef idx="2">
+            <a:schemeClr val="accent1">
+              <a:shade val="15000"/>
+            </a:schemeClr>
+          </a:lnRef>
+          <a:fillRef idx="1">
+            <a:schemeClr val="accent1"/>
+          </a:fillRef>
+          <a:effectRef idx="0">
+            <a:schemeClr val="accent1"/>
+          </a:effectRef>
+          <a:fontRef idx="minor">
+            <a:schemeClr val="lt1"/>
+          </a:fontRef>
+        </p:style>
+        <p:txBody>
+          <a:bodyPr rtlCol="0" anchor="ctr"/>
+          <a:lstStyle/>
+          <a:p>
+            <a:pPr algn="ctr"/>
+            <a:r>
+              <a:rPr kumimoji="1" lang="en-US" altLang="ko-KR" sz="700">
+                <a:solidFill>
+                  <a:schemeClr val="tx1"/>
+                </a:solidFill>
+              </a:rPr>
+              <a:t>NVMe</a:t>
+            </a:r>
+            <a:endParaRPr kumimoji="1" lang="ko-KR" altLang="en-US" sz="700">
+              <a:solidFill>
+                <a:schemeClr val="tx1"/>
+              </a:solidFill>
+            </a:endParaRPr>
+          </a:p>
+        </p:txBody>
+      </p:sp>
+      <p:sp>
+        <p:nvSpPr>
+          <p:cNvPr id="161" name="직사각형 160">
+            <a:extLst>
+              <a:ext uri="{FF2B5EF4-FFF2-40B4-BE49-F238E27FC236}">
+                <a16:creationId xmlns:a16="http://schemas.microsoft.com/office/drawing/2014/main" id="{60DFC293-2CD3-F07A-2106-DDAA1DF09C28}"/>
+              </a:ext>
+            </a:extLst>
+          </p:cNvPr>
+          <p:cNvSpPr/>
+          <p:nvPr/>
+        </p:nvSpPr>
+        <p:spPr>
+          <a:xfrm>
+            <a:off x="5222651" y="611352"/>
+            <a:ext cx="720080" cy="476195"/>
+          </a:xfrm>
+          <a:prstGeom prst="rect">
+            <a:avLst/>
+          </a:prstGeom>
+          <a:solidFill>
+            <a:schemeClr val="bg2">
+              <a:lumMod val="90000"/>
+            </a:schemeClr>
+          </a:solidFill>
+          <a:ln w="12700"/>
+        </p:spPr>
+        <p:style>
+          <a:lnRef idx="2">
+            <a:schemeClr val="accent1">
+              <a:shade val="15000"/>
+            </a:schemeClr>
+          </a:lnRef>
+          <a:fillRef idx="1">
+            <a:schemeClr val="accent1"/>
+          </a:fillRef>
+          <a:effectRef idx="0">
+            <a:schemeClr val="accent1"/>
+          </a:effectRef>
+          <a:fontRef idx="minor">
+            <a:schemeClr val="lt1"/>
+          </a:fontRef>
+        </p:style>
+        <p:txBody>
+          <a:bodyPr rtlCol="0" anchor="ctr"/>
+          <a:lstStyle/>
+          <a:p>
+            <a:pPr algn="ctr"/>
+            <a:r>
+              <a:rPr kumimoji="1" lang="en-US" altLang="ko-KR" sz="800">
+                <a:solidFill>
+                  <a:schemeClr val="tx1"/>
+                </a:solidFill>
+              </a:rPr>
+              <a:t>Data Cache</a:t>
+            </a:r>
+          </a:p>
+          <a:p>
+            <a:pPr algn="ctr"/>
+            <a:r>
+              <a:rPr kumimoji="1" lang="en-US" altLang="ko-KR" sz="800">
+                <a:solidFill>
+                  <a:schemeClr val="tx1"/>
+                </a:solidFill>
+              </a:rPr>
+              <a:t>NVMe</a:t>
+            </a:r>
+          </a:p>
+          <a:p>
+            <a:pPr algn="ctr"/>
+            <a:r>
+              <a:rPr kumimoji="1" lang="en-US" altLang="ko-KR" sz="800">
+                <a:solidFill>
+                  <a:schemeClr val="tx1"/>
+                </a:solidFill>
+              </a:rPr>
+              <a:t>(3.84 TB)</a:t>
+            </a:r>
+          </a:p>
+        </p:txBody>
+      </p:sp>
+      <p:sp>
+        <p:nvSpPr>
+          <p:cNvPr id="162" name="직사각형 161">
+            <a:extLst>
+              <a:ext uri="{FF2B5EF4-FFF2-40B4-BE49-F238E27FC236}">
+                <a16:creationId xmlns:a16="http://schemas.microsoft.com/office/drawing/2014/main" id="{5D84B4BD-1128-7C5B-7416-3F301FA89548}"/>
+              </a:ext>
+            </a:extLst>
+          </p:cNvPr>
+          <p:cNvSpPr/>
+          <p:nvPr/>
+        </p:nvSpPr>
+        <p:spPr>
+          <a:xfrm>
+            <a:off x="6590805" y="478910"/>
+            <a:ext cx="720080" cy="476195"/>
+          </a:xfrm>
+          <a:prstGeom prst="rect">
+            <a:avLst/>
+          </a:prstGeom>
+          <a:solidFill>
+            <a:schemeClr val="accent4">
+              <a:lumMod val="20000"/>
+              <a:lumOff val="80000"/>
+            </a:schemeClr>
+          </a:solidFill>
+          <a:ln w="12700"/>
+        </p:spPr>
+        <p:style>
+          <a:lnRef idx="2">
+            <a:schemeClr val="accent1">
+              <a:shade val="15000"/>
+            </a:schemeClr>
+          </a:lnRef>
+          <a:fillRef idx="1">
+            <a:schemeClr val="accent1"/>
+          </a:fillRef>
+          <a:effectRef idx="0">
+            <a:schemeClr val="accent1"/>
+          </a:effectRef>
+          <a:fontRef idx="minor">
+            <a:schemeClr val="lt1"/>
+          </a:fontRef>
+        </p:style>
+        <p:txBody>
+          <a:bodyPr rtlCol="0" anchor="ctr"/>
+          <a:lstStyle/>
+          <a:p>
+            <a:pPr algn="ctr"/>
+            <a:r>
+              <a:rPr kumimoji="1" lang="en-US" altLang="ko-KR" sz="800">
+                <a:solidFill>
+                  <a:schemeClr val="tx1"/>
+                </a:solidFill>
+              </a:rPr>
+              <a:t>PCIe</a:t>
+            </a:r>
+          </a:p>
+          <a:p>
+            <a:pPr algn="ctr"/>
+            <a:r>
+              <a:rPr kumimoji="1" lang="en-US" altLang="ko-KR" sz="800">
+                <a:solidFill>
+                  <a:schemeClr val="tx1"/>
+                </a:solidFill>
+              </a:rPr>
+              <a:t>Switch</a:t>
+            </a:r>
+            <a:endParaRPr kumimoji="1" lang="ko-KR" altLang="en-US" sz="800">
+              <a:solidFill>
+                <a:schemeClr val="tx1"/>
+              </a:solidFill>
+            </a:endParaRPr>
+          </a:p>
+        </p:txBody>
+      </p:sp>
+      <p:cxnSp>
+        <p:nvCxnSpPr>
+          <p:cNvPr id="163" name="직선 화살표 연결선 162">
+            <a:extLst>
+              <a:ext uri="{FF2B5EF4-FFF2-40B4-BE49-F238E27FC236}">
+                <a16:creationId xmlns:a16="http://schemas.microsoft.com/office/drawing/2014/main" id="{C58ED70A-1557-2D7F-F0D1-03F4FA11B01F}"/>
+              </a:ext>
+            </a:extLst>
+          </p:cNvPr>
+          <p:cNvCxnSpPr>
+            <a:cxnSpLocks/>
+            <a:stCxn id="161" idx="3"/>
+            <a:endCxn id="162" idx="1"/>
+          </p:cNvCxnSpPr>
+          <p:nvPr/>
+        </p:nvCxnSpPr>
+        <p:spPr>
+          <a:xfrm flipV="1">
+            <a:off x="5942731" y="717008"/>
+            <a:ext cx="648074" cy="132442"/>
+          </a:xfrm>
+          <a:prstGeom prst="straightConnector1">
+            <a:avLst/>
+          </a:prstGeom>
+          <a:ln>
+            <a:solidFill>
+              <a:schemeClr val="accent4">
+                <a:lumMod val="75000"/>
+              </a:schemeClr>
+            </a:solidFill>
+            <a:headEnd type="triangle"/>
+            <a:tailEnd type="triangle"/>
+          </a:ln>
+        </p:spPr>
+        <p:style>
+          <a:lnRef idx="1">
+            <a:schemeClr val="accent1"/>
+          </a:lnRef>
+          <a:fillRef idx="0">
+            <a:schemeClr val="accent1"/>
+          </a:fillRef>
+          <a:effectRef idx="0">
+            <a:schemeClr val="accent1"/>
+          </a:effectRef>
+          <a:fontRef idx="minor">
+            <a:schemeClr val="tx1"/>
+          </a:fontRef>
+        </p:style>
+      </p:cxnSp>
+      <p:cxnSp>
+        <p:nvCxnSpPr>
+          <p:cNvPr id="164" name="직선 화살표 연결선 163">
+            <a:extLst>
+              <a:ext uri="{FF2B5EF4-FFF2-40B4-BE49-F238E27FC236}">
+                <a16:creationId xmlns:a16="http://schemas.microsoft.com/office/drawing/2014/main" id="{222F691F-2FB4-35A8-28E4-5DADF9767194}"/>
+              </a:ext>
+            </a:extLst>
+          </p:cNvPr>
+          <p:cNvCxnSpPr>
+            <a:cxnSpLocks/>
+            <a:stCxn id="160" idx="3"/>
+            <a:endCxn id="162" idx="1"/>
+          </p:cNvCxnSpPr>
+          <p:nvPr/>
+        </p:nvCxnSpPr>
+        <p:spPr>
+          <a:xfrm flipV="1">
+            <a:off x="6014740" y="717008"/>
+            <a:ext cx="576065" cy="88295"/>
+          </a:xfrm>
+          <a:prstGeom prst="straightConnector1">
+            <a:avLst/>
+          </a:prstGeom>
+          <a:ln>
+            <a:solidFill>
+              <a:schemeClr val="accent4">
+                <a:lumMod val="75000"/>
+              </a:schemeClr>
+            </a:solidFill>
+            <a:headEnd type="triangle"/>
+            <a:tailEnd type="triangle"/>
+          </a:ln>
+        </p:spPr>
+        <p:style>
+          <a:lnRef idx="1">
+            <a:schemeClr val="accent1"/>
+          </a:lnRef>
+          <a:fillRef idx="0">
+            <a:schemeClr val="accent1"/>
+          </a:fillRef>
+          <a:effectRef idx="0">
+            <a:schemeClr val="accent1"/>
+          </a:effectRef>
+          <a:fontRef idx="minor">
+            <a:schemeClr val="tx1"/>
+          </a:fontRef>
+        </p:style>
+      </p:cxnSp>
+      <p:cxnSp>
+        <p:nvCxnSpPr>
+          <p:cNvPr id="165" name="직선 화살표 연결선 164">
+            <a:extLst>
+              <a:ext uri="{FF2B5EF4-FFF2-40B4-BE49-F238E27FC236}">
+                <a16:creationId xmlns:a16="http://schemas.microsoft.com/office/drawing/2014/main" id="{09697F33-A6E0-AFB3-8188-5BABB27B9875}"/>
+              </a:ext>
+            </a:extLst>
+          </p:cNvPr>
+          <p:cNvCxnSpPr>
+            <a:cxnSpLocks/>
+            <a:stCxn id="159" idx="3"/>
+            <a:endCxn id="162" idx="1"/>
+          </p:cNvCxnSpPr>
+          <p:nvPr/>
+        </p:nvCxnSpPr>
+        <p:spPr>
+          <a:xfrm flipV="1">
+            <a:off x="6086749" y="717008"/>
+            <a:ext cx="504056" cy="44148"/>
+          </a:xfrm>
+          <a:prstGeom prst="straightConnector1">
+            <a:avLst/>
+          </a:prstGeom>
+          <a:ln>
+            <a:solidFill>
+              <a:schemeClr val="accent4">
+                <a:lumMod val="75000"/>
+              </a:schemeClr>
+            </a:solidFill>
+            <a:headEnd type="triangle"/>
+            <a:tailEnd type="triangle"/>
+          </a:ln>
+        </p:spPr>
+        <p:style>
+          <a:lnRef idx="1">
+            <a:schemeClr val="accent1"/>
+          </a:lnRef>
+          <a:fillRef idx="0">
+            <a:schemeClr val="accent1"/>
+          </a:fillRef>
+          <a:effectRef idx="0">
+            <a:schemeClr val="accent1"/>
+          </a:effectRef>
+          <a:fontRef idx="minor">
+            <a:schemeClr val="tx1"/>
+          </a:fontRef>
+        </p:style>
+      </p:cxnSp>
+      <p:cxnSp>
+        <p:nvCxnSpPr>
+          <p:cNvPr id="166" name="직선 화살표 연결선 165">
+            <a:extLst>
+              <a:ext uri="{FF2B5EF4-FFF2-40B4-BE49-F238E27FC236}">
+                <a16:creationId xmlns:a16="http://schemas.microsoft.com/office/drawing/2014/main" id="{0490F10D-4C8D-EF41-6786-D6682BF68B70}"/>
+              </a:ext>
+            </a:extLst>
+          </p:cNvPr>
+          <p:cNvCxnSpPr>
+            <a:cxnSpLocks/>
+            <a:stCxn id="158" idx="3"/>
+            <a:endCxn id="162" idx="1"/>
+          </p:cNvCxnSpPr>
+          <p:nvPr/>
+        </p:nvCxnSpPr>
+        <p:spPr>
+          <a:xfrm flipV="1">
+            <a:off x="6158758" y="717008"/>
+            <a:ext cx="432047" cy="1"/>
+          </a:xfrm>
+          <a:prstGeom prst="straightConnector1">
+            <a:avLst/>
+          </a:prstGeom>
+          <a:ln>
+            <a:solidFill>
+              <a:schemeClr val="accent4">
+                <a:lumMod val="75000"/>
+              </a:schemeClr>
+            </a:solidFill>
+            <a:headEnd type="triangle"/>
+            <a:tailEnd type="triangle"/>
+          </a:ln>
+        </p:spPr>
+        <p:style>
+          <a:lnRef idx="1">
+            <a:schemeClr val="accent1"/>
+          </a:lnRef>
+          <a:fillRef idx="0">
+            <a:schemeClr val="accent1"/>
+          </a:fillRef>
+          <a:effectRef idx="0">
+            <a:schemeClr val="accent1"/>
+          </a:effectRef>
+          <a:fontRef idx="minor">
+            <a:schemeClr val="tx1"/>
+          </a:fontRef>
+        </p:style>
+      </p:cxnSp>
+      <p:sp>
+        <p:nvSpPr>
+          <p:cNvPr id="167" name="직사각형 166">
+            <a:extLst>
+              <a:ext uri="{FF2B5EF4-FFF2-40B4-BE49-F238E27FC236}">
+                <a16:creationId xmlns:a16="http://schemas.microsoft.com/office/drawing/2014/main" id="{9090A46B-16DE-3D34-1376-1059240A24D9}"/>
+              </a:ext>
+            </a:extLst>
+          </p:cNvPr>
+          <p:cNvSpPr/>
+          <p:nvPr/>
+        </p:nvSpPr>
+        <p:spPr>
+          <a:xfrm>
+            <a:off x="7742932" y="478910"/>
+            <a:ext cx="720080" cy="476195"/>
+          </a:xfrm>
+          <a:prstGeom prst="rect">
+            <a:avLst/>
+          </a:prstGeom>
+          <a:solidFill>
+            <a:schemeClr val="accent1">
+              <a:lumMod val="20000"/>
+              <a:lumOff val="80000"/>
+            </a:schemeClr>
+          </a:solidFill>
+          <a:ln w="12700"/>
+        </p:spPr>
+        <p:style>
+          <a:lnRef idx="2">
+            <a:schemeClr val="accent1">
+              <a:shade val="15000"/>
+            </a:schemeClr>
+          </a:lnRef>
+          <a:fillRef idx="1">
+            <a:schemeClr val="accent1"/>
+          </a:fillRef>
+          <a:effectRef idx="0">
+            <a:schemeClr val="accent1"/>
+          </a:effectRef>
+          <a:fontRef idx="minor">
+            <a:schemeClr val="lt1"/>
+          </a:fontRef>
+        </p:style>
+        <p:txBody>
+          <a:bodyPr rtlCol="0" anchor="ctr"/>
+          <a:lstStyle/>
+          <a:p>
+            <a:pPr algn="ctr"/>
+            <a:r>
+              <a:rPr kumimoji="1" lang="en-US" altLang="ko-KR" sz="800">
+                <a:solidFill>
+                  <a:schemeClr val="tx1"/>
+                </a:solidFill>
+              </a:rPr>
+              <a:t>Storage</a:t>
+            </a:r>
+          </a:p>
+          <a:p>
+            <a:pPr algn="ctr"/>
+            <a:r>
+              <a:rPr kumimoji="1" lang="en-US" altLang="ko-KR" sz="800">
+                <a:solidFill>
+                  <a:schemeClr val="tx1"/>
+                </a:solidFill>
+              </a:rPr>
+              <a:t>Networking</a:t>
+            </a:r>
+          </a:p>
+          <a:p>
+            <a:pPr algn="ctr"/>
+            <a:r>
+              <a:rPr kumimoji="1" lang="en-US" altLang="ko-KR" sz="800">
+                <a:solidFill>
+                  <a:schemeClr val="tx1"/>
+                </a:solidFill>
+              </a:rPr>
+              <a:t>ConnectX-7</a:t>
+            </a:r>
+            <a:endParaRPr kumimoji="1" lang="ko-KR" altLang="en-US" sz="800">
+              <a:solidFill>
+                <a:schemeClr val="tx1"/>
+              </a:solidFill>
+            </a:endParaRPr>
+          </a:p>
+        </p:txBody>
+      </p:sp>
+      <p:cxnSp>
+        <p:nvCxnSpPr>
+          <p:cNvPr id="168" name="직선 화살표 연결선 167">
+            <a:extLst>
+              <a:ext uri="{FF2B5EF4-FFF2-40B4-BE49-F238E27FC236}">
+                <a16:creationId xmlns:a16="http://schemas.microsoft.com/office/drawing/2014/main" id="{02814DCD-2706-DDD6-6121-DBCB164EEAEF}"/>
+              </a:ext>
+            </a:extLst>
+          </p:cNvPr>
+          <p:cNvCxnSpPr>
+            <a:cxnSpLocks/>
+            <a:stCxn id="162" idx="3"/>
+            <a:endCxn id="167" idx="1"/>
+          </p:cNvCxnSpPr>
+          <p:nvPr/>
+        </p:nvCxnSpPr>
+        <p:spPr>
+          <a:xfrm>
+            <a:off x="7310885" y="717008"/>
+            <a:ext cx="432047" cy="0"/>
+          </a:xfrm>
+          <a:prstGeom prst="straightConnector1">
+            <a:avLst/>
+          </a:prstGeom>
+          <a:ln>
+            <a:solidFill>
+              <a:schemeClr val="accent4">
+                <a:lumMod val="75000"/>
+              </a:schemeClr>
+            </a:solidFill>
+            <a:headEnd type="triangle"/>
+            <a:tailEnd type="triangle"/>
+          </a:ln>
+        </p:spPr>
+        <p:style>
+          <a:lnRef idx="1">
+            <a:schemeClr val="accent1"/>
+          </a:lnRef>
+          <a:fillRef idx="0">
+            <a:schemeClr val="accent1"/>
+          </a:fillRef>
+          <a:effectRef idx="0">
+            <a:schemeClr val="accent1"/>
+          </a:effectRef>
+          <a:fontRef idx="minor">
+            <a:schemeClr val="tx1"/>
+          </a:fontRef>
+        </p:style>
+      </p:cxnSp>
+      <p:sp>
+        <p:nvSpPr>
+          <p:cNvPr id="169" name="직사각형 168">
+            <a:extLst>
+              <a:ext uri="{FF2B5EF4-FFF2-40B4-BE49-F238E27FC236}">
+                <a16:creationId xmlns:a16="http://schemas.microsoft.com/office/drawing/2014/main" id="{1113022C-3078-569F-4E0F-DB1DCB3ECEE6}"/>
+              </a:ext>
+            </a:extLst>
+          </p:cNvPr>
+          <p:cNvSpPr/>
+          <p:nvPr/>
+        </p:nvSpPr>
+        <p:spPr>
+          <a:xfrm>
+            <a:off x="6590805" y="1331380"/>
+            <a:ext cx="720080" cy="476195"/>
+          </a:xfrm>
+          <a:prstGeom prst="rect">
+            <a:avLst/>
+          </a:prstGeom>
+          <a:solidFill>
+            <a:schemeClr val="accent5">
+              <a:lumMod val="20000"/>
+              <a:lumOff val="80000"/>
+            </a:schemeClr>
+          </a:solidFill>
+          <a:ln w="12700"/>
+        </p:spPr>
+        <p:style>
+          <a:lnRef idx="2">
+            <a:schemeClr val="accent1">
+              <a:shade val="15000"/>
+            </a:schemeClr>
+          </a:lnRef>
+          <a:fillRef idx="1">
+            <a:schemeClr val="accent1"/>
+          </a:fillRef>
+          <a:effectRef idx="0">
+            <a:schemeClr val="accent1"/>
+          </a:effectRef>
+          <a:fontRef idx="minor">
+            <a:schemeClr val="lt1"/>
+          </a:fontRef>
+        </p:style>
+        <p:txBody>
+          <a:bodyPr rtlCol="0" anchor="ctr"/>
+          <a:lstStyle/>
+          <a:p>
+            <a:pPr algn="ctr"/>
+            <a:r>
+              <a:rPr kumimoji="1" lang="en-US" altLang="ko-KR" sz="800">
+                <a:solidFill>
+                  <a:schemeClr val="tx1"/>
+                </a:solidFill>
+              </a:rPr>
+              <a:t>CPU 0</a:t>
+            </a:r>
+            <a:endParaRPr kumimoji="1" lang="ko-KR" altLang="en-US" sz="800">
+              <a:solidFill>
+                <a:schemeClr val="tx1"/>
+              </a:solidFill>
+            </a:endParaRPr>
+          </a:p>
+        </p:txBody>
+      </p:sp>
+      <p:cxnSp>
+        <p:nvCxnSpPr>
+          <p:cNvPr id="170" name="직선 화살표 연결선 169">
+            <a:extLst>
+              <a:ext uri="{FF2B5EF4-FFF2-40B4-BE49-F238E27FC236}">
+                <a16:creationId xmlns:a16="http://schemas.microsoft.com/office/drawing/2014/main" id="{12DE1AB6-06C5-B671-77AE-790BDED62150}"/>
+              </a:ext>
+            </a:extLst>
+          </p:cNvPr>
+          <p:cNvCxnSpPr>
+            <a:cxnSpLocks/>
+            <a:stCxn id="162" idx="2"/>
+            <a:endCxn id="169" idx="0"/>
+          </p:cNvCxnSpPr>
+          <p:nvPr/>
+        </p:nvCxnSpPr>
+        <p:spPr>
+          <a:xfrm>
+            <a:off x="6950845" y="955105"/>
+            <a:ext cx="0" cy="376275"/>
+          </a:xfrm>
+          <a:prstGeom prst="straightConnector1">
+            <a:avLst/>
+          </a:prstGeom>
+          <a:ln>
+            <a:solidFill>
+              <a:schemeClr val="accent4">
+                <a:lumMod val="75000"/>
+              </a:schemeClr>
+            </a:solidFill>
+            <a:headEnd type="triangle"/>
+            <a:tailEnd type="triangle"/>
+          </a:ln>
+        </p:spPr>
+        <p:style>
+          <a:lnRef idx="1">
+            <a:schemeClr val="accent1"/>
+          </a:lnRef>
+          <a:fillRef idx="0">
+            <a:schemeClr val="accent1"/>
+          </a:fillRef>
+          <a:effectRef idx="0">
+            <a:schemeClr val="accent1"/>
+          </a:effectRef>
+          <a:fontRef idx="minor">
+            <a:schemeClr val="tx1"/>
+          </a:fontRef>
+        </p:style>
+      </p:cxnSp>
+      <p:sp>
+        <p:nvSpPr>
+          <p:cNvPr id="171" name="직사각형 170">
+            <a:extLst>
+              <a:ext uri="{FF2B5EF4-FFF2-40B4-BE49-F238E27FC236}">
+                <a16:creationId xmlns:a16="http://schemas.microsoft.com/office/drawing/2014/main" id="{8FC64DF0-7484-B165-8D76-2289E36D5A75}"/>
+              </a:ext>
+            </a:extLst>
+          </p:cNvPr>
+          <p:cNvSpPr/>
+          <p:nvPr/>
+        </p:nvSpPr>
+        <p:spPr>
+          <a:xfrm>
+            <a:off x="6089329" y="3052553"/>
+            <a:ext cx="720080" cy="476195"/>
+          </a:xfrm>
+          <a:prstGeom prst="rect">
+            <a:avLst/>
+          </a:prstGeom>
+          <a:solidFill>
+            <a:schemeClr val="accent3">
+              <a:lumMod val="20000"/>
+              <a:lumOff val="80000"/>
+            </a:schemeClr>
+          </a:solidFill>
+          <a:ln w="12700"/>
+        </p:spPr>
+        <p:style>
+          <a:lnRef idx="2">
+            <a:schemeClr val="accent1">
+              <a:shade val="15000"/>
+            </a:schemeClr>
+          </a:lnRef>
+          <a:fillRef idx="1">
+            <a:schemeClr val="accent1"/>
+          </a:fillRef>
+          <a:effectRef idx="0">
+            <a:schemeClr val="accent1"/>
+          </a:effectRef>
+          <a:fontRef idx="minor">
+            <a:schemeClr val="lt1"/>
+          </a:fontRef>
+        </p:style>
+        <p:txBody>
+          <a:bodyPr rtlCol="0" anchor="ctr"/>
+          <a:lstStyle/>
+          <a:p>
+            <a:pPr algn="ctr"/>
+            <a:r>
+              <a:rPr kumimoji="1" lang="en-US" altLang="ko-KR" sz="800">
+                <a:solidFill>
+                  <a:schemeClr val="tx1"/>
+                </a:solidFill>
+              </a:rPr>
+              <a:t>GPU 1</a:t>
+            </a:r>
+          </a:p>
+        </p:txBody>
+      </p:sp>
+      <p:sp>
+        <p:nvSpPr>
+          <p:cNvPr id="175" name="직사각형 174">
+            <a:extLst>
+              <a:ext uri="{FF2B5EF4-FFF2-40B4-BE49-F238E27FC236}">
+                <a16:creationId xmlns:a16="http://schemas.microsoft.com/office/drawing/2014/main" id="{CAC733B7-F742-D74A-7635-0480046880A1}"/>
+              </a:ext>
+            </a:extLst>
+          </p:cNvPr>
+          <p:cNvSpPr/>
+          <p:nvPr/>
+        </p:nvSpPr>
+        <p:spPr>
+          <a:xfrm>
+            <a:off x="5078638" y="3052553"/>
+            <a:ext cx="720080" cy="476195"/>
+          </a:xfrm>
+          <a:prstGeom prst="rect">
+            <a:avLst/>
+          </a:prstGeom>
+          <a:solidFill>
+            <a:schemeClr val="accent3">
+              <a:lumMod val="20000"/>
+              <a:lumOff val="80000"/>
+            </a:schemeClr>
+          </a:solidFill>
+          <a:ln w="12700"/>
+        </p:spPr>
+        <p:style>
+          <a:lnRef idx="2">
+            <a:schemeClr val="accent1">
+              <a:shade val="15000"/>
+            </a:schemeClr>
+          </a:lnRef>
+          <a:fillRef idx="1">
+            <a:schemeClr val="accent1"/>
+          </a:fillRef>
+          <a:effectRef idx="0">
+            <a:schemeClr val="accent1"/>
+          </a:effectRef>
+          <a:fontRef idx="minor">
+            <a:schemeClr val="lt1"/>
+          </a:fontRef>
+        </p:style>
+        <p:txBody>
+          <a:bodyPr rtlCol="0" anchor="ctr"/>
+          <a:lstStyle/>
+          <a:p>
+            <a:pPr algn="ctr"/>
+            <a:r>
+              <a:rPr kumimoji="1" lang="en-US" altLang="ko-KR" sz="800">
+                <a:solidFill>
+                  <a:schemeClr val="tx1"/>
+                </a:solidFill>
+              </a:rPr>
+              <a:t>GPU 0</a:t>
+            </a:r>
+          </a:p>
+        </p:txBody>
+      </p:sp>
+      <p:sp>
+        <p:nvSpPr>
+          <p:cNvPr id="176" name="직사각형 175">
+            <a:extLst>
+              <a:ext uri="{FF2B5EF4-FFF2-40B4-BE49-F238E27FC236}">
+                <a16:creationId xmlns:a16="http://schemas.microsoft.com/office/drawing/2014/main" id="{0B3F1D98-3641-BDAA-20BB-A2CF14DB2419}"/>
+              </a:ext>
+            </a:extLst>
+          </p:cNvPr>
+          <p:cNvSpPr/>
+          <p:nvPr/>
+        </p:nvSpPr>
+        <p:spPr>
+          <a:xfrm>
+            <a:off x="5078638" y="2333652"/>
+            <a:ext cx="720080" cy="476195"/>
+          </a:xfrm>
+          <a:prstGeom prst="rect">
+            <a:avLst/>
+          </a:prstGeom>
+          <a:solidFill>
+            <a:schemeClr val="accent1">
+              <a:lumMod val="20000"/>
+              <a:lumOff val="80000"/>
+            </a:schemeClr>
+          </a:solidFill>
+          <a:ln w="12700"/>
+        </p:spPr>
+        <p:style>
+          <a:lnRef idx="2">
+            <a:schemeClr val="accent1">
+              <a:shade val="15000"/>
+            </a:schemeClr>
+          </a:lnRef>
+          <a:fillRef idx="1">
+            <a:schemeClr val="accent1"/>
+          </a:fillRef>
+          <a:effectRef idx="0">
+            <a:schemeClr val="accent1"/>
+          </a:effectRef>
+          <a:fontRef idx="minor">
+            <a:schemeClr val="lt1"/>
+          </a:fontRef>
+        </p:style>
+        <p:txBody>
+          <a:bodyPr rtlCol="0" anchor="ctr"/>
+          <a:lstStyle/>
+          <a:p>
+            <a:pPr algn="ctr"/>
+            <a:r>
+              <a:rPr kumimoji="1" lang="en-US" altLang="ko-KR" sz="800">
+                <a:solidFill>
+                  <a:schemeClr val="tx1"/>
+                </a:solidFill>
+              </a:rPr>
+              <a:t>DGX</a:t>
+            </a:r>
+            <a:br>
+              <a:rPr kumimoji="1" lang="en-US" altLang="ko-KR" sz="800">
+                <a:solidFill>
+                  <a:schemeClr val="tx1"/>
+                </a:solidFill>
+              </a:rPr>
+            </a:br>
+            <a:r>
+              <a:rPr kumimoji="1" lang="en-US" altLang="ko-KR" sz="800">
+                <a:solidFill>
+                  <a:schemeClr val="tx1"/>
+                </a:solidFill>
+              </a:rPr>
+              <a:t>Networking</a:t>
+            </a:r>
+          </a:p>
+          <a:p>
+            <a:pPr algn="ctr"/>
+            <a:r>
+              <a:rPr kumimoji="1" lang="en-US" altLang="ko-KR" sz="800">
+                <a:solidFill>
+                  <a:schemeClr val="tx1"/>
+                </a:solidFill>
+              </a:rPr>
+              <a:t>ConnectX-7</a:t>
+            </a:r>
+            <a:endParaRPr kumimoji="1" lang="ko-KR" altLang="en-US" sz="800">
+              <a:solidFill>
+                <a:schemeClr val="tx1"/>
+              </a:solidFill>
+            </a:endParaRPr>
+          </a:p>
+        </p:txBody>
+      </p:sp>
+      <p:cxnSp>
+        <p:nvCxnSpPr>
+          <p:cNvPr id="177" name="직선 화살표 연결선 176">
+            <a:extLst>
+              <a:ext uri="{FF2B5EF4-FFF2-40B4-BE49-F238E27FC236}">
+                <a16:creationId xmlns:a16="http://schemas.microsoft.com/office/drawing/2014/main" id="{86A09135-4AE4-7432-4E88-B7EAB5313275}"/>
+              </a:ext>
+            </a:extLst>
+          </p:cNvPr>
+          <p:cNvCxnSpPr>
+            <a:cxnSpLocks/>
+            <a:stCxn id="169" idx="2"/>
+            <a:endCxn id="176" idx="0"/>
+          </p:cNvCxnSpPr>
+          <p:nvPr/>
+        </p:nvCxnSpPr>
+        <p:spPr>
+          <a:xfrm flipH="1">
+            <a:off x="5438678" y="1807575"/>
+            <a:ext cx="1512167" cy="526077"/>
+          </a:xfrm>
+          <a:prstGeom prst="straightConnector1">
+            <a:avLst/>
+          </a:prstGeom>
+          <a:ln>
+            <a:solidFill>
+              <a:schemeClr val="accent4">
+                <a:lumMod val="75000"/>
+              </a:schemeClr>
+            </a:solidFill>
+            <a:headEnd type="triangle"/>
+            <a:tailEnd type="triangle"/>
+          </a:ln>
+        </p:spPr>
+        <p:style>
+          <a:lnRef idx="1">
+            <a:schemeClr val="accent1"/>
+          </a:lnRef>
+          <a:fillRef idx="0">
+            <a:schemeClr val="accent1"/>
+          </a:fillRef>
+          <a:effectRef idx="0">
+            <a:schemeClr val="accent1"/>
+          </a:effectRef>
+          <a:fontRef idx="minor">
+            <a:schemeClr val="tx1"/>
+          </a:fontRef>
+        </p:style>
+      </p:cxnSp>
+      <p:sp>
+        <p:nvSpPr>
+          <p:cNvPr id="178" name="직사각형 177">
+            <a:extLst>
+              <a:ext uri="{FF2B5EF4-FFF2-40B4-BE49-F238E27FC236}">
+                <a16:creationId xmlns:a16="http://schemas.microsoft.com/office/drawing/2014/main" id="{03885D23-E6D5-54EB-AFB1-DAF68D5CBB73}"/>
+              </a:ext>
+            </a:extLst>
+          </p:cNvPr>
+          <p:cNvSpPr/>
+          <p:nvPr/>
+        </p:nvSpPr>
+        <p:spPr>
+          <a:xfrm>
+            <a:off x="8102972" y="3052553"/>
+            <a:ext cx="720080" cy="476195"/>
+          </a:xfrm>
+          <a:prstGeom prst="rect">
+            <a:avLst/>
+          </a:prstGeom>
+          <a:solidFill>
+            <a:schemeClr val="accent3">
+              <a:lumMod val="20000"/>
+              <a:lumOff val="80000"/>
+            </a:schemeClr>
+          </a:solidFill>
+          <a:ln w="12700"/>
+        </p:spPr>
+        <p:style>
+          <a:lnRef idx="2">
+            <a:schemeClr val="accent1">
+              <a:shade val="15000"/>
+            </a:schemeClr>
+          </a:lnRef>
+          <a:fillRef idx="1">
+            <a:schemeClr val="accent1"/>
+          </a:fillRef>
+          <a:effectRef idx="0">
+            <a:schemeClr val="accent1"/>
+          </a:effectRef>
+          <a:fontRef idx="minor">
+            <a:schemeClr val="lt1"/>
+          </a:fontRef>
+        </p:style>
+        <p:txBody>
+          <a:bodyPr rtlCol="0" anchor="ctr"/>
+          <a:lstStyle/>
+          <a:p>
+            <a:pPr algn="ctr"/>
+            <a:r>
+              <a:rPr kumimoji="1" lang="en-US" altLang="ko-KR" sz="800">
+                <a:solidFill>
+                  <a:schemeClr val="tx1"/>
+                </a:solidFill>
+              </a:rPr>
+              <a:t>GPU 3</a:t>
+            </a:r>
+          </a:p>
+        </p:txBody>
+      </p:sp>
+      <p:sp>
+        <p:nvSpPr>
+          <p:cNvPr id="179" name="직사각형 178">
+            <a:extLst>
+              <a:ext uri="{FF2B5EF4-FFF2-40B4-BE49-F238E27FC236}">
+                <a16:creationId xmlns:a16="http://schemas.microsoft.com/office/drawing/2014/main" id="{EC0A768A-7FE5-87A4-854B-8ABB8AC9FF5E}"/>
+              </a:ext>
+            </a:extLst>
+          </p:cNvPr>
+          <p:cNvSpPr/>
+          <p:nvPr/>
+        </p:nvSpPr>
+        <p:spPr>
+          <a:xfrm>
+            <a:off x="7092281" y="3052553"/>
+            <a:ext cx="720080" cy="476195"/>
+          </a:xfrm>
+          <a:prstGeom prst="rect">
+            <a:avLst/>
+          </a:prstGeom>
+          <a:solidFill>
+            <a:schemeClr val="accent3">
+              <a:lumMod val="20000"/>
+              <a:lumOff val="80000"/>
+            </a:schemeClr>
+          </a:solidFill>
+          <a:ln w="12700"/>
+        </p:spPr>
+        <p:style>
+          <a:lnRef idx="2">
+            <a:schemeClr val="accent1">
+              <a:shade val="15000"/>
+            </a:schemeClr>
+          </a:lnRef>
+          <a:fillRef idx="1">
+            <a:schemeClr val="accent1"/>
+          </a:fillRef>
+          <a:effectRef idx="0">
+            <a:schemeClr val="accent1"/>
+          </a:effectRef>
+          <a:fontRef idx="minor">
+            <a:schemeClr val="lt1"/>
+          </a:fontRef>
+        </p:style>
+        <p:txBody>
+          <a:bodyPr rtlCol="0" anchor="ctr"/>
+          <a:lstStyle/>
+          <a:p>
+            <a:pPr algn="ctr"/>
+            <a:r>
+              <a:rPr kumimoji="1" lang="en-US" altLang="ko-KR" sz="800">
+                <a:solidFill>
+                  <a:schemeClr val="tx1"/>
+                </a:solidFill>
+              </a:rPr>
+              <a:t>GPU 2</a:t>
+            </a:r>
+          </a:p>
+        </p:txBody>
+      </p:sp>
+      <p:sp>
+        <p:nvSpPr>
+          <p:cNvPr id="180" name="직사각형 179">
+            <a:extLst>
+              <a:ext uri="{FF2B5EF4-FFF2-40B4-BE49-F238E27FC236}">
+                <a16:creationId xmlns:a16="http://schemas.microsoft.com/office/drawing/2014/main" id="{CF5B0869-EAD7-C52D-3F8C-A82AF6BE1470}"/>
+              </a:ext>
+            </a:extLst>
+          </p:cNvPr>
+          <p:cNvSpPr/>
+          <p:nvPr/>
+        </p:nvSpPr>
+        <p:spPr>
+          <a:xfrm>
+            <a:off x="6086749" y="2333652"/>
+            <a:ext cx="720080" cy="476195"/>
+          </a:xfrm>
+          <a:prstGeom prst="rect">
+            <a:avLst/>
+          </a:prstGeom>
+          <a:solidFill>
+            <a:schemeClr val="accent1">
+              <a:lumMod val="20000"/>
+              <a:lumOff val="80000"/>
+            </a:schemeClr>
+          </a:solidFill>
+          <a:ln w="12700"/>
+        </p:spPr>
+        <p:style>
+          <a:lnRef idx="2">
+            <a:schemeClr val="accent1">
+              <a:shade val="15000"/>
+            </a:schemeClr>
+          </a:lnRef>
+          <a:fillRef idx="1">
+            <a:schemeClr val="accent1"/>
+          </a:fillRef>
+          <a:effectRef idx="0">
+            <a:schemeClr val="accent1"/>
+          </a:effectRef>
+          <a:fontRef idx="minor">
+            <a:schemeClr val="lt1"/>
+          </a:fontRef>
+        </p:style>
+        <p:txBody>
+          <a:bodyPr rtlCol="0" anchor="ctr"/>
+          <a:lstStyle/>
+          <a:p>
+            <a:pPr algn="ctr"/>
+            <a:r>
+              <a:rPr kumimoji="1" lang="en-US" altLang="ko-KR" sz="800">
+                <a:solidFill>
+                  <a:schemeClr val="tx1"/>
+                </a:solidFill>
+              </a:rPr>
+              <a:t>DGX</a:t>
+            </a:r>
+            <a:br>
+              <a:rPr kumimoji="1" lang="en-US" altLang="ko-KR" sz="800">
+                <a:solidFill>
+                  <a:schemeClr val="tx1"/>
+                </a:solidFill>
+              </a:rPr>
+            </a:br>
+            <a:r>
+              <a:rPr kumimoji="1" lang="en-US" altLang="ko-KR" sz="800">
+                <a:solidFill>
+                  <a:schemeClr val="tx1"/>
+                </a:solidFill>
+              </a:rPr>
+              <a:t>Networking</a:t>
+            </a:r>
+          </a:p>
+          <a:p>
+            <a:pPr algn="ctr"/>
+            <a:r>
+              <a:rPr kumimoji="1" lang="en-US" altLang="ko-KR" sz="800">
+                <a:solidFill>
+                  <a:schemeClr val="tx1"/>
+                </a:solidFill>
+              </a:rPr>
+              <a:t>ConnectX-7</a:t>
+            </a:r>
+            <a:endParaRPr kumimoji="1" lang="ko-KR" altLang="en-US" sz="800">
+              <a:solidFill>
+                <a:schemeClr val="tx1"/>
+              </a:solidFill>
+            </a:endParaRPr>
+          </a:p>
+        </p:txBody>
+      </p:sp>
+      <p:sp>
+        <p:nvSpPr>
+          <p:cNvPr id="181" name="직사각형 180">
+            <a:extLst>
+              <a:ext uri="{FF2B5EF4-FFF2-40B4-BE49-F238E27FC236}">
+                <a16:creationId xmlns:a16="http://schemas.microsoft.com/office/drawing/2014/main" id="{5D7A3E05-C355-944C-2331-A4E8F61379FB}"/>
+              </a:ext>
+            </a:extLst>
+          </p:cNvPr>
+          <p:cNvSpPr/>
+          <p:nvPr/>
+        </p:nvSpPr>
+        <p:spPr>
+          <a:xfrm>
+            <a:off x="7092281" y="2333652"/>
+            <a:ext cx="720080" cy="476195"/>
+          </a:xfrm>
+          <a:prstGeom prst="rect">
+            <a:avLst/>
+          </a:prstGeom>
+          <a:solidFill>
+            <a:schemeClr val="accent1">
+              <a:lumMod val="20000"/>
+              <a:lumOff val="80000"/>
+            </a:schemeClr>
+          </a:solidFill>
+          <a:ln w="12700"/>
+        </p:spPr>
+        <p:style>
+          <a:lnRef idx="2">
+            <a:schemeClr val="accent1">
+              <a:shade val="15000"/>
+            </a:schemeClr>
+          </a:lnRef>
+          <a:fillRef idx="1">
+            <a:schemeClr val="accent1"/>
+          </a:fillRef>
+          <a:effectRef idx="0">
+            <a:schemeClr val="accent1"/>
+          </a:effectRef>
+          <a:fontRef idx="minor">
+            <a:schemeClr val="lt1"/>
+          </a:fontRef>
+        </p:style>
+        <p:txBody>
+          <a:bodyPr rtlCol="0" anchor="ctr"/>
+          <a:lstStyle/>
+          <a:p>
+            <a:pPr algn="ctr"/>
+            <a:r>
+              <a:rPr kumimoji="1" lang="en-US" altLang="ko-KR" sz="800">
+                <a:solidFill>
+                  <a:schemeClr val="tx1"/>
+                </a:solidFill>
+              </a:rPr>
+              <a:t>DGX</a:t>
+            </a:r>
+            <a:br>
+              <a:rPr kumimoji="1" lang="en-US" altLang="ko-KR" sz="800">
+                <a:solidFill>
+                  <a:schemeClr val="tx1"/>
+                </a:solidFill>
+              </a:rPr>
+            </a:br>
+            <a:r>
+              <a:rPr kumimoji="1" lang="en-US" altLang="ko-KR" sz="800">
+                <a:solidFill>
+                  <a:schemeClr val="tx1"/>
+                </a:solidFill>
+              </a:rPr>
+              <a:t>Networking</a:t>
+            </a:r>
+          </a:p>
+          <a:p>
+            <a:pPr algn="ctr"/>
+            <a:r>
+              <a:rPr kumimoji="1" lang="en-US" altLang="ko-KR" sz="800">
+                <a:solidFill>
+                  <a:schemeClr val="tx1"/>
+                </a:solidFill>
+              </a:rPr>
+              <a:t>ConnectX-7</a:t>
+            </a:r>
+            <a:endParaRPr kumimoji="1" lang="ko-KR" altLang="en-US" sz="800">
+              <a:solidFill>
+                <a:schemeClr val="tx1"/>
+              </a:solidFill>
+            </a:endParaRPr>
+          </a:p>
+        </p:txBody>
+      </p:sp>
+      <p:sp>
+        <p:nvSpPr>
+          <p:cNvPr id="182" name="직사각형 181">
+            <a:extLst>
+              <a:ext uri="{FF2B5EF4-FFF2-40B4-BE49-F238E27FC236}">
+                <a16:creationId xmlns:a16="http://schemas.microsoft.com/office/drawing/2014/main" id="{C72EC14C-EA67-84EB-D53C-762DA0ACD564}"/>
+              </a:ext>
+            </a:extLst>
+          </p:cNvPr>
+          <p:cNvSpPr/>
+          <p:nvPr/>
+        </p:nvSpPr>
+        <p:spPr>
+          <a:xfrm>
+            <a:off x="8102972" y="2333652"/>
+            <a:ext cx="720080" cy="476195"/>
+          </a:xfrm>
+          <a:prstGeom prst="rect">
+            <a:avLst/>
+          </a:prstGeom>
+          <a:solidFill>
+            <a:schemeClr val="accent1">
+              <a:lumMod val="20000"/>
+              <a:lumOff val="80000"/>
+            </a:schemeClr>
+          </a:solidFill>
+          <a:ln w="12700"/>
+        </p:spPr>
+        <p:style>
+          <a:lnRef idx="2">
+            <a:schemeClr val="accent1">
+              <a:shade val="15000"/>
+            </a:schemeClr>
+          </a:lnRef>
+          <a:fillRef idx="1">
+            <a:schemeClr val="accent1"/>
+          </a:fillRef>
+          <a:effectRef idx="0">
+            <a:schemeClr val="accent1"/>
+          </a:effectRef>
+          <a:fontRef idx="minor">
+            <a:schemeClr val="lt1"/>
+          </a:fontRef>
+        </p:style>
+        <p:txBody>
+          <a:bodyPr rtlCol="0" anchor="ctr"/>
+          <a:lstStyle/>
+          <a:p>
+            <a:pPr algn="ctr"/>
+            <a:r>
+              <a:rPr kumimoji="1" lang="en-US" altLang="ko-KR" sz="800">
+                <a:solidFill>
+                  <a:schemeClr val="tx1"/>
+                </a:solidFill>
+              </a:rPr>
+              <a:t> DGX</a:t>
+            </a:r>
+            <a:br>
+              <a:rPr kumimoji="1" lang="en-US" altLang="ko-KR" sz="800">
+                <a:solidFill>
+                  <a:schemeClr val="tx1"/>
+                </a:solidFill>
+              </a:rPr>
+            </a:br>
+            <a:r>
+              <a:rPr kumimoji="1" lang="en-US" altLang="ko-KR" sz="800">
+                <a:solidFill>
+                  <a:schemeClr val="tx1"/>
+                </a:solidFill>
+              </a:rPr>
+              <a:t>Networking</a:t>
+            </a:r>
+          </a:p>
+          <a:p>
+            <a:pPr algn="ctr"/>
+            <a:r>
+              <a:rPr kumimoji="1" lang="en-US" altLang="ko-KR" sz="800">
+                <a:solidFill>
+                  <a:schemeClr val="tx1"/>
+                </a:solidFill>
+              </a:rPr>
+              <a:t>ConnectX-7</a:t>
+            </a:r>
+            <a:endParaRPr kumimoji="1" lang="ko-KR" altLang="en-US" sz="800">
+              <a:solidFill>
+                <a:schemeClr val="tx1"/>
+              </a:solidFill>
+            </a:endParaRPr>
+          </a:p>
+        </p:txBody>
+      </p:sp>
+      <p:cxnSp>
+        <p:nvCxnSpPr>
+          <p:cNvPr id="183" name="직선 화살표 연결선 182">
+            <a:extLst>
+              <a:ext uri="{FF2B5EF4-FFF2-40B4-BE49-F238E27FC236}">
+                <a16:creationId xmlns:a16="http://schemas.microsoft.com/office/drawing/2014/main" id="{2D597B9E-9C6C-6DF8-A90D-EBEAF5AB8E08}"/>
+              </a:ext>
+            </a:extLst>
+          </p:cNvPr>
+          <p:cNvCxnSpPr>
+            <a:cxnSpLocks/>
+            <a:stCxn id="169" idx="2"/>
+            <a:endCxn id="180" idx="0"/>
+          </p:cNvCxnSpPr>
+          <p:nvPr/>
+        </p:nvCxnSpPr>
+        <p:spPr>
+          <a:xfrm flipH="1">
+            <a:off x="6446789" y="1807575"/>
+            <a:ext cx="504056" cy="526077"/>
+          </a:xfrm>
+          <a:prstGeom prst="straightConnector1">
+            <a:avLst/>
+          </a:prstGeom>
+          <a:ln>
+            <a:solidFill>
+              <a:schemeClr val="accent4">
+                <a:lumMod val="75000"/>
+              </a:schemeClr>
+            </a:solidFill>
+            <a:headEnd type="triangle"/>
+            <a:tailEnd type="triangle"/>
+          </a:ln>
+        </p:spPr>
+        <p:style>
+          <a:lnRef idx="1">
+            <a:schemeClr val="accent1"/>
+          </a:lnRef>
+          <a:fillRef idx="0">
+            <a:schemeClr val="accent1"/>
+          </a:fillRef>
+          <a:effectRef idx="0">
+            <a:schemeClr val="accent1"/>
+          </a:effectRef>
+          <a:fontRef idx="minor">
+            <a:schemeClr val="tx1"/>
+          </a:fontRef>
+        </p:style>
+      </p:cxnSp>
+      <p:cxnSp>
+        <p:nvCxnSpPr>
+          <p:cNvPr id="184" name="직선 화살표 연결선 183">
+            <a:extLst>
+              <a:ext uri="{FF2B5EF4-FFF2-40B4-BE49-F238E27FC236}">
+                <a16:creationId xmlns:a16="http://schemas.microsoft.com/office/drawing/2014/main" id="{0CFCDDEE-0C28-53FF-58F6-4E0251E3C829}"/>
+              </a:ext>
+            </a:extLst>
+          </p:cNvPr>
+          <p:cNvCxnSpPr>
+            <a:cxnSpLocks/>
+            <a:stCxn id="169" idx="2"/>
+            <a:endCxn id="181" idx="0"/>
+          </p:cNvCxnSpPr>
+          <p:nvPr/>
+        </p:nvCxnSpPr>
+        <p:spPr>
+          <a:xfrm>
+            <a:off x="6950845" y="1807575"/>
+            <a:ext cx="501476" cy="526077"/>
+          </a:xfrm>
+          <a:prstGeom prst="straightConnector1">
+            <a:avLst/>
+          </a:prstGeom>
+          <a:ln>
+            <a:solidFill>
+              <a:schemeClr val="accent4">
+                <a:lumMod val="75000"/>
+              </a:schemeClr>
+            </a:solidFill>
+            <a:headEnd type="triangle"/>
+            <a:tailEnd type="triangle"/>
+          </a:ln>
+        </p:spPr>
+        <p:style>
+          <a:lnRef idx="1">
+            <a:schemeClr val="accent1"/>
+          </a:lnRef>
+          <a:fillRef idx="0">
+            <a:schemeClr val="accent1"/>
+          </a:fillRef>
+          <a:effectRef idx="0">
+            <a:schemeClr val="accent1"/>
+          </a:effectRef>
+          <a:fontRef idx="minor">
+            <a:schemeClr val="tx1"/>
+          </a:fontRef>
+        </p:style>
+      </p:cxnSp>
+      <p:cxnSp>
+        <p:nvCxnSpPr>
+          <p:cNvPr id="185" name="직선 화살표 연결선 184">
+            <a:extLst>
+              <a:ext uri="{FF2B5EF4-FFF2-40B4-BE49-F238E27FC236}">
+                <a16:creationId xmlns:a16="http://schemas.microsoft.com/office/drawing/2014/main" id="{CC3E0BD2-F9A0-1166-57A7-5157C3378889}"/>
+              </a:ext>
+            </a:extLst>
+          </p:cNvPr>
+          <p:cNvCxnSpPr>
+            <a:cxnSpLocks/>
+            <a:stCxn id="169" idx="2"/>
+            <a:endCxn id="182" idx="0"/>
+          </p:cNvCxnSpPr>
+          <p:nvPr/>
+        </p:nvCxnSpPr>
+        <p:spPr>
+          <a:xfrm>
+            <a:off x="6950845" y="1807575"/>
+            <a:ext cx="1512167" cy="526077"/>
+          </a:xfrm>
+          <a:prstGeom prst="straightConnector1">
+            <a:avLst/>
+          </a:prstGeom>
+          <a:ln>
+            <a:solidFill>
+              <a:schemeClr val="accent4">
+                <a:lumMod val="75000"/>
+              </a:schemeClr>
+            </a:solidFill>
+            <a:headEnd type="triangle"/>
+            <a:tailEnd type="triangle"/>
+          </a:ln>
+        </p:spPr>
+        <p:style>
+          <a:lnRef idx="1">
+            <a:schemeClr val="accent1"/>
+          </a:lnRef>
+          <a:fillRef idx="0">
+            <a:schemeClr val="accent1"/>
+          </a:fillRef>
+          <a:effectRef idx="0">
+            <a:schemeClr val="accent1"/>
+          </a:effectRef>
+          <a:fontRef idx="minor">
+            <a:schemeClr val="tx1"/>
+          </a:fontRef>
+        </p:style>
+      </p:cxnSp>
+      <p:cxnSp>
+        <p:nvCxnSpPr>
+          <p:cNvPr id="186" name="직선 화살표 연결선 185">
+            <a:extLst>
+              <a:ext uri="{FF2B5EF4-FFF2-40B4-BE49-F238E27FC236}">
+                <a16:creationId xmlns:a16="http://schemas.microsoft.com/office/drawing/2014/main" id="{E17EFC27-B188-9056-68F8-175786B3F2E6}"/>
+              </a:ext>
+            </a:extLst>
+          </p:cNvPr>
+          <p:cNvCxnSpPr>
+            <a:cxnSpLocks/>
+            <a:stCxn id="176" idx="2"/>
+            <a:endCxn id="175" idx="0"/>
+          </p:cNvCxnSpPr>
+          <p:nvPr/>
+        </p:nvCxnSpPr>
+        <p:spPr>
+          <a:xfrm>
+            <a:off x="5438678" y="2809847"/>
+            <a:ext cx="0" cy="242706"/>
+          </a:xfrm>
+          <a:prstGeom prst="straightConnector1">
+            <a:avLst/>
+          </a:prstGeom>
+          <a:ln>
+            <a:solidFill>
+              <a:schemeClr val="accent4">
+                <a:lumMod val="75000"/>
+              </a:schemeClr>
+            </a:solidFill>
+            <a:headEnd type="triangle"/>
+            <a:tailEnd type="triangle"/>
+          </a:ln>
+        </p:spPr>
+        <p:style>
+          <a:lnRef idx="1">
+            <a:schemeClr val="accent1"/>
+          </a:lnRef>
+          <a:fillRef idx="0">
+            <a:schemeClr val="accent1"/>
+          </a:fillRef>
+          <a:effectRef idx="0">
+            <a:schemeClr val="accent1"/>
+          </a:effectRef>
+          <a:fontRef idx="minor">
+            <a:schemeClr val="tx1"/>
+          </a:fontRef>
+        </p:style>
+      </p:cxnSp>
+      <p:cxnSp>
+        <p:nvCxnSpPr>
+          <p:cNvPr id="187" name="직선 화살표 연결선 186">
+            <a:extLst>
+              <a:ext uri="{FF2B5EF4-FFF2-40B4-BE49-F238E27FC236}">
+                <a16:creationId xmlns:a16="http://schemas.microsoft.com/office/drawing/2014/main" id="{43B19037-115E-143D-794C-31CBBCBDFF4A}"/>
+              </a:ext>
+            </a:extLst>
+          </p:cNvPr>
+          <p:cNvCxnSpPr>
+            <a:cxnSpLocks/>
+            <a:stCxn id="180" idx="2"/>
+            <a:endCxn id="171" idx="0"/>
+          </p:cNvCxnSpPr>
+          <p:nvPr/>
+        </p:nvCxnSpPr>
+        <p:spPr>
+          <a:xfrm>
+            <a:off x="6446789" y="2809847"/>
+            <a:ext cx="2580" cy="242706"/>
+          </a:xfrm>
+          <a:prstGeom prst="straightConnector1">
+            <a:avLst/>
+          </a:prstGeom>
+          <a:ln>
+            <a:solidFill>
+              <a:schemeClr val="accent4">
+                <a:lumMod val="75000"/>
+              </a:schemeClr>
+            </a:solidFill>
+            <a:headEnd type="triangle"/>
+            <a:tailEnd type="triangle"/>
+          </a:ln>
+        </p:spPr>
+        <p:style>
+          <a:lnRef idx="1">
+            <a:schemeClr val="accent1"/>
+          </a:lnRef>
+          <a:fillRef idx="0">
+            <a:schemeClr val="accent1"/>
+          </a:fillRef>
+          <a:effectRef idx="0">
+            <a:schemeClr val="accent1"/>
+          </a:effectRef>
+          <a:fontRef idx="minor">
+            <a:schemeClr val="tx1"/>
+          </a:fontRef>
+        </p:style>
+      </p:cxnSp>
+      <p:cxnSp>
+        <p:nvCxnSpPr>
+          <p:cNvPr id="188" name="직선 화살표 연결선 187">
+            <a:extLst>
+              <a:ext uri="{FF2B5EF4-FFF2-40B4-BE49-F238E27FC236}">
+                <a16:creationId xmlns:a16="http://schemas.microsoft.com/office/drawing/2014/main" id="{D5DB57AA-D42A-6BEE-035F-4A8A09A39C84}"/>
+              </a:ext>
+            </a:extLst>
+          </p:cNvPr>
+          <p:cNvCxnSpPr>
+            <a:cxnSpLocks/>
+            <a:stCxn id="181" idx="2"/>
+            <a:endCxn id="179" idx="0"/>
+          </p:cNvCxnSpPr>
+          <p:nvPr/>
+        </p:nvCxnSpPr>
+        <p:spPr>
+          <a:xfrm>
+            <a:off x="7452321" y="2809847"/>
+            <a:ext cx="0" cy="242706"/>
+          </a:xfrm>
+          <a:prstGeom prst="straightConnector1">
+            <a:avLst/>
+          </a:prstGeom>
+          <a:ln>
+            <a:solidFill>
+              <a:schemeClr val="accent4">
+                <a:lumMod val="75000"/>
+              </a:schemeClr>
+            </a:solidFill>
+            <a:headEnd type="triangle"/>
+            <a:tailEnd type="triangle"/>
+          </a:ln>
+        </p:spPr>
+        <p:style>
+          <a:lnRef idx="1">
+            <a:schemeClr val="accent1"/>
+          </a:lnRef>
+          <a:fillRef idx="0">
+            <a:schemeClr val="accent1"/>
+          </a:fillRef>
+          <a:effectRef idx="0">
+            <a:schemeClr val="accent1"/>
+          </a:effectRef>
+          <a:fontRef idx="minor">
+            <a:schemeClr val="tx1"/>
+          </a:fontRef>
+        </p:style>
+      </p:cxnSp>
+      <p:cxnSp>
+        <p:nvCxnSpPr>
+          <p:cNvPr id="189" name="직선 화살표 연결선 188">
+            <a:extLst>
+              <a:ext uri="{FF2B5EF4-FFF2-40B4-BE49-F238E27FC236}">
+                <a16:creationId xmlns:a16="http://schemas.microsoft.com/office/drawing/2014/main" id="{68973940-3639-923D-FC07-4CBF063B1F3F}"/>
+              </a:ext>
+            </a:extLst>
+          </p:cNvPr>
+          <p:cNvCxnSpPr>
+            <a:cxnSpLocks/>
+            <a:stCxn id="182" idx="2"/>
+            <a:endCxn id="178" idx="0"/>
+          </p:cNvCxnSpPr>
+          <p:nvPr/>
+        </p:nvCxnSpPr>
+        <p:spPr>
+          <a:xfrm>
+            <a:off x="8463012" y="2809847"/>
+            <a:ext cx="0" cy="242706"/>
+          </a:xfrm>
+          <a:prstGeom prst="straightConnector1">
+            <a:avLst/>
+          </a:prstGeom>
+          <a:ln>
+            <a:solidFill>
+              <a:schemeClr val="accent4">
+                <a:lumMod val="75000"/>
+              </a:schemeClr>
+            </a:solidFill>
+            <a:headEnd type="triangle"/>
+            <a:tailEnd type="triangle"/>
+          </a:ln>
+        </p:spPr>
+        <p:style>
+          <a:lnRef idx="1">
+            <a:schemeClr val="accent1"/>
+          </a:lnRef>
+          <a:fillRef idx="0">
+            <a:schemeClr val="accent1"/>
+          </a:fillRef>
+          <a:effectRef idx="0">
+            <a:schemeClr val="accent1"/>
+          </a:effectRef>
+          <a:fontRef idx="minor">
+            <a:schemeClr val="tx1"/>
+          </a:fontRef>
+        </p:style>
+      </p:cxnSp>
+      <p:sp>
+        <p:nvSpPr>
+          <p:cNvPr id="190" name="직사각형 189">
+            <a:extLst>
+              <a:ext uri="{FF2B5EF4-FFF2-40B4-BE49-F238E27FC236}">
+                <a16:creationId xmlns:a16="http://schemas.microsoft.com/office/drawing/2014/main" id="{13B53579-F59D-5CEE-CBCA-9661750BF25F}"/>
+              </a:ext>
+            </a:extLst>
+          </p:cNvPr>
+          <p:cNvSpPr/>
+          <p:nvPr/>
+        </p:nvSpPr>
+        <p:spPr>
+          <a:xfrm>
+            <a:off x="6089329" y="4106527"/>
+            <a:ext cx="720080" cy="476195"/>
+          </a:xfrm>
+          <a:prstGeom prst="rect">
+            <a:avLst/>
+          </a:prstGeom>
+          <a:solidFill>
+            <a:schemeClr val="accent6">
+              <a:lumMod val="20000"/>
+              <a:lumOff val="80000"/>
+            </a:schemeClr>
+          </a:solidFill>
+          <a:ln w="12700"/>
+        </p:spPr>
+        <p:style>
+          <a:lnRef idx="2">
+            <a:schemeClr val="accent1">
+              <a:shade val="15000"/>
+            </a:schemeClr>
+          </a:lnRef>
+          <a:fillRef idx="1">
+            <a:schemeClr val="accent1"/>
+          </a:fillRef>
+          <a:effectRef idx="0">
+            <a:schemeClr val="accent1"/>
+          </a:effectRef>
+          <a:fontRef idx="minor">
+            <a:schemeClr val="lt1"/>
+          </a:fontRef>
+        </p:style>
+        <p:txBody>
+          <a:bodyPr rtlCol="0" anchor="ctr"/>
+          <a:lstStyle/>
+          <a:p>
+            <a:pPr algn="ctr"/>
+            <a:r>
+              <a:rPr kumimoji="1" lang="en-US" altLang="ko-KR" sz="800">
+                <a:solidFill>
+                  <a:schemeClr val="tx1"/>
+                </a:solidFill>
+              </a:rPr>
+              <a:t>NVSwitch</a:t>
+            </a:r>
+          </a:p>
+        </p:txBody>
+      </p:sp>
+      <p:sp>
+        <p:nvSpPr>
+          <p:cNvPr id="191" name="직사각형 190">
+            <a:extLst>
+              <a:ext uri="{FF2B5EF4-FFF2-40B4-BE49-F238E27FC236}">
+                <a16:creationId xmlns:a16="http://schemas.microsoft.com/office/drawing/2014/main" id="{B203C467-CED8-82E9-23E5-2C945D158FD3}"/>
+              </a:ext>
+            </a:extLst>
+          </p:cNvPr>
+          <p:cNvSpPr/>
+          <p:nvPr/>
+        </p:nvSpPr>
+        <p:spPr>
+          <a:xfrm>
+            <a:off x="7092281" y="4106527"/>
+            <a:ext cx="720080" cy="476195"/>
+          </a:xfrm>
+          <a:prstGeom prst="rect">
+            <a:avLst/>
+          </a:prstGeom>
+          <a:solidFill>
+            <a:schemeClr val="accent6">
+              <a:lumMod val="20000"/>
+              <a:lumOff val="80000"/>
+            </a:schemeClr>
+          </a:solidFill>
+          <a:ln w="12700"/>
+        </p:spPr>
+        <p:style>
+          <a:lnRef idx="2">
+            <a:schemeClr val="accent1">
+              <a:shade val="15000"/>
+            </a:schemeClr>
+          </a:lnRef>
+          <a:fillRef idx="1">
+            <a:schemeClr val="accent1"/>
+          </a:fillRef>
+          <a:effectRef idx="0">
+            <a:schemeClr val="accent1"/>
+          </a:effectRef>
+          <a:fontRef idx="minor">
+            <a:schemeClr val="lt1"/>
+          </a:fontRef>
+        </p:style>
+        <p:txBody>
+          <a:bodyPr rtlCol="0" anchor="ctr"/>
+          <a:lstStyle/>
+          <a:p>
+            <a:pPr algn="ctr"/>
+            <a:r>
+              <a:rPr kumimoji="1" lang="en-US" altLang="ko-KR" sz="800">
+                <a:solidFill>
+                  <a:schemeClr val="tx1"/>
+                </a:solidFill>
+              </a:rPr>
+              <a:t>NVSwitch</a:t>
+            </a:r>
+          </a:p>
+        </p:txBody>
+      </p:sp>
+      <p:cxnSp>
+        <p:nvCxnSpPr>
+          <p:cNvPr id="192" name="직선 화살표 연결선 191">
+            <a:extLst>
+              <a:ext uri="{FF2B5EF4-FFF2-40B4-BE49-F238E27FC236}">
+                <a16:creationId xmlns:a16="http://schemas.microsoft.com/office/drawing/2014/main" id="{A67A6F18-5C3F-9476-1704-F11CA3B8B475}"/>
+              </a:ext>
+            </a:extLst>
+          </p:cNvPr>
+          <p:cNvCxnSpPr>
+            <a:cxnSpLocks/>
+            <a:stCxn id="175" idx="2"/>
+            <a:endCxn id="190" idx="0"/>
+          </p:cNvCxnSpPr>
+          <p:nvPr/>
+        </p:nvCxnSpPr>
+        <p:spPr>
+          <a:xfrm>
+            <a:off x="5438678" y="3528748"/>
+            <a:ext cx="1010691" cy="577779"/>
+          </a:xfrm>
+          <a:prstGeom prst="straightConnector1">
+            <a:avLst/>
+          </a:prstGeom>
+          <a:ln>
+            <a:solidFill>
+              <a:schemeClr val="accent6">
+                <a:lumMod val="75000"/>
+              </a:schemeClr>
+            </a:solidFill>
+            <a:headEnd type="triangle"/>
+            <a:tailEnd type="triangle"/>
+          </a:ln>
+        </p:spPr>
+        <p:style>
+          <a:lnRef idx="1">
+            <a:schemeClr val="accent1"/>
+          </a:lnRef>
+          <a:fillRef idx="0">
+            <a:schemeClr val="accent1"/>
+          </a:fillRef>
+          <a:effectRef idx="0">
+            <a:schemeClr val="accent1"/>
+          </a:effectRef>
+          <a:fontRef idx="minor">
+            <a:schemeClr val="tx1"/>
+          </a:fontRef>
+        </p:style>
+      </p:cxnSp>
+      <p:cxnSp>
+        <p:nvCxnSpPr>
+          <p:cNvPr id="193" name="직선 화살표 연결선 192">
+            <a:extLst>
+              <a:ext uri="{FF2B5EF4-FFF2-40B4-BE49-F238E27FC236}">
+                <a16:creationId xmlns:a16="http://schemas.microsoft.com/office/drawing/2014/main" id="{D1E59A74-44E8-2AAD-E694-FFEEB6DE7F6C}"/>
+              </a:ext>
+            </a:extLst>
+          </p:cNvPr>
+          <p:cNvCxnSpPr>
+            <a:cxnSpLocks/>
+            <a:stCxn id="171" idx="2"/>
+            <a:endCxn id="190" idx="0"/>
+          </p:cNvCxnSpPr>
+          <p:nvPr/>
+        </p:nvCxnSpPr>
+        <p:spPr>
+          <a:xfrm>
+            <a:off x="6449369" y="3528748"/>
+            <a:ext cx="0" cy="577779"/>
+          </a:xfrm>
+          <a:prstGeom prst="straightConnector1">
+            <a:avLst/>
+          </a:prstGeom>
+          <a:ln>
+            <a:solidFill>
+              <a:schemeClr val="accent6">
+                <a:lumMod val="75000"/>
+              </a:schemeClr>
+            </a:solidFill>
+            <a:headEnd type="triangle"/>
+            <a:tailEnd type="triangle"/>
+          </a:ln>
+        </p:spPr>
+        <p:style>
+          <a:lnRef idx="1">
+            <a:schemeClr val="accent1"/>
+          </a:lnRef>
+          <a:fillRef idx="0">
+            <a:schemeClr val="accent1"/>
+          </a:fillRef>
+          <a:effectRef idx="0">
+            <a:schemeClr val="accent1"/>
+          </a:effectRef>
+          <a:fontRef idx="minor">
+            <a:schemeClr val="tx1"/>
+          </a:fontRef>
+        </p:style>
+      </p:cxnSp>
+      <p:cxnSp>
+        <p:nvCxnSpPr>
+          <p:cNvPr id="194" name="직선 화살표 연결선 193">
+            <a:extLst>
+              <a:ext uri="{FF2B5EF4-FFF2-40B4-BE49-F238E27FC236}">
+                <a16:creationId xmlns:a16="http://schemas.microsoft.com/office/drawing/2014/main" id="{81BF8292-DE05-275B-9798-5D6B0C693ACE}"/>
+              </a:ext>
+            </a:extLst>
+          </p:cNvPr>
+          <p:cNvCxnSpPr>
+            <a:cxnSpLocks/>
+            <a:stCxn id="179" idx="2"/>
+            <a:endCxn id="190" idx="0"/>
+          </p:cNvCxnSpPr>
+          <p:nvPr/>
+        </p:nvCxnSpPr>
+        <p:spPr>
+          <a:xfrm flipH="1">
+            <a:off x="6449369" y="3528748"/>
+            <a:ext cx="1002952" cy="577779"/>
+          </a:xfrm>
+          <a:prstGeom prst="straightConnector1">
+            <a:avLst/>
+          </a:prstGeom>
+          <a:ln>
+            <a:solidFill>
+              <a:schemeClr val="accent6">
+                <a:lumMod val="75000"/>
+              </a:schemeClr>
+            </a:solidFill>
+            <a:headEnd type="triangle"/>
+            <a:tailEnd type="triangle"/>
+          </a:ln>
+        </p:spPr>
+        <p:style>
+          <a:lnRef idx="1">
+            <a:schemeClr val="accent1"/>
+          </a:lnRef>
+          <a:fillRef idx="0">
+            <a:schemeClr val="accent1"/>
+          </a:fillRef>
+          <a:effectRef idx="0">
+            <a:schemeClr val="accent1"/>
+          </a:effectRef>
+          <a:fontRef idx="minor">
+            <a:schemeClr val="tx1"/>
+          </a:fontRef>
+        </p:style>
+      </p:cxnSp>
+      <p:cxnSp>
+        <p:nvCxnSpPr>
+          <p:cNvPr id="195" name="직선 화살표 연결선 194">
+            <a:extLst>
+              <a:ext uri="{FF2B5EF4-FFF2-40B4-BE49-F238E27FC236}">
+                <a16:creationId xmlns:a16="http://schemas.microsoft.com/office/drawing/2014/main" id="{AC54A471-81CC-FA15-0568-42C6CD06697F}"/>
+              </a:ext>
+            </a:extLst>
+          </p:cNvPr>
+          <p:cNvCxnSpPr>
+            <a:cxnSpLocks/>
+            <a:stCxn id="178" idx="2"/>
+            <a:endCxn id="191" idx="0"/>
+          </p:cNvCxnSpPr>
+          <p:nvPr/>
+        </p:nvCxnSpPr>
+        <p:spPr>
+          <a:xfrm flipH="1">
+            <a:off x="7452321" y="3528748"/>
+            <a:ext cx="1010691" cy="577779"/>
+          </a:xfrm>
+          <a:prstGeom prst="straightConnector1">
+            <a:avLst/>
+          </a:prstGeom>
+          <a:ln>
+            <a:solidFill>
+              <a:schemeClr val="accent6">
+                <a:lumMod val="75000"/>
+              </a:schemeClr>
+            </a:solidFill>
+            <a:headEnd type="triangle"/>
+            <a:tailEnd type="triangle"/>
+          </a:ln>
+        </p:spPr>
+        <p:style>
+          <a:lnRef idx="1">
+            <a:schemeClr val="accent1"/>
+          </a:lnRef>
+          <a:fillRef idx="0">
+            <a:schemeClr val="accent1"/>
+          </a:fillRef>
+          <a:effectRef idx="0">
+            <a:schemeClr val="accent1"/>
+          </a:effectRef>
+          <a:fontRef idx="minor">
+            <a:schemeClr val="tx1"/>
+          </a:fontRef>
+        </p:style>
+      </p:cxnSp>
+      <p:cxnSp>
+        <p:nvCxnSpPr>
+          <p:cNvPr id="196" name="직선 화살표 연결선 195">
+            <a:extLst>
+              <a:ext uri="{FF2B5EF4-FFF2-40B4-BE49-F238E27FC236}">
+                <a16:creationId xmlns:a16="http://schemas.microsoft.com/office/drawing/2014/main" id="{63B1BDA6-D5CE-6BEE-DF0F-4AA0830182BF}"/>
+              </a:ext>
+            </a:extLst>
+          </p:cNvPr>
+          <p:cNvCxnSpPr>
+            <a:cxnSpLocks/>
+            <a:stCxn id="179" idx="2"/>
+            <a:endCxn id="191" idx="0"/>
+          </p:cNvCxnSpPr>
+          <p:nvPr/>
+        </p:nvCxnSpPr>
+        <p:spPr>
+          <a:xfrm>
+            <a:off x="7452321" y="3528748"/>
+            <a:ext cx="0" cy="577779"/>
+          </a:xfrm>
+          <a:prstGeom prst="straightConnector1">
+            <a:avLst/>
+          </a:prstGeom>
+          <a:ln>
+            <a:solidFill>
+              <a:schemeClr val="accent6">
+                <a:lumMod val="75000"/>
+              </a:schemeClr>
+            </a:solidFill>
+            <a:headEnd type="triangle"/>
+            <a:tailEnd type="triangle"/>
+          </a:ln>
+        </p:spPr>
+        <p:style>
+          <a:lnRef idx="1">
+            <a:schemeClr val="accent1"/>
+          </a:lnRef>
+          <a:fillRef idx="0">
+            <a:schemeClr val="accent1"/>
+          </a:fillRef>
+          <a:effectRef idx="0">
+            <a:schemeClr val="accent1"/>
+          </a:effectRef>
+          <a:fontRef idx="minor">
+            <a:schemeClr val="tx1"/>
+          </a:fontRef>
+        </p:style>
+      </p:cxnSp>
+      <p:cxnSp>
+        <p:nvCxnSpPr>
+          <p:cNvPr id="197" name="직선 화살표 연결선 196">
+            <a:extLst>
+              <a:ext uri="{FF2B5EF4-FFF2-40B4-BE49-F238E27FC236}">
+                <a16:creationId xmlns:a16="http://schemas.microsoft.com/office/drawing/2014/main" id="{9DCFD743-A56E-FCF0-DDE4-9961013DF438}"/>
+              </a:ext>
+            </a:extLst>
+          </p:cNvPr>
+          <p:cNvCxnSpPr>
+            <a:cxnSpLocks/>
+            <a:stCxn id="171" idx="2"/>
+            <a:endCxn id="191" idx="0"/>
+          </p:cNvCxnSpPr>
+          <p:nvPr/>
+        </p:nvCxnSpPr>
+        <p:spPr>
+          <a:xfrm>
+            <a:off x="6449369" y="3528748"/>
+            <a:ext cx="1002952" cy="577779"/>
+          </a:xfrm>
+          <a:prstGeom prst="straightConnector1">
+            <a:avLst/>
+          </a:prstGeom>
+          <a:ln>
+            <a:solidFill>
+              <a:schemeClr val="accent6">
+                <a:lumMod val="75000"/>
+              </a:schemeClr>
+            </a:solidFill>
+            <a:headEnd type="triangle"/>
+            <a:tailEnd type="triangle"/>
+          </a:ln>
+        </p:spPr>
+        <p:style>
+          <a:lnRef idx="1">
+            <a:schemeClr val="accent1"/>
+          </a:lnRef>
+          <a:fillRef idx="0">
+            <a:schemeClr val="accent1"/>
+          </a:fillRef>
+          <a:effectRef idx="0">
+            <a:schemeClr val="accent1"/>
+          </a:effectRef>
+          <a:fontRef idx="minor">
+            <a:schemeClr val="tx1"/>
+          </a:fontRef>
+        </p:style>
+      </p:cxnSp>
+      <p:cxnSp>
+        <p:nvCxnSpPr>
+          <p:cNvPr id="198" name="직선 화살표 연결선 197">
+            <a:extLst>
+              <a:ext uri="{FF2B5EF4-FFF2-40B4-BE49-F238E27FC236}">
+                <a16:creationId xmlns:a16="http://schemas.microsoft.com/office/drawing/2014/main" id="{A4DEC17E-EBFC-9647-A9F7-0B1C0ED7E1A5}"/>
+              </a:ext>
+            </a:extLst>
+          </p:cNvPr>
+          <p:cNvCxnSpPr>
+            <a:cxnSpLocks/>
+            <a:stCxn id="175" idx="2"/>
+            <a:endCxn id="191" idx="0"/>
+          </p:cNvCxnSpPr>
+          <p:nvPr/>
+        </p:nvCxnSpPr>
+        <p:spPr>
+          <a:xfrm>
+            <a:off x="5438678" y="3528748"/>
+            <a:ext cx="2013643" cy="577779"/>
+          </a:xfrm>
+          <a:prstGeom prst="straightConnector1">
+            <a:avLst/>
+          </a:prstGeom>
+          <a:ln>
+            <a:solidFill>
+              <a:schemeClr val="accent6">
+                <a:lumMod val="75000"/>
+              </a:schemeClr>
+            </a:solidFill>
+            <a:headEnd type="triangle"/>
+            <a:tailEnd type="triangle"/>
+          </a:ln>
+        </p:spPr>
+        <p:style>
+          <a:lnRef idx="1">
+            <a:schemeClr val="accent1"/>
+          </a:lnRef>
+          <a:fillRef idx="0">
+            <a:schemeClr val="accent1"/>
+          </a:fillRef>
+          <a:effectRef idx="0">
+            <a:schemeClr val="accent1"/>
+          </a:effectRef>
+          <a:fontRef idx="minor">
+            <a:schemeClr val="tx1"/>
+          </a:fontRef>
+        </p:style>
+      </p:cxnSp>
+      <p:cxnSp>
+        <p:nvCxnSpPr>
+          <p:cNvPr id="199" name="직선 화살표 연결선 198">
+            <a:extLst>
+              <a:ext uri="{FF2B5EF4-FFF2-40B4-BE49-F238E27FC236}">
+                <a16:creationId xmlns:a16="http://schemas.microsoft.com/office/drawing/2014/main" id="{040A3D94-BFBC-8E47-6D59-F08607797206}"/>
+              </a:ext>
+            </a:extLst>
+          </p:cNvPr>
+          <p:cNvCxnSpPr>
+            <a:cxnSpLocks/>
+            <a:stCxn id="178" idx="2"/>
+            <a:endCxn id="190" idx="0"/>
+          </p:cNvCxnSpPr>
+          <p:nvPr/>
+        </p:nvCxnSpPr>
+        <p:spPr>
+          <a:xfrm flipH="1">
+            <a:off x="6449369" y="3528748"/>
+            <a:ext cx="2013643" cy="577779"/>
+          </a:xfrm>
+          <a:prstGeom prst="straightConnector1">
+            <a:avLst/>
+          </a:prstGeom>
+          <a:ln>
+            <a:solidFill>
+              <a:schemeClr val="accent6">
+                <a:lumMod val="75000"/>
+              </a:schemeClr>
+            </a:solidFill>
+            <a:headEnd type="triangle"/>
+            <a:tailEnd type="triangle"/>
+          </a:ln>
+        </p:spPr>
+        <p:style>
+          <a:lnRef idx="1">
+            <a:schemeClr val="accent1"/>
+          </a:lnRef>
+          <a:fillRef idx="0">
+            <a:schemeClr val="accent1"/>
+          </a:fillRef>
+          <a:effectRef idx="0">
+            <a:schemeClr val="accent1"/>
+          </a:effectRef>
+          <a:fontRef idx="minor">
+            <a:schemeClr val="tx1"/>
+          </a:fontRef>
+        </p:style>
+      </p:cxnSp>
+      <p:cxnSp>
+        <p:nvCxnSpPr>
+          <p:cNvPr id="242" name="직선 화살표 연결선 241">
+            <a:extLst>
+              <a:ext uri="{FF2B5EF4-FFF2-40B4-BE49-F238E27FC236}">
+                <a16:creationId xmlns:a16="http://schemas.microsoft.com/office/drawing/2014/main" id="{13980B76-5305-43BB-DB4F-5AFF6B307AC5}"/>
+              </a:ext>
+            </a:extLst>
+          </p:cNvPr>
+          <p:cNvCxnSpPr>
+            <a:cxnSpLocks/>
+            <a:stCxn id="175" idx="2"/>
+            <a:endCxn id="124" idx="0"/>
+          </p:cNvCxnSpPr>
+          <p:nvPr/>
+        </p:nvCxnSpPr>
+        <p:spPr>
+          <a:xfrm flipH="1">
+            <a:off x="1694261" y="3528748"/>
+            <a:ext cx="3744417" cy="577779"/>
+          </a:xfrm>
+          <a:prstGeom prst="straightConnector1">
+            <a:avLst/>
+          </a:prstGeom>
+          <a:ln>
+            <a:solidFill>
+              <a:schemeClr val="accent6">
+                <a:lumMod val="75000"/>
+              </a:schemeClr>
+            </a:solidFill>
+            <a:headEnd type="triangle"/>
+            <a:tailEnd type="triangle"/>
+          </a:ln>
+        </p:spPr>
+        <p:style>
+          <a:lnRef idx="1">
+            <a:schemeClr val="accent1"/>
+          </a:lnRef>
+          <a:fillRef idx="0">
+            <a:schemeClr val="accent1"/>
+          </a:fillRef>
+          <a:effectRef idx="0">
+            <a:schemeClr val="accent1"/>
+          </a:effectRef>
+          <a:fontRef idx="minor">
+            <a:schemeClr val="tx1"/>
+          </a:fontRef>
+        </p:style>
+      </p:cxnSp>
+      <p:cxnSp>
+        <p:nvCxnSpPr>
+          <p:cNvPr id="245" name="직선 화살표 연결선 244">
+            <a:extLst>
+              <a:ext uri="{FF2B5EF4-FFF2-40B4-BE49-F238E27FC236}">
+                <a16:creationId xmlns:a16="http://schemas.microsoft.com/office/drawing/2014/main" id="{07F11B59-570F-B8B3-1535-06648839BBF8}"/>
+              </a:ext>
+            </a:extLst>
+          </p:cNvPr>
+          <p:cNvCxnSpPr>
+            <a:cxnSpLocks/>
+            <a:stCxn id="171" idx="2"/>
+            <a:endCxn id="124" idx="0"/>
+          </p:cNvCxnSpPr>
+          <p:nvPr/>
+        </p:nvCxnSpPr>
+        <p:spPr>
+          <a:xfrm flipH="1">
+            <a:off x="1694261" y="3528748"/>
+            <a:ext cx="4755108" cy="577779"/>
+          </a:xfrm>
+          <a:prstGeom prst="straightConnector1">
+            <a:avLst/>
+          </a:prstGeom>
+          <a:ln>
+            <a:solidFill>
+              <a:schemeClr val="accent6">
+                <a:lumMod val="75000"/>
+              </a:schemeClr>
+            </a:solidFill>
+            <a:headEnd type="triangle"/>
+            <a:tailEnd type="triangle"/>
+          </a:ln>
+        </p:spPr>
+        <p:style>
+          <a:lnRef idx="1">
+            <a:schemeClr val="accent1"/>
+          </a:lnRef>
+          <a:fillRef idx="0">
+            <a:schemeClr val="accent1"/>
+          </a:fillRef>
+          <a:effectRef idx="0">
+            <a:schemeClr val="accent1"/>
+          </a:effectRef>
+          <a:fontRef idx="minor">
+            <a:schemeClr val="tx1"/>
+          </a:fontRef>
+        </p:style>
+      </p:cxnSp>
+      <p:cxnSp>
+        <p:nvCxnSpPr>
+          <p:cNvPr id="246" name="직선 화살표 연결선 245">
+            <a:extLst>
+              <a:ext uri="{FF2B5EF4-FFF2-40B4-BE49-F238E27FC236}">
+                <a16:creationId xmlns:a16="http://schemas.microsoft.com/office/drawing/2014/main" id="{BCAC87CB-30B0-3175-D4AB-DCE6166C95FD}"/>
+              </a:ext>
+            </a:extLst>
+          </p:cNvPr>
+          <p:cNvCxnSpPr>
+            <a:cxnSpLocks/>
+            <a:stCxn id="179" idx="2"/>
+            <a:endCxn id="124" idx="0"/>
+          </p:cNvCxnSpPr>
+          <p:nvPr/>
+        </p:nvCxnSpPr>
+        <p:spPr>
+          <a:xfrm flipH="1">
+            <a:off x="1694261" y="3528748"/>
+            <a:ext cx="5758060" cy="577779"/>
+          </a:xfrm>
+          <a:prstGeom prst="straightConnector1">
+            <a:avLst/>
+          </a:prstGeom>
+          <a:ln>
+            <a:solidFill>
+              <a:schemeClr val="accent6">
+                <a:lumMod val="75000"/>
+              </a:schemeClr>
+            </a:solidFill>
+            <a:headEnd type="triangle"/>
+            <a:tailEnd type="triangle"/>
+          </a:ln>
+        </p:spPr>
+        <p:style>
+          <a:lnRef idx="1">
+            <a:schemeClr val="accent1"/>
+          </a:lnRef>
+          <a:fillRef idx="0">
+            <a:schemeClr val="accent1"/>
+          </a:fillRef>
+          <a:effectRef idx="0">
+            <a:schemeClr val="accent1"/>
+          </a:effectRef>
+          <a:fontRef idx="minor">
+            <a:schemeClr val="tx1"/>
+          </a:fontRef>
+        </p:style>
+      </p:cxnSp>
+      <p:cxnSp>
+        <p:nvCxnSpPr>
+          <p:cNvPr id="247" name="직선 화살표 연결선 246">
+            <a:extLst>
+              <a:ext uri="{FF2B5EF4-FFF2-40B4-BE49-F238E27FC236}">
+                <a16:creationId xmlns:a16="http://schemas.microsoft.com/office/drawing/2014/main" id="{8399EDFE-42FB-DB54-8864-2A1B96C32EA9}"/>
+              </a:ext>
+            </a:extLst>
+          </p:cNvPr>
+          <p:cNvCxnSpPr>
+            <a:cxnSpLocks/>
+            <a:stCxn id="178" idx="2"/>
+            <a:endCxn id="124" idx="0"/>
+          </p:cNvCxnSpPr>
+          <p:nvPr/>
+        </p:nvCxnSpPr>
+        <p:spPr>
+          <a:xfrm flipH="1">
+            <a:off x="1694261" y="3528748"/>
+            <a:ext cx="6768751" cy="577779"/>
+          </a:xfrm>
+          <a:prstGeom prst="straightConnector1">
+            <a:avLst/>
+          </a:prstGeom>
+          <a:ln>
+            <a:solidFill>
+              <a:schemeClr val="accent6">
+                <a:lumMod val="75000"/>
+              </a:schemeClr>
+            </a:solidFill>
+            <a:headEnd type="triangle"/>
+            <a:tailEnd type="triangle"/>
+          </a:ln>
+        </p:spPr>
+        <p:style>
+          <a:lnRef idx="1">
+            <a:schemeClr val="accent1"/>
+          </a:lnRef>
+          <a:fillRef idx="0">
+            <a:schemeClr val="accent1"/>
+          </a:fillRef>
+          <a:effectRef idx="0">
+            <a:schemeClr val="accent1"/>
+          </a:effectRef>
+          <a:fontRef idx="minor">
+            <a:schemeClr val="tx1"/>
+          </a:fontRef>
+        </p:style>
+      </p:cxnSp>
+      <p:cxnSp>
+        <p:nvCxnSpPr>
+          <p:cNvPr id="258" name="직선 화살표 연결선 257">
+            <a:extLst>
+              <a:ext uri="{FF2B5EF4-FFF2-40B4-BE49-F238E27FC236}">
+                <a16:creationId xmlns:a16="http://schemas.microsoft.com/office/drawing/2014/main" id="{7F961B8E-EE7A-64F7-031E-96CF7E9C749E}"/>
+              </a:ext>
+            </a:extLst>
+          </p:cNvPr>
+          <p:cNvCxnSpPr>
+            <a:cxnSpLocks/>
+            <a:stCxn id="175" idx="2"/>
+            <a:endCxn id="125" idx="0"/>
+          </p:cNvCxnSpPr>
+          <p:nvPr/>
+        </p:nvCxnSpPr>
+        <p:spPr>
+          <a:xfrm flipH="1">
+            <a:off x="2697213" y="3528748"/>
+            <a:ext cx="2741465" cy="577779"/>
+          </a:xfrm>
+          <a:prstGeom prst="straightConnector1">
+            <a:avLst/>
+          </a:prstGeom>
+          <a:ln>
+            <a:solidFill>
+              <a:schemeClr val="accent6">
+                <a:lumMod val="75000"/>
+              </a:schemeClr>
+            </a:solidFill>
+            <a:headEnd type="triangle"/>
+            <a:tailEnd type="triangle"/>
+          </a:ln>
+        </p:spPr>
+        <p:style>
+          <a:lnRef idx="1">
+            <a:schemeClr val="accent1"/>
+          </a:lnRef>
+          <a:fillRef idx="0">
+            <a:schemeClr val="accent1"/>
+          </a:fillRef>
+          <a:effectRef idx="0">
+            <a:schemeClr val="accent1"/>
+          </a:effectRef>
+          <a:fontRef idx="minor">
+            <a:schemeClr val="tx1"/>
+          </a:fontRef>
+        </p:style>
+      </p:cxnSp>
+      <p:cxnSp>
+        <p:nvCxnSpPr>
+          <p:cNvPr id="259" name="직선 화살표 연결선 258">
+            <a:extLst>
+              <a:ext uri="{FF2B5EF4-FFF2-40B4-BE49-F238E27FC236}">
+                <a16:creationId xmlns:a16="http://schemas.microsoft.com/office/drawing/2014/main" id="{5C7D5B95-4080-42F6-1127-7172F00E1760}"/>
+              </a:ext>
+            </a:extLst>
+          </p:cNvPr>
+          <p:cNvCxnSpPr>
+            <a:cxnSpLocks/>
+            <a:stCxn id="171" idx="2"/>
+            <a:endCxn id="125" idx="0"/>
+          </p:cNvCxnSpPr>
+          <p:nvPr/>
+        </p:nvCxnSpPr>
+        <p:spPr>
+          <a:xfrm flipH="1">
+            <a:off x="2697213" y="3528748"/>
+            <a:ext cx="3752156" cy="577779"/>
+          </a:xfrm>
+          <a:prstGeom prst="straightConnector1">
+            <a:avLst/>
+          </a:prstGeom>
+          <a:ln>
+            <a:solidFill>
+              <a:schemeClr val="accent6">
+                <a:lumMod val="75000"/>
+              </a:schemeClr>
+            </a:solidFill>
+            <a:headEnd type="triangle"/>
+            <a:tailEnd type="triangle"/>
+          </a:ln>
+        </p:spPr>
+        <p:style>
+          <a:lnRef idx="1">
+            <a:schemeClr val="accent1"/>
+          </a:lnRef>
+          <a:fillRef idx="0">
+            <a:schemeClr val="accent1"/>
+          </a:fillRef>
+          <a:effectRef idx="0">
+            <a:schemeClr val="accent1"/>
+          </a:effectRef>
+          <a:fontRef idx="minor">
+            <a:schemeClr val="tx1"/>
+          </a:fontRef>
+        </p:style>
+      </p:cxnSp>
+      <p:cxnSp>
+        <p:nvCxnSpPr>
+          <p:cNvPr id="260" name="직선 화살표 연결선 259">
+            <a:extLst>
+              <a:ext uri="{FF2B5EF4-FFF2-40B4-BE49-F238E27FC236}">
+                <a16:creationId xmlns:a16="http://schemas.microsoft.com/office/drawing/2014/main" id="{CDC63750-5819-6F35-14B1-3CA525D312AA}"/>
+              </a:ext>
+            </a:extLst>
+          </p:cNvPr>
+          <p:cNvCxnSpPr>
+            <a:cxnSpLocks/>
+            <a:stCxn id="179" idx="2"/>
+            <a:endCxn id="125" idx="0"/>
+          </p:cNvCxnSpPr>
+          <p:nvPr/>
+        </p:nvCxnSpPr>
+        <p:spPr>
+          <a:xfrm flipH="1">
+            <a:off x="2697213" y="3528748"/>
+            <a:ext cx="4755108" cy="577779"/>
+          </a:xfrm>
+          <a:prstGeom prst="straightConnector1">
+            <a:avLst/>
+          </a:prstGeom>
+          <a:ln>
+            <a:solidFill>
+              <a:schemeClr val="accent6">
+                <a:lumMod val="75000"/>
+              </a:schemeClr>
+            </a:solidFill>
+            <a:headEnd type="triangle"/>
+            <a:tailEnd type="triangle"/>
+          </a:ln>
+        </p:spPr>
+        <p:style>
+          <a:lnRef idx="1">
+            <a:schemeClr val="accent1"/>
+          </a:lnRef>
+          <a:fillRef idx="0">
+            <a:schemeClr val="accent1"/>
+          </a:fillRef>
+          <a:effectRef idx="0">
+            <a:schemeClr val="accent1"/>
+          </a:effectRef>
+          <a:fontRef idx="minor">
+            <a:schemeClr val="tx1"/>
+          </a:fontRef>
+        </p:style>
+      </p:cxnSp>
+      <p:cxnSp>
+        <p:nvCxnSpPr>
+          <p:cNvPr id="261" name="직선 화살표 연결선 260">
+            <a:extLst>
+              <a:ext uri="{FF2B5EF4-FFF2-40B4-BE49-F238E27FC236}">
+                <a16:creationId xmlns:a16="http://schemas.microsoft.com/office/drawing/2014/main" id="{77516426-9823-D01E-45CE-69ED50C5EABD}"/>
+              </a:ext>
+            </a:extLst>
+          </p:cNvPr>
+          <p:cNvCxnSpPr>
+            <a:cxnSpLocks/>
+            <a:stCxn id="178" idx="2"/>
+            <a:endCxn id="125" idx="0"/>
+          </p:cNvCxnSpPr>
+          <p:nvPr/>
+        </p:nvCxnSpPr>
+        <p:spPr>
+          <a:xfrm flipH="1">
+            <a:off x="2697213" y="3528748"/>
+            <a:ext cx="5765799" cy="577779"/>
+          </a:xfrm>
+          <a:prstGeom prst="straightConnector1">
+            <a:avLst/>
+          </a:prstGeom>
+          <a:ln>
+            <a:solidFill>
+              <a:schemeClr val="accent6">
+                <a:lumMod val="75000"/>
+              </a:schemeClr>
+            </a:solidFill>
+            <a:headEnd type="triangle"/>
+            <a:tailEnd type="triangle"/>
+          </a:ln>
+        </p:spPr>
+        <p:style>
+          <a:lnRef idx="1">
+            <a:schemeClr val="accent1"/>
+          </a:lnRef>
+          <a:fillRef idx="0">
+            <a:schemeClr val="accent1"/>
+          </a:fillRef>
+          <a:effectRef idx="0">
+            <a:schemeClr val="accent1"/>
+          </a:effectRef>
+          <a:fontRef idx="minor">
+            <a:schemeClr val="tx1"/>
+          </a:fontRef>
+        </p:style>
+      </p:cxnSp>
+      <p:cxnSp>
+        <p:nvCxnSpPr>
+          <p:cNvPr id="270" name="직선 화살표 연결선 269">
+            <a:extLst>
+              <a:ext uri="{FF2B5EF4-FFF2-40B4-BE49-F238E27FC236}">
+                <a16:creationId xmlns:a16="http://schemas.microsoft.com/office/drawing/2014/main" id="{73F74B83-0504-5C39-03F3-368C179BECB5}"/>
+              </a:ext>
+            </a:extLst>
+          </p:cNvPr>
+          <p:cNvCxnSpPr>
+            <a:cxnSpLocks/>
+            <a:stCxn id="80" idx="2"/>
+            <a:endCxn id="190" idx="0"/>
+          </p:cNvCxnSpPr>
+          <p:nvPr/>
+        </p:nvCxnSpPr>
+        <p:spPr>
+          <a:xfrm>
+            <a:off x="3707904" y="3528748"/>
+            <a:ext cx="2741465" cy="577779"/>
+          </a:xfrm>
+          <a:prstGeom prst="straightConnector1">
+            <a:avLst/>
+          </a:prstGeom>
+          <a:ln>
+            <a:solidFill>
+              <a:schemeClr val="accent6">
+                <a:lumMod val="75000"/>
+              </a:schemeClr>
+            </a:solidFill>
+            <a:headEnd type="triangle"/>
+            <a:tailEnd type="triangle"/>
+          </a:ln>
+        </p:spPr>
+        <p:style>
+          <a:lnRef idx="1">
+            <a:schemeClr val="accent1"/>
+          </a:lnRef>
+          <a:fillRef idx="0">
+            <a:schemeClr val="accent1"/>
+          </a:fillRef>
+          <a:effectRef idx="0">
+            <a:schemeClr val="accent1"/>
+          </a:effectRef>
+          <a:fontRef idx="minor">
+            <a:schemeClr val="tx1"/>
+          </a:fontRef>
+        </p:style>
+      </p:cxnSp>
+      <p:cxnSp>
+        <p:nvCxnSpPr>
+          <p:cNvPr id="271" name="직선 화살표 연결선 270">
+            <a:extLst>
+              <a:ext uri="{FF2B5EF4-FFF2-40B4-BE49-F238E27FC236}">
+                <a16:creationId xmlns:a16="http://schemas.microsoft.com/office/drawing/2014/main" id="{E2131362-4EFD-5C12-3850-0281136C372D}"/>
+              </a:ext>
+            </a:extLst>
+          </p:cNvPr>
+          <p:cNvCxnSpPr>
+            <a:cxnSpLocks/>
+            <a:stCxn id="81" idx="2"/>
+            <a:endCxn id="190" idx="0"/>
+          </p:cNvCxnSpPr>
+          <p:nvPr/>
+        </p:nvCxnSpPr>
+        <p:spPr>
+          <a:xfrm>
+            <a:off x="2697213" y="3528748"/>
+            <a:ext cx="3752156" cy="577779"/>
+          </a:xfrm>
+          <a:prstGeom prst="straightConnector1">
+            <a:avLst/>
+          </a:prstGeom>
+          <a:ln>
+            <a:solidFill>
+              <a:schemeClr val="accent6">
+                <a:lumMod val="75000"/>
+              </a:schemeClr>
+            </a:solidFill>
+            <a:headEnd type="triangle"/>
+            <a:tailEnd type="triangle"/>
+          </a:ln>
+        </p:spPr>
+        <p:style>
+          <a:lnRef idx="1">
+            <a:schemeClr val="accent1"/>
+          </a:lnRef>
+          <a:fillRef idx="0">
+            <a:schemeClr val="accent1"/>
+          </a:fillRef>
+          <a:effectRef idx="0">
+            <a:schemeClr val="accent1"/>
+          </a:effectRef>
+          <a:fontRef idx="minor">
+            <a:schemeClr val="tx1"/>
+          </a:fontRef>
+        </p:style>
+      </p:cxnSp>
+      <p:cxnSp>
+        <p:nvCxnSpPr>
+          <p:cNvPr id="272" name="직선 화살표 연결선 271">
+            <a:extLst>
+              <a:ext uri="{FF2B5EF4-FFF2-40B4-BE49-F238E27FC236}">
+                <a16:creationId xmlns:a16="http://schemas.microsoft.com/office/drawing/2014/main" id="{3E115581-4AB9-7E93-3CBC-68C57FE47F30}"/>
+              </a:ext>
+            </a:extLst>
+          </p:cNvPr>
+          <p:cNvCxnSpPr>
+            <a:cxnSpLocks/>
+            <a:stCxn id="48" idx="2"/>
+            <a:endCxn id="190" idx="0"/>
+          </p:cNvCxnSpPr>
+          <p:nvPr/>
+        </p:nvCxnSpPr>
+        <p:spPr>
+          <a:xfrm>
+            <a:off x="1694261" y="3528748"/>
+            <a:ext cx="4755108" cy="577779"/>
+          </a:xfrm>
+          <a:prstGeom prst="straightConnector1">
+            <a:avLst/>
+          </a:prstGeom>
+          <a:ln>
+            <a:solidFill>
+              <a:schemeClr val="accent6">
+                <a:lumMod val="75000"/>
+              </a:schemeClr>
+            </a:solidFill>
+            <a:headEnd type="triangle"/>
+            <a:tailEnd type="triangle"/>
+          </a:ln>
+        </p:spPr>
+        <p:style>
+          <a:lnRef idx="1">
+            <a:schemeClr val="accent1"/>
+          </a:lnRef>
+          <a:fillRef idx="0">
+            <a:schemeClr val="accent1"/>
+          </a:fillRef>
+          <a:effectRef idx="0">
+            <a:schemeClr val="accent1"/>
+          </a:effectRef>
+          <a:fontRef idx="minor">
+            <a:schemeClr val="tx1"/>
+          </a:fontRef>
+        </p:style>
+      </p:cxnSp>
+      <p:cxnSp>
+        <p:nvCxnSpPr>
+          <p:cNvPr id="273" name="직선 화살표 연결선 272">
+            <a:extLst>
+              <a:ext uri="{FF2B5EF4-FFF2-40B4-BE49-F238E27FC236}">
+                <a16:creationId xmlns:a16="http://schemas.microsoft.com/office/drawing/2014/main" id="{927E796C-5C5C-16D3-6DD7-F5021E9829DE}"/>
+              </a:ext>
+            </a:extLst>
+          </p:cNvPr>
+          <p:cNvCxnSpPr>
+            <a:cxnSpLocks/>
+            <a:stCxn id="59" idx="2"/>
+            <a:endCxn id="190" idx="0"/>
+          </p:cNvCxnSpPr>
+          <p:nvPr/>
+        </p:nvCxnSpPr>
+        <p:spPr>
+          <a:xfrm>
+            <a:off x="683570" y="3528748"/>
+            <a:ext cx="5765799" cy="577779"/>
+          </a:xfrm>
+          <a:prstGeom prst="straightConnector1">
+            <a:avLst/>
+          </a:prstGeom>
+          <a:ln>
+            <a:solidFill>
+              <a:schemeClr val="accent6">
+                <a:lumMod val="75000"/>
+              </a:schemeClr>
+            </a:solidFill>
+            <a:headEnd type="triangle"/>
+            <a:tailEnd type="triangle"/>
+          </a:ln>
+        </p:spPr>
+        <p:style>
+          <a:lnRef idx="1">
+            <a:schemeClr val="accent1"/>
+          </a:lnRef>
+          <a:fillRef idx="0">
+            <a:schemeClr val="accent1"/>
+          </a:fillRef>
+          <a:effectRef idx="0">
+            <a:schemeClr val="accent1"/>
+          </a:effectRef>
+          <a:fontRef idx="minor">
+            <a:schemeClr val="tx1"/>
+          </a:fontRef>
+        </p:style>
+      </p:cxnSp>
+      <p:cxnSp>
+        <p:nvCxnSpPr>
+          <p:cNvPr id="310" name="직선 화살표 연결선 309">
+            <a:extLst>
+              <a:ext uri="{FF2B5EF4-FFF2-40B4-BE49-F238E27FC236}">
+                <a16:creationId xmlns:a16="http://schemas.microsoft.com/office/drawing/2014/main" id="{A68F5958-1C3F-7458-BE04-93336F0D4D41}"/>
+              </a:ext>
+            </a:extLst>
+          </p:cNvPr>
+          <p:cNvCxnSpPr>
+            <a:cxnSpLocks/>
+            <a:stCxn id="59" idx="2"/>
+            <a:endCxn id="191" idx="0"/>
+          </p:cNvCxnSpPr>
+          <p:nvPr/>
+        </p:nvCxnSpPr>
+        <p:spPr>
+          <a:xfrm>
+            <a:off x="683570" y="3528748"/>
+            <a:ext cx="6768751" cy="577779"/>
+          </a:xfrm>
+          <a:prstGeom prst="straightConnector1">
+            <a:avLst/>
+          </a:prstGeom>
+          <a:ln>
+            <a:solidFill>
+              <a:schemeClr val="accent6">
+                <a:lumMod val="75000"/>
+              </a:schemeClr>
+            </a:solidFill>
+            <a:headEnd type="triangle"/>
+            <a:tailEnd type="triangle"/>
+          </a:ln>
+        </p:spPr>
+        <p:style>
+          <a:lnRef idx="1">
+            <a:schemeClr val="accent1"/>
+          </a:lnRef>
+          <a:fillRef idx="0">
+            <a:schemeClr val="accent1"/>
+          </a:fillRef>
+          <a:effectRef idx="0">
+            <a:schemeClr val="accent1"/>
+          </a:effectRef>
+          <a:fontRef idx="minor">
+            <a:schemeClr val="tx1"/>
+          </a:fontRef>
+        </p:style>
+      </p:cxnSp>
+      <p:cxnSp>
+        <p:nvCxnSpPr>
+          <p:cNvPr id="311" name="직선 화살표 연결선 310">
+            <a:extLst>
+              <a:ext uri="{FF2B5EF4-FFF2-40B4-BE49-F238E27FC236}">
+                <a16:creationId xmlns:a16="http://schemas.microsoft.com/office/drawing/2014/main" id="{642FC58D-D6C6-0813-1D92-0C0819BE998F}"/>
+              </a:ext>
+            </a:extLst>
+          </p:cNvPr>
+          <p:cNvCxnSpPr>
+            <a:cxnSpLocks/>
+            <a:stCxn id="48" idx="2"/>
+            <a:endCxn id="191" idx="0"/>
+          </p:cNvCxnSpPr>
+          <p:nvPr/>
+        </p:nvCxnSpPr>
+        <p:spPr>
+          <a:xfrm>
+            <a:off x="1694261" y="3528748"/>
+            <a:ext cx="5758060" cy="577779"/>
+          </a:xfrm>
+          <a:prstGeom prst="straightConnector1">
+            <a:avLst/>
+          </a:prstGeom>
+          <a:ln>
+            <a:solidFill>
+              <a:schemeClr val="accent6">
+                <a:lumMod val="75000"/>
+              </a:schemeClr>
+            </a:solidFill>
+            <a:headEnd type="triangle"/>
+            <a:tailEnd type="triangle"/>
+          </a:ln>
+        </p:spPr>
+        <p:style>
+          <a:lnRef idx="1">
+            <a:schemeClr val="accent1"/>
+          </a:lnRef>
+          <a:fillRef idx="0">
+            <a:schemeClr val="accent1"/>
+          </a:fillRef>
+          <a:effectRef idx="0">
+            <a:schemeClr val="accent1"/>
+          </a:effectRef>
+          <a:fontRef idx="minor">
+            <a:schemeClr val="tx1"/>
+          </a:fontRef>
+        </p:style>
+      </p:cxnSp>
+      <p:cxnSp>
+        <p:nvCxnSpPr>
+          <p:cNvPr id="312" name="직선 화살표 연결선 311">
+            <a:extLst>
+              <a:ext uri="{FF2B5EF4-FFF2-40B4-BE49-F238E27FC236}">
+                <a16:creationId xmlns:a16="http://schemas.microsoft.com/office/drawing/2014/main" id="{5FA64189-E24E-6CEA-DB1D-C054CDE05944}"/>
+              </a:ext>
+            </a:extLst>
+          </p:cNvPr>
+          <p:cNvCxnSpPr>
+            <a:cxnSpLocks/>
+            <a:stCxn id="81" idx="2"/>
+            <a:endCxn id="191" idx="0"/>
+          </p:cNvCxnSpPr>
+          <p:nvPr/>
+        </p:nvCxnSpPr>
+        <p:spPr>
+          <a:xfrm>
+            <a:off x="2697213" y="3528748"/>
+            <a:ext cx="4755108" cy="577779"/>
+          </a:xfrm>
+          <a:prstGeom prst="straightConnector1">
+            <a:avLst/>
+          </a:prstGeom>
+          <a:ln>
+            <a:solidFill>
+              <a:schemeClr val="accent6">
+                <a:lumMod val="75000"/>
+              </a:schemeClr>
+            </a:solidFill>
+            <a:headEnd type="triangle"/>
+            <a:tailEnd type="triangle"/>
+          </a:ln>
+        </p:spPr>
+        <p:style>
+          <a:lnRef idx="1">
+            <a:schemeClr val="accent1"/>
+          </a:lnRef>
+          <a:fillRef idx="0">
+            <a:schemeClr val="accent1"/>
+          </a:fillRef>
+          <a:effectRef idx="0">
+            <a:schemeClr val="accent1"/>
+          </a:effectRef>
+          <a:fontRef idx="minor">
+            <a:schemeClr val="tx1"/>
+          </a:fontRef>
+        </p:style>
+      </p:cxnSp>
+      <p:cxnSp>
+        <p:nvCxnSpPr>
+          <p:cNvPr id="313" name="직선 화살표 연결선 312">
+            <a:extLst>
+              <a:ext uri="{FF2B5EF4-FFF2-40B4-BE49-F238E27FC236}">
+                <a16:creationId xmlns:a16="http://schemas.microsoft.com/office/drawing/2014/main" id="{0227B99B-56AF-2C1F-7E2D-2AEE5B3F073C}"/>
+              </a:ext>
+            </a:extLst>
+          </p:cNvPr>
+          <p:cNvCxnSpPr>
+            <a:cxnSpLocks/>
+            <a:stCxn id="80" idx="2"/>
+            <a:endCxn id="191" idx="0"/>
+          </p:cNvCxnSpPr>
+          <p:nvPr/>
+        </p:nvCxnSpPr>
+        <p:spPr>
+          <a:xfrm>
+            <a:off x="3707904" y="3528748"/>
+            <a:ext cx="3744417" cy="577779"/>
+          </a:xfrm>
+          <a:prstGeom prst="straightConnector1">
+            <a:avLst/>
+          </a:prstGeom>
+          <a:ln>
+            <a:solidFill>
+              <a:schemeClr val="accent6">
+                <a:lumMod val="75000"/>
+              </a:schemeClr>
+            </a:solidFill>
+            <a:headEnd type="triangle"/>
+            <a:tailEnd type="triangle"/>
+          </a:ln>
+        </p:spPr>
+        <p:style>
+          <a:lnRef idx="1">
+            <a:schemeClr val="accent1"/>
+          </a:lnRef>
+          <a:fillRef idx="0">
+            <a:schemeClr val="accent1"/>
+          </a:fillRef>
+          <a:effectRef idx="0">
+            <a:schemeClr val="accent1"/>
+          </a:effectRef>
+          <a:fontRef idx="minor">
+            <a:schemeClr val="tx1"/>
+          </a:fontRef>
+        </p:style>
+      </p:cxnSp>
+      <p:cxnSp>
+        <p:nvCxnSpPr>
+          <p:cNvPr id="328" name="꺾인 연결선[E] 327">
+            <a:extLst>
+              <a:ext uri="{FF2B5EF4-FFF2-40B4-BE49-F238E27FC236}">
+                <a16:creationId xmlns:a16="http://schemas.microsoft.com/office/drawing/2014/main" id="{8B6E9BE9-1FBE-FB19-8FF6-35FE4B47B8C6}"/>
+              </a:ext>
+            </a:extLst>
+          </p:cNvPr>
+          <p:cNvCxnSpPr>
+            <a:cxnSpLocks/>
+            <a:stCxn id="124" idx="2"/>
+            <a:endCxn id="132" idx="2"/>
+          </p:cNvCxnSpPr>
+          <p:nvPr/>
+        </p:nvCxnSpPr>
+        <p:spPr>
+          <a:xfrm rot="5400000" flipH="1" flipV="1">
+            <a:off x="3133129" y="3143852"/>
+            <a:ext cx="1" cy="2877739"/>
+          </a:xfrm>
+          <a:prstGeom prst="bentConnector3">
+            <a:avLst>
+              <a:gd name="adj1" fmla="val -22860000000"/>
+            </a:avLst>
+          </a:prstGeom>
+          <a:ln>
+            <a:solidFill>
+              <a:schemeClr val="accent4">
+                <a:lumMod val="75000"/>
+              </a:schemeClr>
+            </a:solidFill>
+            <a:headEnd type="triangle"/>
+            <a:tailEnd type="triangle"/>
+          </a:ln>
+        </p:spPr>
+        <p:style>
+          <a:lnRef idx="1">
+            <a:schemeClr val="accent1"/>
+          </a:lnRef>
+          <a:fillRef idx="0">
+            <a:schemeClr val="accent1"/>
+          </a:fillRef>
+          <a:effectRef idx="0">
+            <a:schemeClr val="accent1"/>
+          </a:effectRef>
+          <a:fontRef idx="minor">
+            <a:schemeClr val="tx1"/>
+          </a:fontRef>
+        </p:style>
+      </p:cxnSp>
+      <p:cxnSp>
+        <p:nvCxnSpPr>
+          <p:cNvPr id="343" name="꺾인 연결선[E] 342">
+            <a:extLst>
+              <a:ext uri="{FF2B5EF4-FFF2-40B4-BE49-F238E27FC236}">
+                <a16:creationId xmlns:a16="http://schemas.microsoft.com/office/drawing/2014/main" id="{CE9A37AD-7A7E-E07C-2C35-151C30013DBD}"/>
+              </a:ext>
+            </a:extLst>
+          </p:cNvPr>
+          <p:cNvCxnSpPr>
+            <a:cxnSpLocks/>
+            <a:stCxn id="125" idx="2"/>
+            <a:endCxn id="132" idx="2"/>
+          </p:cNvCxnSpPr>
+          <p:nvPr/>
+        </p:nvCxnSpPr>
+        <p:spPr>
+          <a:xfrm rot="5400000" flipH="1" flipV="1">
+            <a:off x="3634605" y="3645328"/>
+            <a:ext cx="1" cy="1874787"/>
+          </a:xfrm>
+          <a:prstGeom prst="bentConnector3">
+            <a:avLst>
+              <a:gd name="adj1" fmla="val -22860000000"/>
+            </a:avLst>
+          </a:prstGeom>
+          <a:ln>
+            <a:solidFill>
+              <a:schemeClr val="accent4">
+                <a:lumMod val="75000"/>
+              </a:schemeClr>
+            </a:solidFill>
+            <a:headEnd type="triangle"/>
+            <a:tailEnd type="triangle"/>
+          </a:ln>
+        </p:spPr>
+        <p:style>
+          <a:lnRef idx="1">
+            <a:schemeClr val="accent1"/>
+          </a:lnRef>
+          <a:fillRef idx="0">
+            <a:schemeClr val="accent1"/>
+          </a:fillRef>
+          <a:effectRef idx="0">
+            <a:schemeClr val="accent1"/>
+          </a:effectRef>
+          <a:fontRef idx="minor">
+            <a:schemeClr val="tx1"/>
+          </a:fontRef>
+        </p:style>
+      </p:cxnSp>
+      <p:cxnSp>
+        <p:nvCxnSpPr>
+          <p:cNvPr id="346" name="꺾인 연결선[E] 345">
+            <a:extLst>
+              <a:ext uri="{FF2B5EF4-FFF2-40B4-BE49-F238E27FC236}">
+                <a16:creationId xmlns:a16="http://schemas.microsoft.com/office/drawing/2014/main" id="{5175B75C-D472-D7F9-24B9-DDEFE627CF75}"/>
+              </a:ext>
+            </a:extLst>
+          </p:cNvPr>
+          <p:cNvCxnSpPr>
+            <a:cxnSpLocks/>
+            <a:stCxn id="132" idx="2"/>
+            <a:endCxn id="191" idx="2"/>
+          </p:cNvCxnSpPr>
+          <p:nvPr/>
+        </p:nvCxnSpPr>
+        <p:spPr>
+          <a:xfrm rot="16200000" flipH="1">
+            <a:off x="6012160" y="3142560"/>
+            <a:ext cx="1" cy="2880321"/>
+          </a:xfrm>
+          <a:prstGeom prst="bentConnector3">
+            <a:avLst>
+              <a:gd name="adj1" fmla="val 22860100000"/>
+            </a:avLst>
+          </a:prstGeom>
+          <a:ln>
+            <a:solidFill>
+              <a:schemeClr val="accent4">
+                <a:lumMod val="75000"/>
+              </a:schemeClr>
+            </a:solidFill>
+            <a:headEnd type="triangle"/>
+            <a:tailEnd type="triangle"/>
+          </a:ln>
+        </p:spPr>
+        <p:style>
+          <a:lnRef idx="1">
+            <a:schemeClr val="accent1"/>
+          </a:lnRef>
+          <a:fillRef idx="0">
+            <a:schemeClr val="accent1"/>
+          </a:fillRef>
+          <a:effectRef idx="0">
+            <a:schemeClr val="accent1"/>
+          </a:effectRef>
+          <a:fontRef idx="minor">
+            <a:schemeClr val="tx1"/>
+          </a:fontRef>
+        </p:style>
+      </p:cxnSp>
+      <p:cxnSp>
+        <p:nvCxnSpPr>
+          <p:cNvPr id="349" name="꺾인 연결선[E] 348">
+            <a:extLst>
+              <a:ext uri="{FF2B5EF4-FFF2-40B4-BE49-F238E27FC236}">
+                <a16:creationId xmlns:a16="http://schemas.microsoft.com/office/drawing/2014/main" id="{27147BD8-1679-1715-41E9-19BFD4243264}"/>
+              </a:ext>
+            </a:extLst>
+          </p:cNvPr>
+          <p:cNvCxnSpPr>
+            <a:cxnSpLocks/>
+            <a:stCxn id="132" idx="2"/>
+            <a:endCxn id="190" idx="2"/>
+          </p:cNvCxnSpPr>
+          <p:nvPr/>
+        </p:nvCxnSpPr>
+        <p:spPr>
+          <a:xfrm rot="16200000" flipH="1">
+            <a:off x="5510684" y="3644036"/>
+            <a:ext cx="1" cy="1877369"/>
+          </a:xfrm>
+          <a:prstGeom prst="bentConnector3">
+            <a:avLst>
+              <a:gd name="adj1" fmla="val 22860100000"/>
+            </a:avLst>
+          </a:prstGeom>
+          <a:ln>
+            <a:solidFill>
+              <a:schemeClr val="accent4">
+                <a:lumMod val="75000"/>
+              </a:schemeClr>
+            </a:solidFill>
+            <a:headEnd type="triangle"/>
+            <a:tailEnd type="triangle"/>
+          </a:ln>
+        </p:spPr>
+        <p:style>
+          <a:lnRef idx="1">
+            <a:schemeClr val="accent1"/>
+          </a:lnRef>
+          <a:fillRef idx="0">
+            <a:schemeClr val="accent1"/>
+          </a:fillRef>
+          <a:effectRef idx="0">
+            <a:schemeClr val="accent1"/>
+          </a:effectRef>
+          <a:fontRef idx="minor">
+            <a:schemeClr val="tx1"/>
+          </a:fontRef>
+        </p:style>
+      </p:cxnSp>
+      <p:cxnSp>
+        <p:nvCxnSpPr>
+          <p:cNvPr id="352" name="직선 화살표 연결선 351">
+            <a:extLst>
+              <a:ext uri="{FF2B5EF4-FFF2-40B4-BE49-F238E27FC236}">
+                <a16:creationId xmlns:a16="http://schemas.microsoft.com/office/drawing/2014/main" id="{0EE67D80-7FAB-431E-A7E4-B9487D3DB3B9}"/>
+              </a:ext>
+            </a:extLst>
+          </p:cNvPr>
+          <p:cNvCxnSpPr>
+            <a:cxnSpLocks/>
+          </p:cNvCxnSpPr>
+          <p:nvPr/>
+        </p:nvCxnSpPr>
+        <p:spPr>
+          <a:xfrm flipH="1">
+            <a:off x="2555777" y="1419622"/>
+            <a:ext cx="4035028" cy="0"/>
+          </a:xfrm>
+          <a:prstGeom prst="straightConnector1">
+            <a:avLst/>
+          </a:prstGeom>
+          <a:ln>
+            <a:solidFill>
+              <a:schemeClr val="accent5">
+                <a:lumMod val="75000"/>
+              </a:schemeClr>
+            </a:solidFill>
+            <a:headEnd type="triangle"/>
+            <a:tailEnd type="triangle"/>
+          </a:ln>
+        </p:spPr>
+        <p:style>
+          <a:lnRef idx="1">
+            <a:schemeClr val="accent1"/>
+          </a:lnRef>
+          <a:fillRef idx="0">
+            <a:schemeClr val="accent1"/>
+          </a:fillRef>
+          <a:effectRef idx="0">
+            <a:schemeClr val="accent1"/>
+          </a:effectRef>
+          <a:fontRef idx="minor">
+            <a:schemeClr val="tx1"/>
+          </a:fontRef>
+        </p:style>
+      </p:cxnSp>
+      <p:sp>
+        <p:nvSpPr>
+          <p:cNvPr id="356" name="직사각형 355">
+            <a:extLst>
+              <a:ext uri="{FF2B5EF4-FFF2-40B4-BE49-F238E27FC236}">
+                <a16:creationId xmlns:a16="http://schemas.microsoft.com/office/drawing/2014/main" id="{DB40F373-6B01-DA9E-9BC6-B3A70C9CDC3F}"/>
+              </a:ext>
+            </a:extLst>
+          </p:cNvPr>
+          <p:cNvSpPr/>
+          <p:nvPr/>
+        </p:nvSpPr>
+        <p:spPr>
+          <a:xfrm>
+            <a:off x="5438677" y="1552200"/>
+            <a:ext cx="720080" cy="476195"/>
+          </a:xfrm>
+          <a:prstGeom prst="rect">
+            <a:avLst/>
+          </a:prstGeom>
+          <a:solidFill>
+            <a:schemeClr val="accent2">
+              <a:lumMod val="20000"/>
+              <a:lumOff val="80000"/>
+            </a:schemeClr>
+          </a:solidFill>
+          <a:ln w="12700"/>
+        </p:spPr>
+        <p:style>
+          <a:lnRef idx="2">
+            <a:schemeClr val="accent1">
+              <a:shade val="15000"/>
+            </a:schemeClr>
+          </a:lnRef>
+          <a:fillRef idx="1">
+            <a:schemeClr val="accent1"/>
+          </a:fillRef>
+          <a:effectRef idx="0">
+            <a:schemeClr val="accent1"/>
+          </a:effectRef>
+          <a:fontRef idx="minor">
+            <a:schemeClr val="lt1"/>
+          </a:fontRef>
+        </p:style>
+        <p:txBody>
+          <a:bodyPr rtlCol="0" anchor="ctr"/>
+          <a:lstStyle/>
+          <a:p>
+            <a:pPr algn="ctr"/>
+            <a:r>
+              <a:rPr kumimoji="1" lang="en-US" altLang="ko-KR" sz="800">
+                <a:solidFill>
+                  <a:schemeClr val="tx1"/>
+                </a:solidFill>
+              </a:rPr>
+              <a:t>100 Gbe</a:t>
+            </a:r>
+          </a:p>
+        </p:txBody>
+      </p:sp>
+      <p:cxnSp>
+        <p:nvCxnSpPr>
+          <p:cNvPr id="357" name="직선 화살표 연결선 356">
+            <a:extLst>
+              <a:ext uri="{FF2B5EF4-FFF2-40B4-BE49-F238E27FC236}">
+                <a16:creationId xmlns:a16="http://schemas.microsoft.com/office/drawing/2014/main" id="{90531898-BAB7-732A-BD1E-F4FC2B6CF15E}"/>
+              </a:ext>
+            </a:extLst>
+          </p:cNvPr>
+          <p:cNvCxnSpPr>
+            <a:cxnSpLocks/>
+            <a:stCxn id="169" idx="1"/>
+            <a:endCxn id="356" idx="3"/>
+          </p:cNvCxnSpPr>
+          <p:nvPr/>
+        </p:nvCxnSpPr>
+        <p:spPr>
+          <a:xfrm flipH="1">
+            <a:off x="6158757" y="1569478"/>
+            <a:ext cx="432048" cy="220820"/>
+          </a:xfrm>
+          <a:prstGeom prst="straightConnector1">
+            <a:avLst/>
+          </a:prstGeom>
+          <a:ln>
+            <a:solidFill>
+              <a:schemeClr val="accent4">
+                <a:lumMod val="75000"/>
+              </a:schemeClr>
+            </a:solidFill>
+            <a:headEnd type="triangle"/>
+            <a:tailEnd type="triangle"/>
+          </a:ln>
+        </p:spPr>
+        <p:style>
+          <a:lnRef idx="1">
+            <a:schemeClr val="accent1"/>
+          </a:lnRef>
+          <a:fillRef idx="0">
+            <a:schemeClr val="accent1"/>
+          </a:fillRef>
+          <a:effectRef idx="0">
+            <a:schemeClr val="accent1"/>
+          </a:effectRef>
+          <a:fontRef idx="minor">
+            <a:schemeClr val="tx1"/>
+          </a:fontRef>
+        </p:style>
+      </p:cxnSp>
     </p:spTree>
     <p:extLst>
       <p:ext uri="{BB962C8B-B14F-4D97-AF65-F5344CB8AC3E}">

--- a/content/docs/theory-analysis/nvidia-gpu-architecture/images/images.pptx
+++ b/content/docs/theory-analysis/nvidia-gpu-architecture/images/images.pptx
@@ -32189,6 +32189,258 @@
           </a:fontRef>
         </p:style>
       </p:cxnSp>
+      <p:cxnSp>
+        <p:nvCxnSpPr>
+          <p:cNvPr id="361" name="직선 화살표 연결선 360">
+            <a:extLst>
+              <a:ext uri="{FF2B5EF4-FFF2-40B4-BE49-F238E27FC236}">
+                <a16:creationId xmlns:a16="http://schemas.microsoft.com/office/drawing/2014/main" id="{63EC23AD-A7F9-7EB2-A05C-B11406C91608}"/>
+              </a:ext>
+            </a:extLst>
+          </p:cNvPr>
+          <p:cNvCxnSpPr>
+            <a:cxnSpLocks/>
+            <a:endCxn id="366" idx="1"/>
+          </p:cNvCxnSpPr>
+          <p:nvPr/>
+        </p:nvCxnSpPr>
+        <p:spPr>
+          <a:xfrm>
+            <a:off x="1653075" y="242130"/>
+            <a:ext cx="510576" cy="0"/>
+          </a:xfrm>
+          <a:prstGeom prst="straightConnector1">
+            <a:avLst/>
+          </a:prstGeom>
+          <a:ln>
+            <a:solidFill>
+              <a:schemeClr val="accent6">
+                <a:lumMod val="75000"/>
+              </a:schemeClr>
+            </a:solidFill>
+            <a:headEnd type="triangle"/>
+            <a:tailEnd type="triangle"/>
+          </a:ln>
+        </p:spPr>
+        <p:style>
+          <a:lnRef idx="1">
+            <a:schemeClr val="accent1"/>
+          </a:lnRef>
+          <a:fillRef idx="0">
+            <a:schemeClr val="accent1"/>
+          </a:fillRef>
+          <a:effectRef idx="0">
+            <a:schemeClr val="accent1"/>
+          </a:effectRef>
+          <a:fontRef idx="minor">
+            <a:schemeClr val="tx1"/>
+          </a:fontRef>
+        </p:style>
+      </p:cxnSp>
+      <p:sp>
+        <p:nvSpPr>
+          <p:cNvPr id="366" name="TextBox 365">
+            <a:extLst>
+              <a:ext uri="{FF2B5EF4-FFF2-40B4-BE49-F238E27FC236}">
+                <a16:creationId xmlns:a16="http://schemas.microsoft.com/office/drawing/2014/main" id="{6A630829-B057-588C-F2E2-CB97A2419CA0}"/>
+              </a:ext>
+            </a:extLst>
+          </p:cNvPr>
+          <p:cNvSpPr txBox="1"/>
+          <p:nvPr/>
+        </p:nvSpPr>
+        <p:spPr>
+          <a:xfrm>
+            <a:off x="2163651" y="134408"/>
+            <a:ext cx="514885" cy="215444"/>
+          </a:xfrm>
+          <a:prstGeom prst="rect">
+            <a:avLst/>
+          </a:prstGeom>
+          <a:noFill/>
+        </p:spPr>
+        <p:txBody>
+          <a:bodyPr wrap="square" rtlCol="0">
+            <a:spAutoFit/>
+          </a:bodyPr>
+          <a:lstStyle/>
+          <a:p>
+            <a:r>
+              <a:rPr kumimoji="1" lang="en-US" altLang="ko-KR" sz="800"/>
+              <a:t>NVLink</a:t>
+            </a:r>
+            <a:endParaRPr kumimoji="1" lang="ko-KR" altLang="en-US" sz="800"/>
+          </a:p>
+        </p:txBody>
+      </p:sp>
+      <p:cxnSp>
+        <p:nvCxnSpPr>
+          <p:cNvPr id="372" name="직선 화살표 연결선 371">
+            <a:extLst>
+              <a:ext uri="{FF2B5EF4-FFF2-40B4-BE49-F238E27FC236}">
+                <a16:creationId xmlns:a16="http://schemas.microsoft.com/office/drawing/2014/main" id="{78BF1B84-BE3A-3A91-E80A-B5067835EACB}"/>
+              </a:ext>
+            </a:extLst>
+          </p:cNvPr>
+          <p:cNvCxnSpPr>
+            <a:cxnSpLocks/>
+            <a:endCxn id="373" idx="1"/>
+          </p:cNvCxnSpPr>
+          <p:nvPr/>
+        </p:nvCxnSpPr>
+        <p:spPr>
+          <a:xfrm>
+            <a:off x="459528" y="242130"/>
+            <a:ext cx="510576" cy="0"/>
+          </a:xfrm>
+          <a:prstGeom prst="straightConnector1">
+            <a:avLst/>
+          </a:prstGeom>
+          <a:ln>
+            <a:solidFill>
+              <a:schemeClr val="accent4">
+                <a:lumMod val="75000"/>
+              </a:schemeClr>
+            </a:solidFill>
+            <a:headEnd type="triangle"/>
+            <a:tailEnd type="triangle"/>
+          </a:ln>
+        </p:spPr>
+        <p:style>
+          <a:lnRef idx="1">
+            <a:schemeClr val="accent1"/>
+          </a:lnRef>
+          <a:fillRef idx="0">
+            <a:schemeClr val="accent1"/>
+          </a:fillRef>
+          <a:effectRef idx="0">
+            <a:schemeClr val="accent1"/>
+          </a:effectRef>
+          <a:fontRef idx="minor">
+            <a:schemeClr val="tx1"/>
+          </a:fontRef>
+        </p:style>
+      </p:cxnSp>
+      <p:sp>
+        <p:nvSpPr>
+          <p:cNvPr id="373" name="TextBox 372">
+            <a:extLst>
+              <a:ext uri="{FF2B5EF4-FFF2-40B4-BE49-F238E27FC236}">
+                <a16:creationId xmlns:a16="http://schemas.microsoft.com/office/drawing/2014/main" id="{A8CFEF76-B2BC-1E1D-14FE-9244CD80FA12}"/>
+              </a:ext>
+            </a:extLst>
+          </p:cNvPr>
+          <p:cNvSpPr txBox="1"/>
+          <p:nvPr/>
+        </p:nvSpPr>
+        <p:spPr>
+          <a:xfrm>
+            <a:off x="970104" y="134408"/>
+            <a:ext cx="514885" cy="215444"/>
+          </a:xfrm>
+          <a:prstGeom prst="rect">
+            <a:avLst/>
+          </a:prstGeom>
+          <a:noFill/>
+        </p:spPr>
+        <p:txBody>
+          <a:bodyPr wrap="square" rtlCol="0">
+            <a:spAutoFit/>
+          </a:bodyPr>
+          <a:lstStyle/>
+          <a:p>
+            <a:r>
+              <a:rPr kumimoji="1" lang="en-US" altLang="ko-KR" sz="800"/>
+              <a:t>PCIe</a:t>
+            </a:r>
+            <a:endParaRPr kumimoji="1" lang="ko-KR" altLang="en-US" sz="800"/>
+          </a:p>
+        </p:txBody>
+      </p:sp>
+      <p:cxnSp>
+        <p:nvCxnSpPr>
+          <p:cNvPr id="374" name="직선 화살표 연결선 373">
+            <a:extLst>
+              <a:ext uri="{FF2B5EF4-FFF2-40B4-BE49-F238E27FC236}">
+                <a16:creationId xmlns:a16="http://schemas.microsoft.com/office/drawing/2014/main" id="{7CB5C1E0-C318-9CBC-74C3-2D6294CC56AE}"/>
+              </a:ext>
+            </a:extLst>
+          </p:cNvPr>
+          <p:cNvCxnSpPr>
+            <a:cxnSpLocks/>
+            <a:endCxn id="375" idx="1"/>
+          </p:cNvCxnSpPr>
+          <p:nvPr/>
+        </p:nvCxnSpPr>
+        <p:spPr>
+          <a:xfrm>
+            <a:off x="2867876" y="242130"/>
+            <a:ext cx="510576" cy="0"/>
+          </a:xfrm>
+          <a:prstGeom prst="straightConnector1">
+            <a:avLst/>
+          </a:prstGeom>
+          <a:ln>
+            <a:solidFill>
+              <a:schemeClr val="accent5">
+                <a:lumMod val="75000"/>
+              </a:schemeClr>
+            </a:solidFill>
+            <a:headEnd type="triangle"/>
+            <a:tailEnd type="triangle"/>
+          </a:ln>
+        </p:spPr>
+        <p:style>
+          <a:lnRef idx="1">
+            <a:schemeClr val="accent1"/>
+          </a:lnRef>
+          <a:fillRef idx="0">
+            <a:schemeClr val="accent1"/>
+          </a:fillRef>
+          <a:effectRef idx="0">
+            <a:schemeClr val="accent1"/>
+          </a:effectRef>
+          <a:fontRef idx="minor">
+            <a:schemeClr val="tx1"/>
+          </a:fontRef>
+        </p:style>
+      </p:cxnSp>
+      <p:sp>
+        <p:nvSpPr>
+          <p:cNvPr id="375" name="TextBox 374">
+            <a:extLst>
+              <a:ext uri="{FF2B5EF4-FFF2-40B4-BE49-F238E27FC236}">
+                <a16:creationId xmlns:a16="http://schemas.microsoft.com/office/drawing/2014/main" id="{D6548A1E-69CC-B750-53A8-240E7D170D10}"/>
+              </a:ext>
+            </a:extLst>
+          </p:cNvPr>
+          <p:cNvSpPr txBox="1"/>
+          <p:nvPr/>
+        </p:nvSpPr>
+        <p:spPr>
+          <a:xfrm>
+            <a:off x="3378452" y="134408"/>
+            <a:ext cx="514885" cy="215444"/>
+          </a:xfrm>
+          <a:prstGeom prst="rect">
+            <a:avLst/>
+          </a:prstGeom>
+          <a:noFill/>
+        </p:spPr>
+        <p:txBody>
+          <a:bodyPr wrap="square" rtlCol="0">
+            <a:spAutoFit/>
+          </a:bodyPr>
+          <a:lstStyle/>
+          <a:p>
+            <a:r>
+              <a:rPr kumimoji="1" lang="en-US" altLang="ko-KR" sz="800"/>
+              <a:t>UPI</a:t>
+            </a:r>
+            <a:endParaRPr kumimoji="1" lang="ko-KR" altLang="en-US" sz="800"/>
+          </a:p>
+        </p:txBody>
+      </p:sp>
     </p:spTree>
     <p:extLst>
       <p:ext uri="{BB962C8B-B14F-4D97-AF65-F5344CB8AC3E}">

--- a/content/docs/theory-analysis/nvidia-gpu-architecture/images/images.pptx
+++ b/content/docs/theory-analysis/nvidia-gpu-architecture/images/images.pptx
@@ -218,7 +218,7 @@
           <a:p>
             <a:fld id="{6CD5550B-26C4-49A9-A5BA-636EF7BE6CE9}" type="datetimeFigureOut">
               <a:rPr lang="ko-KR" altLang="en-US" smtClean="0"/>
-              <a:t>2026. 3. 18.</a:t>
+              <a:t>2026. 3. 21.</a:t>
             </a:fld>
             <a:endParaRPr lang="ko-KR" altLang="en-US"/>
           </a:p>
@@ -832,7 +832,7 @@
           <a:p>
             <a:fld id="{FB30EDBD-1C2D-4C1E-B459-B60219FAB484}" type="datetimeFigureOut">
               <a:rPr lang="ko-KR" altLang="en-US" smtClean="0"/>
-              <a:t>2026. 3. 19.</a:t>
+              <a:t>2026. 3. 21.</a:t>
             </a:fld>
             <a:endParaRPr lang="ko-KR" altLang="en-US"/>
           </a:p>
@@ -995,7 +995,7 @@
           <a:p>
             <a:fld id="{FB30EDBD-1C2D-4C1E-B459-B60219FAB484}" type="datetimeFigureOut">
               <a:rPr lang="ko-KR" altLang="en-US" smtClean="0"/>
-              <a:t>2026. 3. 19.</a:t>
+              <a:t>2026. 3. 21.</a:t>
             </a:fld>
             <a:endParaRPr lang="ko-KR" altLang="en-US"/>
           </a:p>
@@ -1168,7 +1168,7 @@
           <a:p>
             <a:fld id="{FB30EDBD-1C2D-4C1E-B459-B60219FAB484}" type="datetimeFigureOut">
               <a:rPr lang="ko-KR" altLang="en-US" smtClean="0"/>
-              <a:t>2026. 3. 19.</a:t>
+              <a:t>2026. 3. 21.</a:t>
             </a:fld>
             <a:endParaRPr lang="ko-KR" altLang="en-US"/>
           </a:p>
@@ -1331,7 +1331,7 @@
           <a:p>
             <a:fld id="{FB30EDBD-1C2D-4C1E-B459-B60219FAB484}" type="datetimeFigureOut">
               <a:rPr lang="ko-KR" altLang="en-US" smtClean="0"/>
-              <a:t>2026. 3. 18.</a:t>
+              <a:t>2026. 3. 21.</a:t>
             </a:fld>
             <a:endParaRPr lang="ko-KR" altLang="en-US"/>
           </a:p>
@@ -1571,7 +1571,7 @@
           <a:p>
             <a:fld id="{FB30EDBD-1C2D-4C1E-B459-B60219FAB484}" type="datetimeFigureOut">
               <a:rPr lang="ko-KR" altLang="en-US" smtClean="0"/>
-              <a:t>2026. 3. 19.</a:t>
+              <a:t>2026. 3. 21.</a:t>
             </a:fld>
             <a:endParaRPr lang="ko-KR" altLang="en-US"/>
           </a:p>
@@ -1851,7 +1851,7 @@
           <a:p>
             <a:fld id="{FB30EDBD-1C2D-4C1E-B459-B60219FAB484}" type="datetimeFigureOut">
               <a:rPr lang="ko-KR" altLang="en-US" smtClean="0"/>
-              <a:t>2026. 3. 19.</a:t>
+              <a:t>2026. 3. 21.</a:t>
             </a:fld>
             <a:endParaRPr lang="ko-KR" altLang="en-US"/>
           </a:p>
@@ -2265,7 +2265,7 @@
           <a:p>
             <a:fld id="{FB30EDBD-1C2D-4C1E-B459-B60219FAB484}" type="datetimeFigureOut">
               <a:rPr lang="ko-KR" altLang="en-US" smtClean="0"/>
-              <a:t>2026. 3. 19.</a:t>
+              <a:t>2026. 3. 21.</a:t>
             </a:fld>
             <a:endParaRPr lang="ko-KR" altLang="en-US"/>
           </a:p>
@@ -2377,7 +2377,7 @@
           <a:p>
             <a:fld id="{FB30EDBD-1C2D-4C1E-B459-B60219FAB484}" type="datetimeFigureOut">
               <a:rPr lang="ko-KR" altLang="en-US" smtClean="0"/>
-              <a:t>2026. 3. 19.</a:t>
+              <a:t>2026. 3. 21.</a:t>
             </a:fld>
             <a:endParaRPr lang="ko-KR" altLang="en-US"/>
           </a:p>
@@ -2467,7 +2467,7 @@
           <a:p>
             <a:fld id="{FB30EDBD-1C2D-4C1E-B459-B60219FAB484}" type="datetimeFigureOut">
               <a:rPr lang="ko-KR" altLang="en-US" smtClean="0"/>
-              <a:t>2026. 3. 18.</a:t>
+              <a:t>2026. 3. 21.</a:t>
             </a:fld>
             <a:endParaRPr lang="ko-KR" altLang="en-US"/>
           </a:p>
@@ -2737,7 +2737,7 @@
           <a:p>
             <a:fld id="{FB30EDBD-1C2D-4C1E-B459-B60219FAB484}" type="datetimeFigureOut">
               <a:rPr lang="ko-KR" altLang="en-US" smtClean="0"/>
-              <a:t>2026. 3. 19.</a:t>
+              <a:t>2026. 3. 21.</a:t>
             </a:fld>
             <a:endParaRPr lang="ko-KR" altLang="en-US"/>
           </a:p>
@@ -2984,7 +2984,7 @@
           <a:p>
             <a:fld id="{FB30EDBD-1C2D-4C1E-B459-B60219FAB484}" type="datetimeFigureOut">
               <a:rPr lang="ko-KR" altLang="en-US" smtClean="0"/>
-              <a:t>2026. 3. 19.</a:t>
+              <a:t>2026. 3. 21.</a:t>
             </a:fld>
             <a:endParaRPr lang="ko-KR" altLang="en-US"/>
           </a:p>
@@ -3190,7 +3190,7 @@
           <a:p>
             <a:fld id="{FB30EDBD-1C2D-4C1E-B459-B60219FAB484}" type="datetimeFigureOut">
               <a:rPr lang="ko-KR" altLang="en-US" smtClean="0"/>
-              <a:t>2026. 3. 18.</a:t>
+              <a:t>2026. 3. 21.</a:t>
             </a:fld>
             <a:endParaRPr lang="ko-KR" altLang="en-US"/>
           </a:p>
@@ -10438,7 +10438,7 @@
                   <a:schemeClr val="tx1"/>
                 </a:solidFill>
               </a:rPr>
-              <a:t>Sub-Core</a:t>
+              <a:t>Sub-core</a:t>
             </a:r>
             <a:endParaRPr kumimoji="1" lang="ko-KR" altLang="en-US" sz="700">
               <a:solidFill>
@@ -10828,7 +10828,7 @@
                   <a:schemeClr val="tx1"/>
                 </a:solidFill>
               </a:rPr>
-              <a:t>Sub-Core</a:t>
+              <a:t>Sub-core</a:t>
             </a:r>
             <a:endParaRPr kumimoji="1" lang="ko-KR" altLang="en-US" sz="700">
               <a:solidFill>
@@ -10893,7 +10893,7 @@
                   <a:schemeClr val="tx1"/>
                 </a:solidFill>
               </a:rPr>
-              <a:t>Sub-Core</a:t>
+              <a:t>Sub-core</a:t>
             </a:r>
             <a:endParaRPr kumimoji="1" lang="ko-KR" altLang="en-US" sz="700">
               <a:solidFill>
@@ -10958,7 +10958,7 @@
                   <a:schemeClr val="tx1"/>
                 </a:solidFill>
               </a:rPr>
-              <a:t>Sub-Core</a:t>
+              <a:t>Sub-core</a:t>
             </a:r>
             <a:endParaRPr kumimoji="1" lang="ko-KR" altLang="en-US" sz="700">
               <a:solidFill>
@@ -29478,7 +29478,7 @@
                   <a:schemeClr val="tx1"/>
                 </a:solidFill>
               </a:rPr>
-              <a:t>CPU 0</a:t>
+              <a:t>CPU 1</a:t>
             </a:r>
             <a:endParaRPr kumimoji="1" lang="ko-KR" altLang="en-US" sz="800">
               <a:solidFill>
@@ -32135,7 +32135,7 @@
                   <a:schemeClr val="tx1"/>
                 </a:solidFill>
               </a:rPr>
-              <a:t>100 Gbe</a:t>
+              <a:t>100 GbE</a:t>
             </a:r>
           </a:p>
         </p:txBody>

--- a/content/docs/theory-analysis/nvidia-gpu-architecture/images/images.pptx
+++ b/content/docs/theory-analysis/nvidia-gpu-architecture/images/images.pptx
@@ -4242,7 +4242,7 @@
                   <a:schemeClr val="tx1"/>
                 </a:solidFill>
               </a:rPr>
-              <a:t>High-Speed Hub</a:t>
+              <a:t>High-speed Hub</a:t>
             </a:r>
             <a:endParaRPr kumimoji="1" lang="ko-KR" altLang="en-US" sz="700">
               <a:solidFill>
